--- a/Portofolio-Analisis-Ecommerce-Olist.pptx
+++ b/Portofolio-Analisis-Ecommerce-Olist.pptx
@@ -3107,17 +3107,267 @@
       <p:grpSpPr/>
       <p:sp>
         <p:nvSpPr>
-          <p:cNvPr id="2" name="Rectangle 1"/>
-          <p:cNvSpPr/>
-          <p:nvPr/>
-        </p:nvSpPr>
-        <p:spPr>
-          <a:xfrm>
-            <a:off x="7406640" y="0"/>
-            <a:ext cx="4785055" cy="6858000"/>
+          <p:cNvPr id="2" name="TextBox 1"/>
+          <p:cNvSpPr txBox="1"/>
+          <p:nvPr/>
+        </p:nvSpPr>
+        <p:spPr>
+          <a:xfrm>
+            <a:off x="502920" y="868680"/>
+            <a:ext cx="6400800" cy="2011680"/>
           </a:xfrm>
           <a:prstGeom prst="rect">
             <a:avLst/>
+          </a:prstGeom>
+          <a:noFill/>
+        </p:spPr>
+        <p:txBody>
+          <a:bodyPr wrap="square" anchor="t" lIns="0" rIns="0" tIns="0" bIns="0">
+            <a:spAutoFit/>
+          </a:bodyPr>
+          <a:lstStyle/>
+          <a:p>
+            <a:pPr>
+              <a:lnSpc>
+                <a:spcPct val="105000"/>
+              </a:lnSpc>
+              <a:spcBef>
+                <a:spcPts val="0"/>
+              </a:spcBef>
+              <a:spcAft>
+                <a:spcPts val="0"/>
+              </a:spcAft>
+            </a:pPr>
+            <a:r>
+              <a:rPr sz="3800" b="1">
+                <a:solidFill>
+                  <a:srgbClr val="33231C"/>
+                </a:solidFill>
+                <a:latin typeface="Liberation Serif"/>
+              </a:rPr>
+              <a:t>Analisis E-Commerce</a:t>
+            </a:r>
+          </a:p>
+          <a:p>
+            <a:pPr>
+              <a:lnSpc>
+                <a:spcPct val="105000"/>
+              </a:lnSpc>
+              <a:spcBef>
+                <a:spcPts val="0"/>
+              </a:spcBef>
+              <a:spcAft>
+                <a:spcPts val="0"/>
+              </a:spcAft>
+            </a:pPr>
+            <a:r>
+              <a:rPr sz="3800" b="1">
+                <a:solidFill>
+                  <a:srgbClr val="A34A38"/>
+                </a:solidFill>
+                <a:latin typeface="Liberation Serif"/>
+              </a:rPr>
+              <a:t>Olist Brasil</a:t>
+            </a:r>
+          </a:p>
+        </p:txBody>
+      </p:sp>
+      <p:sp>
+        <p:nvSpPr>
+          <p:cNvPr id="3" name="TextBox 2"/>
+          <p:cNvSpPr txBox="1"/>
+          <p:nvPr/>
+        </p:nvSpPr>
+        <p:spPr>
+          <a:xfrm>
+            <a:off x="502920" y="2606040"/>
+            <a:ext cx="5852160" cy="1188720"/>
+          </a:xfrm>
+          <a:prstGeom prst="rect">
+            <a:avLst/>
+          </a:prstGeom>
+          <a:noFill/>
+        </p:spPr>
+        <p:txBody>
+          <a:bodyPr wrap="square" anchor="t" lIns="0" rIns="0" tIns="0" bIns="0">
+            <a:spAutoFit/>
+          </a:bodyPr>
+          <a:lstStyle/>
+          <a:p>
+            <a:pPr>
+              <a:lnSpc>
+                <a:spcPct val="113000"/>
+              </a:lnSpc>
+              <a:spcBef>
+                <a:spcPts val="0"/>
+              </a:spcBef>
+              <a:spcAft>
+                <a:spcPts val="0"/>
+              </a:spcAft>
+            </a:pPr>
+            <a:r>
+              <a:rPr sz="1750" b="0">
+                <a:solidFill>
+                  <a:srgbClr val="33231C"/>
+                </a:solidFill>
+                <a:latin typeface="Noto Sans"/>
+              </a:rPr>
+              <a:t>Revenue, kategori produk, pengiriman, seller, dan retensi dari 99.441 order.</a:t>
+            </a:r>
+          </a:p>
+        </p:txBody>
+      </p:sp>
+      <p:sp>
+        <p:nvSpPr>
+          <p:cNvPr id="4" name="TextBox 3"/>
+          <p:cNvSpPr txBox="1"/>
+          <p:nvPr/>
+        </p:nvSpPr>
+        <p:spPr>
+          <a:xfrm>
+            <a:off x="502920" y="4114800"/>
+            <a:ext cx="5943600" cy="914400"/>
+          </a:xfrm>
+          <a:prstGeom prst="rect">
+            <a:avLst/>
+          </a:prstGeom>
+          <a:noFill/>
+        </p:spPr>
+        <p:txBody>
+          <a:bodyPr wrap="square" anchor="t" lIns="0" rIns="0" tIns="0" bIns="0">
+            <a:spAutoFit/>
+          </a:bodyPr>
+          <a:lstStyle/>
+          <a:p>
+            <a:pPr>
+              <a:lnSpc>
+                <a:spcPct val="113000"/>
+              </a:lnSpc>
+              <a:spcBef>
+                <a:spcPts val="0"/>
+              </a:spcBef>
+              <a:spcAft>
+                <a:spcPts val="0"/>
+              </a:spcAft>
+            </a:pPr>
+            <a:r>
+              <a:rPr sz="1300" b="0">
+                <a:solidFill>
+                  <a:srgbClr val="33231C"/>
+                </a:solidFill>
+                <a:latin typeface="Noto Sans"/>
+              </a:rPr>
+              <a:t>Brazilian Ecommerce Public Dataset by Olist, periode September 2016 sampai Agustus 2018, dianalisis dengan SQL dan Python.</a:t>
+            </a:r>
+          </a:p>
+        </p:txBody>
+      </p:sp>
+      <p:sp>
+        <p:nvSpPr>
+          <p:cNvPr id="5" name="TextBox 4"/>
+          <p:cNvSpPr txBox="1"/>
+          <p:nvPr/>
+        </p:nvSpPr>
+        <p:spPr>
+          <a:xfrm>
+            <a:off x="502920" y="5989320"/>
+            <a:ext cx="5943600" cy="457200"/>
+          </a:xfrm>
+          <a:prstGeom prst="rect">
+            <a:avLst/>
+          </a:prstGeom>
+          <a:noFill/>
+        </p:spPr>
+        <p:txBody>
+          <a:bodyPr wrap="square" anchor="t" lIns="0" rIns="0" tIns="0" bIns="0">
+            <a:spAutoFit/>
+          </a:bodyPr>
+          <a:lstStyle/>
+          <a:p>
+            <a:pPr>
+              <a:lnSpc>
+                <a:spcPct val="113000"/>
+              </a:lnSpc>
+              <a:spcBef>
+                <a:spcPts val="0"/>
+              </a:spcBef>
+              <a:spcAft>
+                <a:spcPts val="0"/>
+              </a:spcAft>
+            </a:pPr>
+            <a:r>
+              <a:rPr sz="1400" b="1">
+                <a:solidFill>
+                  <a:srgbClr val="A34A38"/>
+                </a:solidFill>
+                <a:latin typeface="Noto Sans"/>
+              </a:rPr>
+              <a:t>BAGHIZ ASSHIDDIQIE ARASYA</a:t>
+            </a:r>
+          </a:p>
+        </p:txBody>
+      </p:sp>
+      <p:sp>
+        <p:nvSpPr>
+          <p:cNvPr id="6" name="Rounded Rectangle 5"/>
+          <p:cNvSpPr/>
+          <p:nvPr/>
+        </p:nvSpPr>
+        <p:spPr>
+          <a:xfrm>
+            <a:off x="6885432" y="850392"/>
+            <a:ext cx="4892040" cy="4160520"/>
+          </a:xfrm>
+          <a:prstGeom prst="roundRect">
+            <a:avLst>
+              <a:gd name="adj" fmla="val 5500"/>
+            </a:avLst>
+          </a:prstGeom>
+          <a:solidFill>
+            <a:srgbClr val="C97B63"/>
+          </a:solidFill>
+          <a:ln>
+            <a:noFill/>
+          </a:ln>
+          <a:effectLst/>
+        </p:spPr>
+        <p:style>
+          <a:lnRef idx="1">
+            <a:schemeClr val="accent1"/>
+          </a:lnRef>
+          <a:fillRef idx="3">
+            <a:schemeClr val="accent1"/>
+          </a:fillRef>
+          <a:effectRef idx="2">
+            <a:schemeClr val="accent1"/>
+          </a:effectRef>
+          <a:fontRef idx="minor">
+            <a:schemeClr val="lt1"/>
+          </a:fontRef>
+        </p:style>
+        <p:txBody>
+          <a:bodyPr rtlCol="0" anchor="ctr"/>
+          <a:lstStyle/>
+          <a:p>
+            <a:pPr algn="ctr"/>
+          </a:p>
+        </p:txBody>
+      </p:sp>
+      <p:sp>
+        <p:nvSpPr>
+          <p:cNvPr id="7" name="Rounded Rectangle 6"/>
+          <p:cNvSpPr/>
+          <p:nvPr/>
+        </p:nvSpPr>
+        <p:spPr>
+          <a:xfrm>
+            <a:off x="6812280" y="777240"/>
+            <a:ext cx="4892040" cy="4160520"/>
+          </a:xfrm>
+          <a:prstGeom prst="roundRect">
+            <a:avLst>
+              <a:gd name="adj" fmla="val 5500"/>
+            </a:avLst>
           </a:prstGeom>
           <a:solidFill>
             <a:srgbClr val="A34A38"/>
@@ -3151,17 +3401,130 @@
       </p:sp>
       <p:sp>
         <p:nvSpPr>
-          <p:cNvPr id="3" name="Rectangle 2"/>
-          <p:cNvSpPr/>
-          <p:nvPr/>
-        </p:nvSpPr>
-        <p:spPr>
-          <a:xfrm>
-            <a:off x="7882127" y="1371600"/>
-            <a:ext cx="502920" cy="82296"/>
+          <p:cNvPr id="8" name="TextBox 7"/>
+          <p:cNvSpPr txBox="1"/>
+          <p:nvPr/>
+        </p:nvSpPr>
+        <p:spPr>
+          <a:xfrm>
+            <a:off x="7269480" y="1234440"/>
+            <a:ext cx="4023360" cy="3474720"/>
           </a:xfrm>
           <a:prstGeom prst="rect">
             <a:avLst/>
+          </a:prstGeom>
+          <a:noFill/>
+        </p:spPr>
+        <p:txBody>
+          <a:bodyPr wrap="square" anchor="t" lIns="0" rIns="0" tIns="0" bIns="0">
+            <a:spAutoFit/>
+          </a:bodyPr>
+          <a:lstStyle/>
+          <a:p>
+            <a:pPr>
+              <a:lnSpc>
+                <a:spcPct val="113000"/>
+              </a:lnSpc>
+              <a:spcBef>
+                <a:spcPts val="0"/>
+              </a:spcBef>
+              <a:spcAft>
+                <a:spcPts val="600"/>
+              </a:spcAft>
+            </a:pPr>
+            <a:r>
+              <a:rPr sz="1250" b="1">
+                <a:solidFill>
+                  <a:srgbClr val="F8F2E5"/>
+                </a:solidFill>
+                <a:latin typeface="Noto Sans"/>
+              </a:rPr>
+              <a:t>TOTAL REVENUE PRODUK (DELIVERED)</a:t>
+            </a:r>
+          </a:p>
+          <a:p>
+            <a:pPr>
+              <a:lnSpc>
+                <a:spcPct val="113000"/>
+              </a:lnSpc>
+              <a:spcBef>
+                <a:spcPts val="0"/>
+              </a:spcBef>
+              <a:spcAft>
+                <a:spcPts val="400"/>
+              </a:spcAft>
+            </a:pPr>
+            <a:r>
+              <a:rPr sz="7600" b="1">
+                <a:solidFill>
+                  <a:srgbClr val="FFFFFF"/>
+                </a:solidFill>
+                <a:latin typeface="Noto Sans"/>
+              </a:rPr>
+              <a:t>13,22</a:t>
+            </a:r>
+          </a:p>
+          <a:p>
+            <a:pPr>
+              <a:lnSpc>
+                <a:spcPct val="113000"/>
+              </a:lnSpc>
+              <a:spcBef>
+                <a:spcPts val="0"/>
+              </a:spcBef>
+              <a:spcAft>
+                <a:spcPts val="800"/>
+              </a:spcAft>
+            </a:pPr>
+            <a:r>
+              <a:rPr sz="1900" b="1">
+                <a:solidFill>
+                  <a:srgbClr val="FFFFFF"/>
+                </a:solidFill>
+                <a:latin typeface="Noto Sans"/>
+              </a:rPr>
+              <a:t>juta BRL dari 96.478 order delivered</a:t>
+            </a:r>
+          </a:p>
+          <a:p>
+            <a:pPr>
+              <a:lnSpc>
+                <a:spcPct val="113000"/>
+              </a:lnSpc>
+              <a:spcBef>
+                <a:spcPts val="0"/>
+              </a:spcBef>
+              <a:spcAft>
+                <a:spcPts val="0"/>
+              </a:spcAft>
+            </a:pPr>
+            <a:r>
+              <a:rPr sz="1350" b="0">
+                <a:solidFill>
+                  <a:srgbClr val="F8F2E5"/>
+                </a:solidFill>
+                <a:latin typeface="Noto Sans"/>
+              </a:rPr>
+              <a:t>Revenue tumbuh 82% dalam setahun, tetapi pemberi bintang 1 menunggu 21,3 hari, dua kali lipat pemberi bintang 5.</a:t>
+            </a:r>
+          </a:p>
+        </p:txBody>
+      </p:sp>
+      <p:sp>
+        <p:nvSpPr>
+          <p:cNvPr id="9" name="Rounded Rectangle 8"/>
+          <p:cNvSpPr/>
+          <p:nvPr/>
+        </p:nvSpPr>
+        <p:spPr>
+          <a:xfrm>
+            <a:off x="6812280" y="5230368"/>
+            <a:ext cx="4892040" cy="713232"/>
+          </a:xfrm>
+          <a:prstGeom prst="roundRect">
+            <a:avLst>
+              <a:gd name="adj" fmla="val 5500"/>
+            </a:avLst>
           </a:prstGeom>
           <a:solidFill>
             <a:srgbClr val="DE7A2D"/>
@@ -3195,14 +3558,14 @@
       </p:sp>
       <p:sp>
         <p:nvSpPr>
-          <p:cNvPr id="4" name="TextBox 3"/>
+          <p:cNvPr id="10" name="TextBox 9"/>
           <p:cNvSpPr txBox="1"/>
           <p:nvPr/>
         </p:nvSpPr>
         <p:spPr>
           <a:xfrm>
-            <a:off x="7882127" y="1783080"/>
-            <a:ext cx="3931920" cy="1737360"/>
+            <a:off x="7086600" y="5358384"/>
+            <a:ext cx="4434840" cy="502920"/>
           </a:xfrm>
           <a:prstGeom prst="rect">
             <a:avLst/>
@@ -3210,265 +3573,30 @@
           <a:noFill/>
         </p:spPr>
         <p:txBody>
-          <a:bodyPr wrap="square" lIns="0" rIns="0" tIns="0" bIns="0">
+          <a:bodyPr wrap="square" anchor="t" lIns="0" rIns="0" tIns="0" bIns="0">
             <a:spAutoFit/>
           </a:bodyPr>
           <a:lstStyle/>
           <a:p>
             <a:pPr>
+              <a:lnSpc>
+                <a:spcPct val="113000"/>
+              </a:lnSpc>
+              <a:spcBef>
+                <a:spcPts val="0"/>
+              </a:spcBef>
               <a:spcAft>
                 <a:spcPts val="0"/>
               </a:spcAft>
             </a:pPr>
             <a:r>
-              <a:rPr sz="8800" b="1" i="0">
+              <a:rPr sz="1250" b="1">
                 <a:solidFill>
                   <a:srgbClr val="FFFFFF"/>
                 </a:solidFill>
                 <a:latin typeface="Noto Sans"/>
               </a:rPr>
-              <a:t>13,22</a:t>
-            </a:r>
-          </a:p>
-        </p:txBody>
-      </p:sp>
-      <p:sp>
-        <p:nvSpPr>
-          <p:cNvPr id="5" name="TextBox 4"/>
-          <p:cNvSpPr txBox="1"/>
-          <p:nvPr/>
-        </p:nvSpPr>
-        <p:spPr>
-          <a:xfrm>
-            <a:off x="7882127" y="3520440"/>
-            <a:ext cx="3931920" cy="1463040"/>
-          </a:xfrm>
-          <a:prstGeom prst="rect">
-            <a:avLst/>
-          </a:prstGeom>
-          <a:noFill/>
-        </p:spPr>
-        <p:txBody>
-          <a:bodyPr wrap="square" lIns="0" rIns="0" tIns="0" bIns="0">
-            <a:spAutoFit/>
-          </a:bodyPr>
-          <a:lstStyle/>
-          <a:p>
-            <a:pPr>
-              <a:spcAft>
-                <a:spcPts val="400"/>
-              </a:spcAft>
-            </a:pPr>
-            <a:r>
-              <a:rPr sz="2400" b="1" i="0">
-                <a:solidFill>
-                  <a:srgbClr val="F1E9DA"/>
-                </a:solidFill>
-                <a:latin typeface="Noto Sans"/>
-              </a:rPr>
-              <a:t>juta BRL</a:t>
-            </a:r>
-          </a:p>
-          <a:p>
-            <a:pPr>
-              <a:lnSpc>
-                <a:spcPct val="115000"/>
-              </a:lnSpc>
-              <a:spcAft>
-                <a:spcPts val="0"/>
-              </a:spcAft>
-            </a:pPr>
-            <a:r>
-              <a:rPr sz="1400" b="0" i="0">
-                <a:solidFill>
-                  <a:srgbClr val="E8DCC8"/>
-                </a:solidFill>
-                <a:latin typeface="Noto Sans"/>
-              </a:rPr>
-              <a:t>total revenue dari 96.478 order delivered</a:t>
-            </a:r>
-          </a:p>
-        </p:txBody>
-      </p:sp>
-      <p:sp>
-        <p:nvSpPr>
-          <p:cNvPr id="6" name="TextBox 5"/>
-          <p:cNvSpPr txBox="1"/>
-          <p:nvPr/>
-        </p:nvSpPr>
-        <p:spPr>
-          <a:xfrm>
-            <a:off x="640080" y="1417320"/>
-            <a:ext cx="6400800" cy="2286000"/>
-          </a:xfrm>
-          <a:prstGeom prst="rect">
-            <a:avLst/>
-          </a:prstGeom>
-          <a:noFill/>
-        </p:spPr>
-        <p:txBody>
-          <a:bodyPr wrap="square" lIns="0" rIns="0" tIns="0" bIns="0">
-            <a:spAutoFit/>
-          </a:bodyPr>
-          <a:lstStyle/>
-          <a:p>
-            <a:pPr>
-              <a:lnSpc>
-                <a:spcPct val="108000"/>
-              </a:lnSpc>
-              <a:spcAft>
-                <a:spcPts val="0"/>
-              </a:spcAft>
-            </a:pPr>
-            <a:r>
-              <a:rPr sz="4000" b="1" i="0">
-                <a:solidFill>
-                  <a:srgbClr val="33231C"/>
-                </a:solidFill>
-                <a:latin typeface="Liberation Serif"/>
-              </a:rPr>
-              <a:t>Analisis Ecommerce Brazil dengan SQL dan Python</a:t>
-            </a:r>
-          </a:p>
-        </p:txBody>
-      </p:sp>
-      <p:sp>
-        <p:nvSpPr>
-          <p:cNvPr id="7" name="TextBox 6"/>
-          <p:cNvSpPr txBox="1"/>
-          <p:nvPr/>
-        </p:nvSpPr>
-        <p:spPr>
-          <a:xfrm>
-            <a:off x="640080" y="3931920"/>
-            <a:ext cx="6309360" cy="731520"/>
-          </a:xfrm>
-          <a:prstGeom prst="rect">
-            <a:avLst/>
-          </a:prstGeom>
-          <a:noFill/>
-        </p:spPr>
-        <p:txBody>
-          <a:bodyPr wrap="square" lIns="0" rIns="0" tIns="0" bIns="0">
-            <a:spAutoFit/>
-          </a:bodyPr>
-          <a:lstStyle/>
-          <a:p>
-            <a:pPr>
-              <a:lnSpc>
-                <a:spcPct val="120000"/>
-              </a:lnSpc>
-              <a:spcAft>
-                <a:spcPts val="800"/>
-              </a:spcAft>
-            </a:pPr>
-            <a:r>
-              <a:rPr sz="1700" b="0" i="0">
-                <a:solidFill>
-                  <a:srgbClr val="6E5B4D"/>
-                </a:solidFill>
-                <a:latin typeface="Noto Sans"/>
-              </a:rPr>
-              <a:t>Studi Kasus: Brazilian Ecommerce Public Dataset by Olist</a:t>
-            </a:r>
-          </a:p>
-        </p:txBody>
-      </p:sp>
-      <p:sp>
-        <p:nvSpPr>
-          <p:cNvPr id="8" name="Rectangle 7"/>
-          <p:cNvSpPr/>
-          <p:nvPr/>
-        </p:nvSpPr>
-        <p:spPr>
-          <a:xfrm>
-            <a:off x="658368" y="5074920"/>
-            <a:ext cx="1371600" cy="64008"/>
-          </a:xfrm>
-          <a:prstGeom prst="rect">
-            <a:avLst/>
-          </a:prstGeom>
-          <a:solidFill>
-            <a:srgbClr val="A34A38"/>
-          </a:solidFill>
-          <a:ln>
-            <a:noFill/>
-          </a:ln>
-          <a:effectLst/>
-        </p:spPr>
-        <p:style>
-          <a:lnRef idx="1">
-            <a:schemeClr val="accent1"/>
-          </a:lnRef>
-          <a:fillRef idx="3">
-            <a:schemeClr val="accent1"/>
-          </a:fillRef>
-          <a:effectRef idx="2">
-            <a:schemeClr val="accent1"/>
-          </a:effectRef>
-          <a:fontRef idx="minor">
-            <a:schemeClr val="lt1"/>
-          </a:fontRef>
-        </p:style>
-        <p:txBody>
-          <a:bodyPr rtlCol="0" anchor="ctr"/>
-          <a:lstStyle/>
-          <a:p>
-            <a:pPr algn="ctr"/>
-          </a:p>
-        </p:txBody>
-      </p:sp>
-      <p:sp>
-        <p:nvSpPr>
-          <p:cNvPr id="9" name="TextBox 8"/>
-          <p:cNvSpPr txBox="1"/>
-          <p:nvPr/>
-        </p:nvSpPr>
-        <p:spPr>
-          <a:xfrm>
-            <a:off x="640080" y="5303520"/>
-            <a:ext cx="6400800" cy="1097280"/>
-          </a:xfrm>
-          <a:prstGeom prst="rect">
-            <a:avLst/>
-          </a:prstGeom>
-          <a:noFill/>
-        </p:spPr>
-        <p:txBody>
-          <a:bodyPr wrap="square" lIns="0" rIns="0" tIns="0" bIns="0">
-            <a:spAutoFit/>
-          </a:bodyPr>
-          <a:lstStyle/>
-          <a:p>
-            <a:pPr>
-              <a:spcAft>
-                <a:spcPts val="400"/>
-              </a:spcAft>
-            </a:pPr>
-            <a:r>
-              <a:rPr sz="2000" b="1" i="0">
-                <a:solidFill>
-                  <a:srgbClr val="A34A38"/>
-                </a:solidFill>
-                <a:latin typeface="Noto Sans"/>
-              </a:rPr>
-              <a:t>BAGHIZ ASSHIDDIQIE ARASYA</a:t>
-            </a:r>
-          </a:p>
-          <a:p>
-            <a:pPr>
-              <a:spcAft>
-                <a:spcPts val="0"/>
-              </a:spcAft>
-            </a:pPr>
-            <a:r>
-              <a:rPr sz="1300" b="0" i="0">
-                <a:solidFill>
-                  <a:srgbClr val="6E5B4D"/>
-                </a:solidFill>
-                <a:latin typeface="Noto Sans"/>
-              </a:rPr>
-              <a:t>Data Analyst Portfolio Project</a:t>
+              <a:t>Plus paket dashboard Power BI: star schema, DAX, panduan rakit.</a:t>
             </a:r>
           </a:p>
         </p:txBody>
@@ -3487,7 +3615,7 @@
     <p:bg>
       <p:bgPr>
         <a:solidFill>
-          <a:srgbClr val="A34A38"/>
+          <a:srgbClr val="F1E9DA"/>
         </a:solidFill>
         <a:effectLst/>
       </p:bgPr>
@@ -3507,8 +3635,8 @@
         </p:nvSpPr>
         <p:spPr>
           <a:xfrm>
-            <a:off x="822960" y="594360"/>
-            <a:ext cx="10515600" cy="822960"/>
+            <a:off x="502920" y="384048"/>
+            <a:ext cx="11155680" cy="914400"/>
           </a:xfrm>
           <a:prstGeom prst="rect">
             <a:avLst/>
@@ -3516,20 +3644,26 @@
           <a:noFill/>
         </p:spPr>
         <p:txBody>
-          <a:bodyPr wrap="square" lIns="0" rIns="0" tIns="0" bIns="0">
+          <a:bodyPr wrap="square" anchor="t" lIns="0" rIns="0" tIns="0" bIns="0">
             <a:spAutoFit/>
           </a:bodyPr>
           <a:lstStyle/>
           <a:p>
             <a:pPr>
+              <a:lnSpc>
+                <a:spcPct val="113000"/>
+              </a:lnSpc>
+              <a:spcBef>
+                <a:spcPts val="0"/>
+              </a:spcBef>
               <a:spcAft>
-                <a:spcPts val="800"/>
+                <a:spcPts val="0"/>
               </a:spcAft>
             </a:pPr>
             <a:r>
-              <a:rPr sz="3400" b="1" i="0">
-                <a:solidFill>
-                  <a:srgbClr val="FFFFFF"/>
+              <a:rPr sz="3100" b="1">
+                <a:solidFill>
+                  <a:srgbClr val="33231C"/>
                 </a:solidFill>
                 <a:latin typeface="Liberation Serif"/>
               </a:rPr>
@@ -3540,101 +3674,19 @@
       </p:sp>
       <p:sp>
         <p:nvSpPr>
-          <p:cNvPr id="3" name="TextBox 2"/>
-          <p:cNvSpPr txBox="1"/>
-          <p:nvPr/>
-        </p:nvSpPr>
-        <p:spPr>
-          <a:xfrm>
-            <a:off x="822960" y="1691640"/>
-            <a:ext cx="10515600" cy="1188720"/>
-          </a:xfrm>
-          <a:prstGeom prst="rect">
-            <a:avLst/>
-          </a:prstGeom>
-          <a:noFill/>
-        </p:spPr>
-        <p:txBody>
-          <a:bodyPr wrap="square" lIns="0" rIns="0" tIns="0" bIns="0">
-            <a:spAutoFit/>
-          </a:bodyPr>
-          <a:lstStyle/>
-          <a:p>
-            <a:pPr>
-              <a:lnSpc>
-                <a:spcPct val="120000"/>
-              </a:lnSpc>
-              <a:spcAft>
-                <a:spcPts val="0"/>
-              </a:spcAft>
-            </a:pPr>
-            <a:r>
-              <a:rPr sz="2100" b="0" i="0">
-                <a:solidFill>
-                  <a:srgbClr val="F1E9DA"/>
-                </a:solidFill>
-                <a:latin typeface="Liberation Serif"/>
-              </a:rPr>
-              <a:t>Revenue tumbuh 82 persen dalam setahun, namun pertumbuhan dibayangi pengiriman lambat, retensi rendah, dan konsentrasi di satu wilayah</a:t>
-            </a:r>
-          </a:p>
-        </p:txBody>
-      </p:sp>
-      <p:sp>
-        <p:nvSpPr>
-          <p:cNvPr id="4" name="TextBox 3"/>
-          <p:cNvSpPr txBox="1"/>
-          <p:nvPr/>
-        </p:nvSpPr>
-        <p:spPr>
-          <a:xfrm>
-            <a:off x="822960" y="3063240"/>
-            <a:ext cx="10515600" cy="1097280"/>
-          </a:xfrm>
-          <a:prstGeom prst="rect">
-            <a:avLst/>
-          </a:prstGeom>
-          <a:noFill/>
-        </p:spPr>
-        <p:txBody>
-          <a:bodyPr wrap="square" lIns="0" rIns="0" tIns="0" bIns="0">
-            <a:spAutoFit/>
-          </a:bodyPr>
-          <a:lstStyle/>
-          <a:p>
-            <a:pPr>
-              <a:lnSpc>
-                <a:spcPct val="125000"/>
-              </a:lnSpc>
-              <a:spcAft>
-                <a:spcPts val="0"/>
-              </a:spcAft>
-            </a:pPr>
-            <a:r>
-              <a:rPr sz="1550" b="0" i="0">
-                <a:solidFill>
-                  <a:srgbClr val="E8DCC8"/>
-                </a:solidFill>
-                <a:latin typeface="Noto Sans"/>
-              </a:rPr>
-              <a:t>Analisis SQL dan Python atas 99.441 order ini menghasilkan 4 rekomendasi prioritas: SLA pengiriman, program retensi, diversifikasi geografis, dan optimalisasi pembayaran</a:t>
-            </a:r>
-          </a:p>
-        </p:txBody>
-      </p:sp>
-      <p:sp>
-        <p:nvSpPr>
-          <p:cNvPr id="5" name="Rectangle 4"/>
+          <p:cNvPr id="3" name="Rounded Rectangle 2"/>
           <p:cNvSpPr/>
           <p:nvPr/>
         </p:nvSpPr>
         <p:spPr>
           <a:xfrm>
-            <a:off x="841248" y="4526280"/>
-            <a:ext cx="1371600" cy="64008"/>
-          </a:xfrm>
-          <a:prstGeom prst="rect">
-            <a:avLst/>
+            <a:off x="521207" y="1097280"/>
+            <a:ext cx="777240" cy="82296"/>
+          </a:xfrm>
+          <a:prstGeom prst="roundRect">
+            <a:avLst>
+              <a:gd name="adj" fmla="val 5500"/>
+            </a:avLst>
           </a:prstGeom>
           <a:solidFill>
             <a:srgbClr val="DE7A2D"/>
@@ -3668,14 +3720,106 @@
       </p:sp>
       <p:sp>
         <p:nvSpPr>
+          <p:cNvPr id="4" name="Rounded Rectangle 3"/>
+          <p:cNvSpPr/>
+          <p:nvPr/>
+        </p:nvSpPr>
+        <p:spPr>
+          <a:xfrm>
+            <a:off x="566928" y="1435608"/>
+            <a:ext cx="6720840" cy="3246120"/>
+          </a:xfrm>
+          <a:prstGeom prst="roundRect">
+            <a:avLst>
+              <a:gd name="adj" fmla="val 5500"/>
+            </a:avLst>
+          </a:prstGeom>
+          <a:solidFill>
+            <a:srgbClr val="E2D2B8"/>
+          </a:solidFill>
+          <a:ln>
+            <a:noFill/>
+          </a:ln>
+          <a:effectLst/>
+        </p:spPr>
+        <p:style>
+          <a:lnRef idx="1">
+            <a:schemeClr val="accent1"/>
+          </a:lnRef>
+          <a:fillRef idx="3">
+            <a:schemeClr val="accent1"/>
+          </a:fillRef>
+          <a:effectRef idx="2">
+            <a:schemeClr val="accent1"/>
+          </a:effectRef>
+          <a:fontRef idx="minor">
+            <a:schemeClr val="lt1"/>
+          </a:fontRef>
+        </p:style>
+        <p:txBody>
+          <a:bodyPr rtlCol="0" anchor="ctr"/>
+          <a:lstStyle/>
+          <a:p>
+            <a:pPr algn="ctr"/>
+          </a:p>
+        </p:txBody>
+      </p:sp>
+      <p:sp>
+        <p:nvSpPr>
+          <p:cNvPr id="5" name="Rounded Rectangle 4"/>
+          <p:cNvSpPr/>
+          <p:nvPr/>
+        </p:nvSpPr>
+        <p:spPr>
+          <a:xfrm>
+            <a:off x="502920" y="1371600"/>
+            <a:ext cx="6720840" cy="3246120"/>
+          </a:xfrm>
+          <a:prstGeom prst="roundRect">
+            <a:avLst>
+              <a:gd name="adj" fmla="val 5500"/>
+            </a:avLst>
+          </a:prstGeom>
+          <a:solidFill>
+            <a:srgbClr val="F8F2E5"/>
+          </a:solidFill>
+          <a:ln>
+            <a:noFill/>
+          </a:ln>
+          <a:effectLst/>
+        </p:spPr>
+        <p:style>
+          <a:lnRef idx="1">
+            <a:schemeClr val="accent1"/>
+          </a:lnRef>
+          <a:fillRef idx="3">
+            <a:schemeClr val="accent1"/>
+          </a:fillRef>
+          <a:effectRef idx="2">
+            <a:schemeClr val="accent1"/>
+          </a:effectRef>
+          <a:fontRef idx="minor">
+            <a:schemeClr val="lt1"/>
+          </a:fontRef>
+        </p:style>
+        <p:txBody>
+          <a:bodyPr rtlCol="0" anchor="ctr"/>
+          <a:lstStyle/>
+          <a:p>
+            <a:pPr algn="ctr"/>
+          </a:p>
+        </p:txBody>
+      </p:sp>
+      <p:sp>
+        <p:nvSpPr>
           <p:cNvPr id="6" name="TextBox 5"/>
           <p:cNvSpPr txBox="1"/>
           <p:nvPr/>
         </p:nvSpPr>
         <p:spPr>
           <a:xfrm>
-            <a:off x="822960" y="4754880"/>
-            <a:ext cx="10515600" cy="640080"/>
+            <a:off x="868680" y="1691640"/>
+            <a:ext cx="6035040" cy="2697480"/>
           </a:xfrm>
           <a:prstGeom prst="rect">
             <a:avLst/>
@@ -3683,18 +3827,363 @@
           <a:noFill/>
         </p:spPr>
         <p:txBody>
-          <a:bodyPr wrap="square" lIns="0" rIns="0" tIns="0" bIns="0">
+          <a:bodyPr wrap="square" anchor="t" lIns="0" rIns="0" tIns="0" bIns="0">
             <a:spAutoFit/>
           </a:bodyPr>
           <a:lstStyle/>
           <a:p>
             <a:pPr>
+              <a:lnSpc>
+                <a:spcPct val="113000"/>
+              </a:lnSpc>
+              <a:spcBef>
+                <a:spcPts val="0"/>
+              </a:spcBef>
               <a:spcAft>
-                <a:spcPts val="0"/>
+                <a:spcPts val="800"/>
               </a:spcAft>
             </a:pPr>
             <a:r>
-              <a:rPr sz="2600" b="1" i="0">
+              <a:rPr sz="1600" b="1">
+                <a:solidFill>
+                  <a:srgbClr val="A34A38"/>
+                </a:solidFill>
+                <a:latin typeface="Liberation Serif"/>
+              </a:rPr>
+              <a:t>Kesimpulan</a:t>
+            </a:r>
+          </a:p>
+          <a:p>
+            <a:pPr>
+              <a:lnSpc>
+                <a:spcPct val="113000"/>
+              </a:lnSpc>
+              <a:spcBef>
+                <a:spcPts val="0"/>
+              </a:spcBef>
+              <a:spcAft>
+                <a:spcPts val="0"/>
+              </a:spcAft>
+            </a:pPr>
+            <a:r>
+              <a:rPr sz="1500" b="0">
+                <a:solidFill>
+                  <a:srgbClr val="33231C"/>
+                </a:solidFill>
+                <a:latin typeface="Noto Sans"/>
+              </a:rPr>
+              <a:t>Revenue tumbuh 82% dalam setahun, namun pertumbuhan dibayangi pengiriman lambat, retensi hanya 3,1%, dan konsentrasi 42,0% order di Sao Paulo.</a:t>
+            </a:r>
+          </a:p>
+        </p:txBody>
+      </p:sp>
+      <p:sp>
+        <p:nvSpPr>
+          <p:cNvPr id="7" name="Rounded Rectangle 6"/>
+          <p:cNvSpPr/>
+          <p:nvPr/>
+        </p:nvSpPr>
+        <p:spPr>
+          <a:xfrm>
+            <a:off x="7543800" y="1371600"/>
+            <a:ext cx="4142232" cy="1536192"/>
+          </a:xfrm>
+          <a:prstGeom prst="roundRect">
+            <a:avLst>
+              <a:gd name="adj" fmla="val 5500"/>
+            </a:avLst>
+          </a:prstGeom>
+          <a:solidFill>
+            <a:srgbClr val="A34A38"/>
+          </a:solidFill>
+          <a:ln>
+            <a:noFill/>
+          </a:ln>
+          <a:effectLst/>
+        </p:spPr>
+        <p:style>
+          <a:lnRef idx="1">
+            <a:schemeClr val="accent1"/>
+          </a:lnRef>
+          <a:fillRef idx="3">
+            <a:schemeClr val="accent1"/>
+          </a:fillRef>
+          <a:effectRef idx="2">
+            <a:schemeClr val="accent1"/>
+          </a:effectRef>
+          <a:fontRef idx="minor">
+            <a:schemeClr val="lt1"/>
+          </a:fontRef>
+        </p:style>
+        <p:txBody>
+          <a:bodyPr rtlCol="0" anchor="ctr"/>
+          <a:lstStyle/>
+          <a:p>
+            <a:pPr algn="ctr"/>
+          </a:p>
+        </p:txBody>
+      </p:sp>
+      <p:sp>
+        <p:nvSpPr>
+          <p:cNvPr id="8" name="TextBox 7"/>
+          <p:cNvSpPr txBox="1"/>
+          <p:nvPr/>
+        </p:nvSpPr>
+        <p:spPr>
+          <a:xfrm>
+            <a:off x="7863840" y="1572768"/>
+            <a:ext cx="3520440" cy="1188720"/>
+          </a:xfrm>
+          <a:prstGeom prst="rect">
+            <a:avLst/>
+          </a:prstGeom>
+          <a:noFill/>
+        </p:spPr>
+        <p:txBody>
+          <a:bodyPr wrap="square" anchor="t" lIns="0" rIns="0" tIns="0" bIns="0">
+            <a:spAutoFit/>
+          </a:bodyPr>
+          <a:lstStyle/>
+          <a:p>
+            <a:pPr>
+              <a:lnSpc>
+                <a:spcPct val="113000"/>
+              </a:lnSpc>
+              <a:spcBef>
+                <a:spcPts val="0"/>
+              </a:spcBef>
+              <a:spcAft>
+                <a:spcPts val="400"/>
+              </a:spcAft>
+            </a:pPr>
+            <a:r>
+              <a:rPr sz="1450" b="1">
+                <a:solidFill>
+                  <a:srgbClr val="FFFFFF"/>
+                </a:solidFill>
+                <a:latin typeface="Liberation Serif"/>
+              </a:rPr>
+              <a:t>Rekomendasi utama</a:t>
+            </a:r>
+          </a:p>
+          <a:p>
+            <a:pPr>
+              <a:lnSpc>
+                <a:spcPct val="113000"/>
+              </a:lnSpc>
+              <a:spcBef>
+                <a:spcPts val="0"/>
+              </a:spcBef>
+              <a:spcAft>
+                <a:spcPts val="0"/>
+              </a:spcAft>
+            </a:pPr>
+            <a:r>
+              <a:rPr sz="1200" b="0">
+                <a:solidFill>
+                  <a:srgbClr val="F8F2E5"/>
+                </a:solidFill>
+                <a:latin typeface="Noto Sans"/>
+              </a:rPr>
+              <a:t>Perbaiki SLA pengiriman kategori bulky dan fashion; bangun program retensi pelanggan; diversifikasi pasar di luar Sao Paulo; dorong cicilan kartu kredit.</a:t>
+            </a:r>
+          </a:p>
+        </p:txBody>
+      </p:sp>
+      <p:sp>
+        <p:nvSpPr>
+          <p:cNvPr id="9" name="Rounded Rectangle 8"/>
+          <p:cNvSpPr/>
+          <p:nvPr/>
+        </p:nvSpPr>
+        <p:spPr>
+          <a:xfrm>
+            <a:off x="7543800" y="3081528"/>
+            <a:ext cx="4142232" cy="1536192"/>
+          </a:xfrm>
+          <a:prstGeom prst="roundRect">
+            <a:avLst>
+              <a:gd name="adj" fmla="val 5500"/>
+            </a:avLst>
+          </a:prstGeom>
+          <a:solidFill>
+            <a:srgbClr val="F8F2E5"/>
+          </a:solidFill>
+          <a:ln>
+            <a:noFill/>
+          </a:ln>
+          <a:effectLst/>
+        </p:spPr>
+        <p:style>
+          <a:lnRef idx="1">
+            <a:schemeClr val="accent1"/>
+          </a:lnRef>
+          <a:fillRef idx="3">
+            <a:schemeClr val="accent1"/>
+          </a:fillRef>
+          <a:effectRef idx="2">
+            <a:schemeClr val="accent1"/>
+          </a:effectRef>
+          <a:fontRef idx="minor">
+            <a:schemeClr val="lt1"/>
+          </a:fontRef>
+        </p:style>
+        <p:txBody>
+          <a:bodyPr rtlCol="0" anchor="ctr"/>
+          <a:lstStyle/>
+          <a:p>
+            <a:pPr algn="ctr"/>
+          </a:p>
+        </p:txBody>
+      </p:sp>
+      <p:sp>
+        <p:nvSpPr>
+          <p:cNvPr id="10" name="TextBox 9"/>
+          <p:cNvSpPr txBox="1"/>
+          <p:nvPr/>
+        </p:nvSpPr>
+        <p:spPr>
+          <a:xfrm>
+            <a:off x="7863840" y="3282696"/>
+            <a:ext cx="3520440" cy="1188720"/>
+          </a:xfrm>
+          <a:prstGeom prst="rect">
+            <a:avLst/>
+          </a:prstGeom>
+          <a:noFill/>
+        </p:spPr>
+        <p:txBody>
+          <a:bodyPr wrap="square" anchor="t" lIns="0" rIns="0" tIns="0" bIns="0">
+            <a:spAutoFit/>
+          </a:bodyPr>
+          <a:lstStyle/>
+          <a:p>
+            <a:pPr>
+              <a:lnSpc>
+                <a:spcPct val="113000"/>
+              </a:lnSpc>
+              <a:spcBef>
+                <a:spcPts val="0"/>
+              </a:spcBef>
+              <a:spcAft>
+                <a:spcPts val="400"/>
+              </a:spcAft>
+            </a:pPr>
+            <a:r>
+              <a:rPr sz="1450" b="1">
+                <a:solidFill>
+                  <a:srgbClr val="A34A38"/>
+                </a:solidFill>
+                <a:latin typeface="Liberation Serif"/>
+              </a:rPr>
+              <a:t>Terbuka untuk direproduksi</a:t>
+            </a:r>
+          </a:p>
+          <a:p>
+            <a:pPr>
+              <a:lnSpc>
+                <a:spcPct val="113000"/>
+              </a:lnSpc>
+              <a:spcBef>
+                <a:spcPts val="0"/>
+              </a:spcBef>
+              <a:spcAft>
+                <a:spcPts val="0"/>
+              </a:spcAft>
+            </a:pPr>
+            <a:r>
+              <a:rPr sz="1200" b="0">
+                <a:solidFill>
+                  <a:srgbClr val="33231C"/>
+                </a:solidFill>
+                <a:latin typeface="Noto Sans"/>
+              </a:rPr>
+              <a:t>Notebook analisis, query SQL JOIN antar 9 tabel, dan definisi metrik terbuka di repo untuk dihitung ulang.</a:t>
+            </a:r>
+          </a:p>
+        </p:txBody>
+      </p:sp>
+      <p:sp>
+        <p:nvSpPr>
+          <p:cNvPr id="11" name="Rounded Rectangle 10"/>
+          <p:cNvSpPr/>
+          <p:nvPr/>
+        </p:nvSpPr>
+        <p:spPr>
+          <a:xfrm>
+            <a:off x="502920" y="4892040"/>
+            <a:ext cx="11183112" cy="1463040"/>
+          </a:xfrm>
+          <a:prstGeom prst="roundRect">
+            <a:avLst>
+              <a:gd name="adj" fmla="val 5500"/>
+            </a:avLst>
+          </a:prstGeom>
+          <a:solidFill>
+            <a:srgbClr val="A34A38"/>
+          </a:solidFill>
+          <a:ln>
+            <a:noFill/>
+          </a:ln>
+          <a:effectLst/>
+        </p:spPr>
+        <p:style>
+          <a:lnRef idx="1">
+            <a:schemeClr val="accent1"/>
+          </a:lnRef>
+          <a:fillRef idx="3">
+            <a:schemeClr val="accent1"/>
+          </a:fillRef>
+          <a:effectRef idx="2">
+            <a:schemeClr val="accent1"/>
+          </a:effectRef>
+          <a:fontRef idx="minor">
+            <a:schemeClr val="lt1"/>
+          </a:fontRef>
+        </p:style>
+        <p:txBody>
+          <a:bodyPr rtlCol="0" anchor="ctr"/>
+          <a:lstStyle/>
+          <a:p>
+            <a:pPr algn="ctr"/>
+          </a:p>
+        </p:txBody>
+      </p:sp>
+      <p:sp>
+        <p:nvSpPr>
+          <p:cNvPr id="12" name="TextBox 11"/>
+          <p:cNvSpPr txBox="1"/>
+          <p:nvPr/>
+        </p:nvSpPr>
+        <p:spPr>
+          <a:xfrm>
+            <a:off x="914400" y="5193792"/>
+            <a:ext cx="6949440" cy="914400"/>
+          </a:xfrm>
+          <a:prstGeom prst="rect">
+            <a:avLst/>
+          </a:prstGeom>
+          <a:noFill/>
+        </p:spPr>
+        <p:txBody>
+          <a:bodyPr wrap="square" anchor="t" lIns="0" rIns="0" tIns="0" bIns="0">
+            <a:spAutoFit/>
+          </a:bodyPr>
+          <a:lstStyle/>
+          <a:p>
+            <a:pPr>
+              <a:lnSpc>
+                <a:spcPct val="113000"/>
+              </a:lnSpc>
+              <a:spcBef>
+                <a:spcPts val="0"/>
+              </a:spcBef>
+              <a:spcAft>
+                <a:spcPts val="300"/>
+              </a:spcAft>
+            </a:pPr>
+            <a:r>
+              <a:rPr sz="2300" b="1">
                 <a:solidFill>
                   <a:srgbClr val="FFFFFF"/>
                 </a:solidFill>
@@ -3703,39 +4192,22 @@
               <a:t>BAGHIZ ASSHIDDIQIE ARASYA</a:t>
             </a:r>
           </a:p>
-        </p:txBody>
-      </p:sp>
-      <p:sp>
-        <p:nvSpPr>
-          <p:cNvPr id="7" name="TextBox 6"/>
-          <p:cNvSpPr txBox="1"/>
-          <p:nvPr/>
-        </p:nvSpPr>
-        <p:spPr>
-          <a:xfrm>
-            <a:off x="822960" y="5486400"/>
-            <a:ext cx="10515600" cy="457200"/>
-          </a:xfrm>
-          <a:prstGeom prst="rect">
-            <a:avLst/>
-          </a:prstGeom>
-          <a:noFill/>
-        </p:spPr>
-        <p:txBody>
-          <a:bodyPr wrap="square" lIns="0" rIns="0" tIns="0" bIns="0">
-            <a:spAutoFit/>
-          </a:bodyPr>
-          <a:lstStyle/>
           <a:p>
             <a:pPr>
+              <a:lnSpc>
+                <a:spcPct val="113000"/>
+              </a:lnSpc>
+              <a:spcBef>
+                <a:spcPts val="0"/>
+              </a:spcBef>
               <a:spcAft>
                 <a:spcPts val="0"/>
               </a:spcAft>
             </a:pPr>
             <a:r>
-              <a:rPr sz="1500" b="1" i="0">
-                <a:solidFill>
-                  <a:srgbClr val="F1E9DA"/>
+              <a:rPr sz="1350" b="0">
+                <a:solidFill>
+                  <a:srgbClr val="F8F2E5"/>
                 </a:solidFill>
                 <a:latin typeface="Noto Sans"/>
               </a:rPr>
@@ -3746,14 +4218,14 @@
       </p:sp>
       <p:sp>
         <p:nvSpPr>
-          <p:cNvPr id="8" name="TextBox 7"/>
+          <p:cNvPr id="13" name="TextBox 12"/>
           <p:cNvSpPr txBox="1"/>
           <p:nvPr/>
         </p:nvSpPr>
         <p:spPr>
           <a:xfrm>
-            <a:off x="822960" y="5989320"/>
-            <a:ext cx="10515600" cy="365760"/>
+            <a:off x="8138160" y="5321808"/>
+            <a:ext cx="3154680" cy="777240"/>
           </a:xfrm>
           <a:prstGeom prst="rect">
             <a:avLst/>
@@ -3761,24 +4233,30 @@
           <a:noFill/>
         </p:spPr>
         <p:txBody>
-          <a:bodyPr wrap="square" lIns="0" rIns="0" tIns="0" bIns="0">
+          <a:bodyPr wrap="square" anchor="t" lIns="0" rIns="0" tIns="0" bIns="0">
             <a:spAutoFit/>
           </a:bodyPr>
           <a:lstStyle/>
           <a:p>
             <a:pPr>
+              <a:lnSpc>
+                <a:spcPct val="113000"/>
+              </a:lnSpc>
+              <a:spcBef>
+                <a:spcPts val="0"/>
+              </a:spcBef>
               <a:spcAft>
                 <a:spcPts val="0"/>
               </a:spcAft>
             </a:pPr>
             <a:r>
-              <a:rPr sz="1200" b="0" i="0">
-                <a:solidFill>
-                  <a:srgbClr val="E8DCC8"/>
+              <a:rPr sz="1250" b="0">
+                <a:solidFill>
+                  <a:srgbClr val="F8F2E5"/>
                 </a:solidFill>
                 <a:latin typeface="Noto Sans"/>
               </a:rPr>
-              <a:t>Dataset: Brazilian Ecommerce Public Dataset by Olist, lisensi CC BY NC SA 4.0</a:t>
+              <a:t>Terima kasih. Silakan jelajahi repo dan dashboardnya, semua angka terbuka untuk dicek ulang.</a:t>
             </a:r>
           </a:p>
         </p:txBody>
@@ -3817,8 +4295,8 @@
         </p:nvSpPr>
         <p:spPr>
           <a:xfrm>
-            <a:off x="640080" y="384048"/>
-            <a:ext cx="10881360" cy="914400"/>
+            <a:off x="502920" y="384048"/>
+            <a:ext cx="11155680" cy="914400"/>
           </a:xfrm>
           <a:prstGeom prst="rect">
             <a:avLst/>
@@ -3826,18 +4304,24 @@
           <a:noFill/>
         </p:spPr>
         <p:txBody>
-          <a:bodyPr wrap="square" lIns="0" rIns="0" tIns="0" bIns="0">
+          <a:bodyPr wrap="square" anchor="t" lIns="0" rIns="0" tIns="0" bIns="0">
             <a:spAutoFit/>
           </a:bodyPr>
           <a:lstStyle/>
           <a:p>
             <a:pPr>
+              <a:lnSpc>
+                <a:spcPct val="113000"/>
+              </a:lnSpc>
+              <a:spcBef>
+                <a:spcPts val="0"/>
+              </a:spcBef>
               <a:spcAft>
-                <a:spcPts val="800"/>
+                <a:spcPts val="0"/>
               </a:spcAft>
             </a:pPr>
             <a:r>
-              <a:rPr sz="3200" b="1" i="0">
+              <a:rPr sz="3100" b="1">
                 <a:solidFill>
                   <a:srgbClr val="33231C"/>
                 </a:solidFill>
@@ -3850,17 +4334,19 @@
       </p:sp>
       <p:sp>
         <p:nvSpPr>
-          <p:cNvPr id="3" name="Rectangle 2"/>
+          <p:cNvPr id="3" name="Rounded Rectangle 2"/>
           <p:cNvSpPr/>
           <p:nvPr/>
         </p:nvSpPr>
         <p:spPr>
           <a:xfrm>
-            <a:off x="658368" y="1225296"/>
-            <a:ext cx="1371600" cy="64008"/>
-          </a:xfrm>
-          <a:prstGeom prst="rect">
-            <a:avLst/>
+            <a:off x="521207" y="1097280"/>
+            <a:ext cx="777240" cy="82296"/>
+          </a:xfrm>
+          <a:prstGeom prst="roundRect">
+            <a:avLst>
+              <a:gd name="adj" fmla="val 5500"/>
+            </a:avLst>
           </a:prstGeom>
           <a:solidFill>
             <a:srgbClr val="DE7A2D"/>
@@ -3894,120 +4380,65 @@
       </p:sp>
       <p:sp>
         <p:nvSpPr>
-          <p:cNvPr id="4" name="TextBox 3"/>
-          <p:cNvSpPr txBox="1"/>
-          <p:nvPr/>
-        </p:nvSpPr>
-        <p:spPr>
-          <a:xfrm>
-            <a:off x="640080" y="1600200"/>
-            <a:ext cx="7223760" cy="4754880"/>
-          </a:xfrm>
-          <a:prstGeom prst="rect">
-            <a:avLst/>
-          </a:prstGeom>
-          <a:noFill/>
-        </p:spPr>
-        <p:txBody>
-          <a:bodyPr wrap="square" lIns="0" rIns="0" tIns="0" bIns="0">
-            <a:spAutoFit/>
-          </a:bodyPr>
-          <a:lstStyle/>
-          <a:p>
-            <a:pPr marL="171450" indent="-171450">
-              <a:lnSpc>
-                <a:spcPct val="112000"/>
-              </a:lnSpc>
-              <a:spcAft>
-                <a:spcPts val="1200"/>
-              </a:spcAft>
-              <a:buChar char="•"/>
-            </a:pPr>
-            <a:r>
-              <a:rPr sz="1650" b="0" i="0">
-                <a:solidFill>
-                  <a:srgbClr val="33231C"/>
-                </a:solidFill>
-                <a:latin typeface="Noto Sans"/>
-              </a:rPr>
-              <a:t>Brazilian Ecommerce Public Dataset by Olist: 99.441 order dari 9 tabel relasional</a:t>
-            </a:r>
-          </a:p>
-          <a:p>
-            <a:pPr marL="171450" indent="-171450">
-              <a:lnSpc>
-                <a:spcPct val="112000"/>
-              </a:lnSpc>
-              <a:spcAft>
-                <a:spcPts val="1200"/>
-              </a:spcAft>
-              <a:buChar char="•"/>
-            </a:pPr>
-            <a:r>
-              <a:rPr sz="1650" b="0" i="0">
-                <a:solidFill>
-                  <a:srgbClr val="33231C"/>
-                </a:solidFill>
-                <a:latin typeface="Noto Sans"/>
-              </a:rPr>
-              <a:t>Periode data September 2016 sampai Agustus 2018, fokus analisis pada order dengan status delivered</a:t>
-            </a:r>
-          </a:p>
-          <a:p>
-            <a:pPr marL="171450" indent="-171450">
-              <a:lnSpc>
-                <a:spcPct val="112000"/>
-              </a:lnSpc>
-              <a:spcAft>
-                <a:spcPts val="1200"/>
-              </a:spcAft>
-              <a:buChar char="•"/>
-            </a:pPr>
-            <a:r>
-              <a:rPr sz="1650" b="0" i="0">
-                <a:solidFill>
-                  <a:srgbClr val="33231C"/>
-                </a:solidFill>
-                <a:latin typeface="Noto Sans"/>
-              </a:rPr>
-              <a:t>Tujuan: menjawab 7 pertanyaan bisnis seputar revenue, kategori, pengiriman, seller, geografi, pembayaran, dan retensi pelanggan</a:t>
-            </a:r>
-          </a:p>
-          <a:p>
-            <a:pPr marL="171450" indent="-171450">
-              <a:lnSpc>
-                <a:spcPct val="112000"/>
-              </a:lnSpc>
-              <a:spcAft>
-                <a:spcPts val="1200"/>
-              </a:spcAft>
-              <a:buChar char="•"/>
-            </a:pPr>
-            <a:r>
-              <a:rPr sz="1650" b="0" i="0">
-                <a:solidFill>
-                  <a:srgbClr val="33231C"/>
-                </a:solidFill>
-                <a:latin typeface="Noto Sans"/>
-              </a:rPr>
-              <a:t>Hasil akhir: rekomendasi bisnis berbasis bukti untuk pertumbuhan marketplace</a:t>
-            </a:r>
-          </a:p>
-        </p:txBody>
-      </p:sp>
-      <p:sp>
-        <p:nvSpPr>
-          <p:cNvPr id="5" name="Rectangle 4"/>
+          <p:cNvPr id="4" name="Rounded Rectangle 3"/>
           <p:cNvSpPr/>
           <p:nvPr/>
         </p:nvSpPr>
         <p:spPr>
           <a:xfrm>
-            <a:off x="8183879" y="1600200"/>
-            <a:ext cx="3364992" cy="4434840"/>
-          </a:xfrm>
-          <a:prstGeom prst="rect">
-            <a:avLst/>
+            <a:off x="566928" y="1481328"/>
+            <a:ext cx="6903720" cy="4206240"/>
+          </a:xfrm>
+          <a:prstGeom prst="roundRect">
+            <a:avLst>
+              <a:gd name="adj" fmla="val 5500"/>
+            </a:avLst>
+          </a:prstGeom>
+          <a:solidFill>
+            <a:srgbClr val="E2D2B8"/>
+          </a:solidFill>
+          <a:ln>
+            <a:noFill/>
+          </a:ln>
+          <a:effectLst/>
+        </p:spPr>
+        <p:style>
+          <a:lnRef idx="1">
+            <a:schemeClr val="accent1"/>
+          </a:lnRef>
+          <a:fillRef idx="3">
+            <a:schemeClr val="accent1"/>
+          </a:fillRef>
+          <a:effectRef idx="2">
+            <a:schemeClr val="accent1"/>
+          </a:effectRef>
+          <a:fontRef idx="minor">
+            <a:schemeClr val="lt1"/>
+          </a:fontRef>
+        </p:style>
+        <p:txBody>
+          <a:bodyPr rtlCol="0" anchor="ctr"/>
+          <a:lstStyle/>
+          <a:p>
+            <a:pPr algn="ctr"/>
+          </a:p>
+        </p:txBody>
+      </p:sp>
+      <p:sp>
+        <p:nvSpPr>
+          <p:cNvPr id="5" name="Rounded Rectangle 4"/>
+          <p:cNvSpPr/>
+          <p:nvPr/>
+        </p:nvSpPr>
+        <p:spPr>
+          <a:xfrm>
+            <a:off x="502920" y="1417320"/>
+            <a:ext cx="6903720" cy="4206240"/>
+          </a:xfrm>
+          <a:prstGeom prst="roundRect">
+            <a:avLst>
+              <a:gd name="adj" fmla="val 5500"/>
+            </a:avLst>
           </a:prstGeom>
           <a:solidFill>
             <a:srgbClr val="F8F2E5"/>
@@ -4041,20 +4472,111 @@
       </p:sp>
       <p:sp>
         <p:nvSpPr>
-          <p:cNvPr id="6" name="Rectangle 5"/>
-          <p:cNvSpPr/>
-          <p:nvPr/>
-        </p:nvSpPr>
-        <p:spPr>
-          <a:xfrm>
-            <a:off x="8183879" y="1600200"/>
-            <a:ext cx="3364992" cy="82296"/>
+          <p:cNvPr id="6" name="TextBox 5"/>
+          <p:cNvSpPr txBox="1"/>
+          <p:nvPr/>
+        </p:nvSpPr>
+        <p:spPr>
+          <a:xfrm>
+            <a:off x="868680" y="1783080"/>
+            <a:ext cx="6217920" cy="3566160"/>
           </a:xfrm>
           <a:prstGeom prst="rect">
             <a:avLst/>
           </a:prstGeom>
+          <a:noFill/>
+        </p:spPr>
+        <p:txBody>
+          <a:bodyPr wrap="square" anchor="t" lIns="0" rIns="0" tIns="0" bIns="0">
+            <a:spAutoFit/>
+          </a:bodyPr>
+          <a:lstStyle/>
+          <a:p>
+            <a:pPr>
+              <a:lnSpc>
+                <a:spcPct val="113000"/>
+              </a:lnSpc>
+              <a:spcBef>
+                <a:spcPts val="0"/>
+              </a:spcBef>
+              <a:spcAft>
+                <a:spcPts val="1000"/>
+              </a:spcAft>
+            </a:pPr>
+            <a:r>
+              <a:rPr sz="1550" b="0">
+                <a:solidFill>
+                  <a:srgbClr val="33231C"/>
+                </a:solidFill>
+                <a:latin typeface="Noto Sans"/>
+              </a:rPr>
+              <a:t>Brazilian Ecommerce Public Dataset by Olist berisi 99.441 order dari 9 tabel relasional, periode September 2016 sampai Agustus 2018.</a:t>
+            </a:r>
+          </a:p>
+          <a:p>
+            <a:pPr>
+              <a:lnSpc>
+                <a:spcPct val="113000"/>
+              </a:lnSpc>
+              <a:spcBef>
+                <a:spcPts val="0"/>
+              </a:spcBef>
+              <a:spcAft>
+                <a:spcPts val="1000"/>
+              </a:spcAft>
+            </a:pPr>
+            <a:r>
+              <a:rPr sz="1550" b="0">
+                <a:solidFill>
+                  <a:srgbClr val="33231C"/>
+                </a:solidFill>
+                <a:latin typeface="Noto Sans"/>
+              </a:rPr>
+              <a:t>Analisis difokuskan pada order berstatus delivered dan menjawab 7 pertanyaan bisnis: revenue, kategori, pengiriman, seller, geografi, pembayaran, dan retensi.</a:t>
+            </a:r>
+          </a:p>
+          <a:p>
+            <a:pPr>
+              <a:lnSpc>
+                <a:spcPct val="113000"/>
+              </a:lnSpc>
+              <a:spcBef>
+                <a:spcPts val="0"/>
+              </a:spcBef>
+              <a:spcAft>
+                <a:spcPts val="1000"/>
+              </a:spcAft>
+            </a:pPr>
+            <a:r>
+              <a:rPr sz="1550" b="0">
+                <a:solidFill>
+                  <a:srgbClr val="33231C"/>
+                </a:solidFill>
+                <a:latin typeface="Noto Sans"/>
+              </a:rPr>
+              <a:t>Hasilnya adalah potret marketplace yang tumbuh cepat tetapi menyimpan tiga masalah: pengiriman lambat, retensi pelanggan rendah, dan konsentrasi pasar di satu state.</a:t>
+            </a:r>
+          </a:p>
+        </p:txBody>
+      </p:sp>
+      <p:sp>
+        <p:nvSpPr>
+          <p:cNvPr id="7" name="Rounded Rectangle 6"/>
+          <p:cNvSpPr/>
+          <p:nvPr/>
+        </p:nvSpPr>
+        <p:spPr>
+          <a:xfrm>
+            <a:off x="7726679" y="1417320"/>
+            <a:ext cx="3959352" cy="1207008"/>
+          </a:xfrm>
+          <a:prstGeom prst="roundRect">
+            <a:avLst>
+              <a:gd name="adj" fmla="val 5500"/>
+            </a:avLst>
+          </a:prstGeom>
           <a:solidFill>
-            <a:srgbClr val="DE7A2D"/>
+            <a:srgbClr val="F8F2E5"/>
           </a:solidFill>
           <a:ln>
             <a:noFill/>
@@ -4085,14 +4607,14 @@
       </p:sp>
       <p:sp>
         <p:nvSpPr>
-          <p:cNvPr id="7" name="TextBox 6"/>
+          <p:cNvPr id="8" name="TextBox 7"/>
           <p:cNvSpPr txBox="1"/>
           <p:nvPr/>
         </p:nvSpPr>
         <p:spPr>
           <a:xfrm>
-            <a:off x="8503920" y="1920240"/>
-            <a:ext cx="2743200" cy="1371600"/>
+            <a:off x="8046720" y="1581912"/>
+            <a:ext cx="3383280" cy="1024128"/>
           </a:xfrm>
           <a:prstGeom prst="rect">
             <a:avLst/>
@@ -4100,114 +4622,323 @@
           <a:noFill/>
         </p:spPr>
         <p:txBody>
-          <a:bodyPr wrap="square" lIns="0" rIns="0" tIns="0" bIns="0">
+          <a:bodyPr wrap="square" anchor="t" lIns="0" rIns="0" tIns="0" bIns="0">
             <a:spAutoFit/>
           </a:bodyPr>
           <a:lstStyle/>
           <a:p>
             <a:pPr>
-              <a:spcAft>
-                <a:spcPts val="0"/>
-              </a:spcAft>
-            </a:pPr>
-            <a:r>
-              <a:rPr sz="6400" b="1" i="0">
-                <a:solidFill>
-                  <a:srgbClr val="A34A38"/>
-                </a:solidFill>
-                <a:latin typeface="Noto Sans"/>
-              </a:rPr>
-              <a:t>7</a:t>
-            </a:r>
-          </a:p>
-        </p:txBody>
-      </p:sp>
-      <p:sp>
-        <p:nvSpPr>
-          <p:cNvPr id="8" name="TextBox 7"/>
-          <p:cNvSpPr txBox="1"/>
-          <p:nvPr/>
-        </p:nvSpPr>
-        <p:spPr>
-          <a:xfrm>
-            <a:off x="8503920" y="3154680"/>
-            <a:ext cx="2743200" cy="2651760"/>
-          </a:xfrm>
-          <a:prstGeom prst="rect">
-            <a:avLst/>
-          </a:prstGeom>
-          <a:noFill/>
-        </p:spPr>
-        <p:txBody>
-          <a:bodyPr wrap="square" lIns="0" rIns="0" tIns="0" bIns="0">
-            <a:spAutoFit/>
-          </a:bodyPr>
-          <a:lstStyle/>
-          <a:p>
-            <a:pPr>
               <a:lnSpc>
-                <a:spcPct val="115000"/>
+                <a:spcPct val="113000"/>
               </a:lnSpc>
-              <a:spcAft>
-                <a:spcPts val="1400"/>
-              </a:spcAft>
-            </a:pPr>
-            <a:r>
-              <a:rPr sz="1500" b="1" i="0">
-                <a:solidFill>
-                  <a:srgbClr val="33231C"/>
-                </a:solidFill>
-                <a:latin typeface="Noto Sans"/>
-              </a:rPr>
-              <a:t>pertanyaan bisnis dijawab dalam analisis ini</a:t>
-            </a:r>
-          </a:p>
-          <a:p>
-            <a:pPr>
+              <a:spcBef>
+                <a:spcPts val="0"/>
+              </a:spcBef>
               <a:spcAft>
                 <a:spcPts val="200"/>
               </a:spcAft>
             </a:pPr>
             <a:r>
-              <a:rPr sz="1500" b="0" i="0">
-                <a:solidFill>
-                  <a:srgbClr val="33231C"/>
+              <a:rPr sz="3200" b="1">
+                <a:solidFill>
+                  <a:srgbClr val="DE7A2D"/>
                 </a:solidFill>
                 <a:latin typeface="Noto Sans"/>
               </a:rPr>
-              <a:t>99.441 order</a:t>
+              <a:t>99.441</a:t>
             </a:r>
           </a:p>
           <a:p>
             <a:pPr>
+              <a:lnSpc>
+                <a:spcPct val="113000"/>
+              </a:lnSpc>
+              <a:spcBef>
+                <a:spcPts val="0"/>
+              </a:spcBef>
+              <a:spcAft>
+                <a:spcPts val="0"/>
+              </a:spcAft>
+            </a:pPr>
+            <a:r>
+              <a:rPr sz="1250" b="0">
+                <a:solidFill>
+                  <a:srgbClr val="33231C"/>
+                </a:solidFill>
+                <a:latin typeface="Noto Sans"/>
+              </a:rPr>
+              <a:t>order dari 9 tabel relasional</a:t>
+            </a:r>
+          </a:p>
+        </p:txBody>
+      </p:sp>
+      <p:sp>
+        <p:nvSpPr>
+          <p:cNvPr id="9" name="Rounded Rectangle 8"/>
+          <p:cNvSpPr/>
+          <p:nvPr/>
+        </p:nvSpPr>
+        <p:spPr>
+          <a:xfrm>
+            <a:off x="7726679" y="2770632"/>
+            <a:ext cx="3959352" cy="1207008"/>
+          </a:xfrm>
+          <a:prstGeom prst="roundRect">
+            <a:avLst>
+              <a:gd name="adj" fmla="val 5500"/>
+            </a:avLst>
+          </a:prstGeom>
+          <a:solidFill>
+            <a:srgbClr val="F8F2E5"/>
+          </a:solidFill>
+          <a:ln>
+            <a:noFill/>
+          </a:ln>
+          <a:effectLst/>
+        </p:spPr>
+        <p:style>
+          <a:lnRef idx="1">
+            <a:schemeClr val="accent1"/>
+          </a:lnRef>
+          <a:fillRef idx="3">
+            <a:schemeClr val="accent1"/>
+          </a:fillRef>
+          <a:effectRef idx="2">
+            <a:schemeClr val="accent1"/>
+          </a:effectRef>
+          <a:fontRef idx="minor">
+            <a:schemeClr val="lt1"/>
+          </a:fontRef>
+        </p:style>
+        <p:txBody>
+          <a:bodyPr rtlCol="0" anchor="ctr"/>
+          <a:lstStyle/>
+          <a:p>
+            <a:pPr algn="ctr"/>
+          </a:p>
+        </p:txBody>
+      </p:sp>
+      <p:sp>
+        <p:nvSpPr>
+          <p:cNvPr id="10" name="TextBox 9"/>
+          <p:cNvSpPr txBox="1"/>
+          <p:nvPr/>
+        </p:nvSpPr>
+        <p:spPr>
+          <a:xfrm>
+            <a:off x="8046720" y="2935224"/>
+            <a:ext cx="3383280" cy="1024128"/>
+          </a:xfrm>
+          <a:prstGeom prst="rect">
+            <a:avLst/>
+          </a:prstGeom>
+          <a:noFill/>
+        </p:spPr>
+        <p:txBody>
+          <a:bodyPr wrap="square" anchor="t" lIns="0" rIns="0" tIns="0" bIns="0">
+            <a:spAutoFit/>
+          </a:bodyPr>
+          <a:lstStyle/>
+          <a:p>
+            <a:pPr>
+              <a:lnSpc>
+                <a:spcPct val="113000"/>
+              </a:lnSpc>
+              <a:spcBef>
+                <a:spcPts val="0"/>
+              </a:spcBef>
               <a:spcAft>
                 <a:spcPts val="200"/>
               </a:spcAft>
             </a:pPr>
             <a:r>
-              <a:rPr sz="1500" b="0" i="0">
-                <a:solidFill>
-                  <a:srgbClr val="33231C"/>
+              <a:rPr sz="3200" b="1">
+                <a:solidFill>
+                  <a:srgbClr val="DE7A2D"/>
                 </a:solidFill>
                 <a:latin typeface="Noto Sans"/>
               </a:rPr>
-              <a:t>9 tabel relasional</a:t>
+              <a:t>7</a:t>
             </a:r>
           </a:p>
           <a:p>
             <a:pPr>
+              <a:lnSpc>
+                <a:spcPct val="113000"/>
+              </a:lnSpc>
+              <a:spcBef>
+                <a:spcPts val="0"/>
+              </a:spcBef>
               <a:spcAft>
                 <a:spcPts val="0"/>
               </a:spcAft>
             </a:pPr>
             <a:r>
-              <a:rPr sz="1500" b="0" i="0">
+              <a:rPr sz="1250" b="0">
                 <a:solidFill>
                   <a:srgbClr val="33231C"/>
                 </a:solidFill>
                 <a:latin typeface="Noto Sans"/>
               </a:rPr>
-              <a:t>Fokus: order delivered</a:t>
+              <a:t>pertanyaan bisnis dijawab dalam analisis ini</a:t>
+            </a:r>
+          </a:p>
+        </p:txBody>
+      </p:sp>
+      <p:sp>
+        <p:nvSpPr>
+          <p:cNvPr id="11" name="Rounded Rectangle 10"/>
+          <p:cNvSpPr/>
+          <p:nvPr/>
+        </p:nvSpPr>
+        <p:spPr>
+          <a:xfrm>
+            <a:off x="7726679" y="4123944"/>
+            <a:ext cx="3959352" cy="1499616"/>
+          </a:xfrm>
+          <a:prstGeom prst="roundRect">
+            <a:avLst>
+              <a:gd name="adj" fmla="val 5500"/>
+            </a:avLst>
+          </a:prstGeom>
+          <a:solidFill>
+            <a:srgbClr val="A34A38"/>
+          </a:solidFill>
+          <a:ln>
+            <a:noFill/>
+          </a:ln>
+          <a:effectLst/>
+        </p:spPr>
+        <p:style>
+          <a:lnRef idx="1">
+            <a:schemeClr val="accent1"/>
+          </a:lnRef>
+          <a:fillRef idx="3">
+            <a:schemeClr val="accent1"/>
+          </a:fillRef>
+          <a:effectRef idx="2">
+            <a:schemeClr val="accent1"/>
+          </a:effectRef>
+          <a:fontRef idx="minor">
+            <a:schemeClr val="lt1"/>
+          </a:fontRef>
+        </p:style>
+        <p:txBody>
+          <a:bodyPr rtlCol="0" anchor="ctr"/>
+          <a:lstStyle/>
+          <a:p>
+            <a:pPr algn="ctr"/>
+          </a:p>
+        </p:txBody>
+      </p:sp>
+      <p:sp>
+        <p:nvSpPr>
+          <p:cNvPr id="12" name="TextBox 11"/>
+          <p:cNvSpPr txBox="1"/>
+          <p:nvPr/>
+        </p:nvSpPr>
+        <p:spPr>
+          <a:xfrm>
+            <a:off x="8046720" y="4288536"/>
+            <a:ext cx="3383280" cy="1316736"/>
+          </a:xfrm>
+          <a:prstGeom prst="rect">
+            <a:avLst/>
+          </a:prstGeom>
+          <a:noFill/>
+        </p:spPr>
+        <p:txBody>
+          <a:bodyPr wrap="square" anchor="t" lIns="0" rIns="0" tIns="0" bIns="0">
+            <a:spAutoFit/>
+          </a:bodyPr>
+          <a:lstStyle/>
+          <a:p>
+            <a:pPr>
+              <a:lnSpc>
+                <a:spcPct val="113000"/>
+              </a:lnSpc>
+              <a:spcBef>
+                <a:spcPts val="0"/>
+              </a:spcBef>
+              <a:spcAft>
+                <a:spcPts val="200"/>
+              </a:spcAft>
+            </a:pPr>
+            <a:r>
+              <a:rPr sz="3200" b="1">
+                <a:solidFill>
+                  <a:srgbClr val="FFFFFF"/>
+                </a:solidFill>
+                <a:latin typeface="Noto Sans"/>
+              </a:rPr>
+              <a:t>+82%</a:t>
+            </a:r>
+          </a:p>
+          <a:p>
+            <a:pPr>
+              <a:lnSpc>
+                <a:spcPct val="113000"/>
+              </a:lnSpc>
+              <a:spcBef>
+                <a:spcPts val="0"/>
+              </a:spcBef>
+              <a:spcAft>
+                <a:spcPts val="0"/>
+              </a:spcAft>
+            </a:pPr>
+            <a:r>
+              <a:rPr sz="1250" b="0">
+                <a:solidFill>
+                  <a:srgbClr val="F8F2E5"/>
+                </a:solidFill>
+                <a:latin typeface="Noto Sans"/>
+              </a:rPr>
+              <a:t>pertumbuhan revenue bulanan, 2017 ke 2018</a:t>
+            </a:r>
+          </a:p>
+        </p:txBody>
+      </p:sp>
+      <p:sp>
+        <p:nvSpPr>
+          <p:cNvPr id="13" name="TextBox 12"/>
+          <p:cNvSpPr txBox="1"/>
+          <p:nvPr/>
+        </p:nvSpPr>
+        <p:spPr>
+          <a:xfrm>
+            <a:off x="502920" y="6355080"/>
+            <a:ext cx="11155680" cy="365760"/>
+          </a:xfrm>
+          <a:prstGeom prst="rect">
+            <a:avLst/>
+          </a:prstGeom>
+          <a:noFill/>
+        </p:spPr>
+        <p:txBody>
+          <a:bodyPr wrap="square" anchor="t" lIns="0" rIns="0" tIns="0" bIns="0">
+            <a:spAutoFit/>
+          </a:bodyPr>
+          <a:lstStyle/>
+          <a:p>
+            <a:pPr>
+              <a:lnSpc>
+                <a:spcPct val="113000"/>
+              </a:lnSpc>
+              <a:spcBef>
+                <a:spcPts val="0"/>
+              </a:spcBef>
+              <a:spcAft>
+                <a:spcPts val="0"/>
+              </a:spcAft>
+            </a:pPr>
+            <a:r>
+              <a:rPr sz="1100" b="0">
+                <a:solidFill>
+                  <a:srgbClr val="8A7A6C"/>
+                </a:solidFill>
+                <a:latin typeface="Noto Sans"/>
+              </a:rPr>
+              <a:t>Sumber data: Brazilian Ecommerce Public Dataset by Olist (Kaggle, lisensi CC BY-NC-SA 4.0).</a:t>
             </a:r>
           </a:p>
         </p:txBody>
@@ -4246,8 +4977,8 @@
         </p:nvSpPr>
         <p:spPr>
           <a:xfrm>
-            <a:off x="640080" y="384048"/>
-            <a:ext cx="10881360" cy="914400"/>
+            <a:off x="502920" y="384048"/>
+            <a:ext cx="11155680" cy="914400"/>
           </a:xfrm>
           <a:prstGeom prst="rect">
             <a:avLst/>
@@ -4255,18 +4986,24 @@
           <a:noFill/>
         </p:spPr>
         <p:txBody>
-          <a:bodyPr wrap="square" lIns="0" rIns="0" tIns="0" bIns="0">
+          <a:bodyPr wrap="square" anchor="t" lIns="0" rIns="0" tIns="0" bIns="0">
             <a:spAutoFit/>
           </a:bodyPr>
           <a:lstStyle/>
           <a:p>
             <a:pPr>
+              <a:lnSpc>
+                <a:spcPct val="113000"/>
+              </a:lnSpc>
+              <a:spcBef>
+                <a:spcPts val="0"/>
+              </a:spcBef>
               <a:spcAft>
-                <a:spcPts val="800"/>
+                <a:spcPts val="0"/>
               </a:spcAft>
             </a:pPr>
             <a:r>
-              <a:rPr sz="3200" b="1" i="0">
+              <a:rPr sz="3100" b="1">
                 <a:solidFill>
                   <a:srgbClr val="33231C"/>
                 </a:solidFill>
@@ -4279,17 +5016,19 @@
       </p:sp>
       <p:sp>
         <p:nvSpPr>
-          <p:cNvPr id="3" name="Rectangle 2"/>
+          <p:cNvPr id="3" name="Rounded Rectangle 2"/>
           <p:cNvSpPr/>
           <p:nvPr/>
         </p:nvSpPr>
         <p:spPr>
           <a:xfrm>
-            <a:off x="658368" y="1225296"/>
-            <a:ext cx="1371600" cy="64008"/>
-          </a:xfrm>
-          <a:prstGeom prst="rect">
-            <a:avLst/>
+            <a:off x="521207" y="1097280"/>
+            <a:ext cx="777240" cy="82296"/>
+          </a:xfrm>
+          <a:prstGeom prst="roundRect">
+            <a:avLst>
+              <a:gd name="adj" fmla="val 5500"/>
+            </a:avLst>
           </a:prstGeom>
           <a:solidFill>
             <a:srgbClr val="DE7A2D"/>
@@ -4323,14 +5062,60 @@
       </p:sp>
       <p:sp>
         <p:nvSpPr>
-          <p:cNvPr id="4" name="TextBox 3"/>
+          <p:cNvPr id="4" name="Rounded Rectangle 3"/>
+          <p:cNvSpPr/>
+          <p:nvPr/>
+        </p:nvSpPr>
+        <p:spPr>
+          <a:xfrm>
+            <a:off x="502920" y="1417320"/>
+            <a:ext cx="3291840" cy="2011680"/>
+          </a:xfrm>
+          <a:prstGeom prst="roundRect">
+            <a:avLst>
+              <a:gd name="adj" fmla="val 5500"/>
+            </a:avLst>
+          </a:prstGeom>
+          <a:solidFill>
+            <a:srgbClr val="A34A38"/>
+          </a:solidFill>
+          <a:ln>
+            <a:noFill/>
+          </a:ln>
+          <a:effectLst/>
+        </p:spPr>
+        <p:style>
+          <a:lnRef idx="1">
+            <a:schemeClr val="accent1"/>
+          </a:lnRef>
+          <a:fillRef idx="3">
+            <a:schemeClr val="accent1"/>
+          </a:fillRef>
+          <a:effectRef idx="2">
+            <a:schemeClr val="accent1"/>
+          </a:effectRef>
+          <a:fontRef idx="minor">
+            <a:schemeClr val="lt1"/>
+          </a:fontRef>
+        </p:style>
+        <p:txBody>
+          <a:bodyPr rtlCol="0" anchor="ctr"/>
+          <a:lstStyle/>
+          <a:p>
+            <a:pPr algn="ctr"/>
+          </a:p>
+        </p:txBody>
+      </p:sp>
+      <p:sp>
+        <p:nvSpPr>
+          <p:cNvPr id="5" name="TextBox 4"/>
           <p:cNvSpPr txBox="1"/>
           <p:nvPr/>
         </p:nvSpPr>
         <p:spPr>
           <a:xfrm>
-            <a:off x="640080" y="1600200"/>
-            <a:ext cx="6903720" cy="4754880"/>
+            <a:off x="822960" y="1664208"/>
+            <a:ext cx="2697480" cy="1737360"/>
           </a:xfrm>
           <a:prstGeom prst="rect">
             <a:avLst/>
@@ -4338,144 +5123,71 @@
           <a:noFill/>
         </p:spPr>
         <p:txBody>
-          <a:bodyPr wrap="square" lIns="0" rIns="0" tIns="0" bIns="0">
+          <a:bodyPr wrap="square" anchor="t" lIns="0" rIns="0" tIns="0" bIns="0">
             <a:spAutoFit/>
           </a:bodyPr>
           <a:lstStyle/>
           <a:p>
-            <a:pPr marL="171450" indent="-171450">
+            <a:pPr>
               <a:lnSpc>
-                <a:spcPct val="112000"/>
+                <a:spcPct val="113000"/>
               </a:lnSpc>
+              <a:spcBef>
+                <a:spcPts val="0"/>
+              </a:spcBef>
               <a:spcAft>
-                <a:spcPts val="1200"/>
+                <a:spcPts val="300"/>
               </a:spcAft>
-              <a:buChar char="•"/>
             </a:pPr>
             <a:r>
-              <a:rPr sz="1650" b="0" i="0">
-                <a:solidFill>
-                  <a:srgbClr val="33231C"/>
+              <a:rPr sz="2800" b="1">
+                <a:solidFill>
+                  <a:srgbClr val="FFFFFF"/>
                 </a:solidFill>
                 <a:latin typeface="Noto Sans"/>
               </a:rPr>
-              <a:t>File CSV dimuat ke SQLite, lalu dianalisis dengan query SQL berisi JOIN antar tabel dan pandas untuk agregasi lanjutan</a:t>
-            </a:r>
-          </a:p>
-          <a:p>
-            <a:pPr marL="171450" indent="-171450">
+              <a:t>96.478</a:t>
+            </a:r>
+          </a:p>
+          <a:p>
+            <a:pPr>
               <a:lnSpc>
-                <a:spcPct val="112000"/>
+                <a:spcPct val="113000"/>
               </a:lnSpc>
+              <a:spcBef>
+                <a:spcPts val="0"/>
+              </a:spcBef>
               <a:spcAft>
-                <a:spcPts val="1200"/>
+                <a:spcPts val="0"/>
               </a:spcAft>
-              <a:buChar char="•"/>
             </a:pPr>
             <a:r>
-              <a:rPr sz="1650" b="0" i="0">
-                <a:solidFill>
-                  <a:srgbClr val="33231C"/>
+              <a:rPr sz="1250" b="0">
+                <a:solidFill>
+                  <a:srgbClr val="F8F2E5"/>
                 </a:solidFill>
                 <a:latin typeface="Noto Sans"/>
               </a:rPr>
-              <a:t>Revenue didefinisikan sebagai total harga barang tanpa ongkos kirim, dihitung hanya dari order berstatus delivered</a:t>
-            </a:r>
-          </a:p>
-          <a:p>
-            <a:pPr marL="171450" indent="-171450">
-              <a:lnSpc>
-                <a:spcPct val="112000"/>
-              </a:lnSpc>
-              <a:spcAft>
-                <a:spcPts val="1200"/>
-              </a:spcAft>
-              <a:buChar char="•"/>
-            </a:pPr>
-            <a:r>
-              <a:rPr sz="1650" b="0" i="0">
-                <a:solidFill>
-                  <a:srgbClr val="33231C"/>
-                </a:solidFill>
-                <a:latin typeface="Noto Sans"/>
-              </a:rPr>
-              <a:t>Bad review didefinisikan sebagai ulasan dengan skor 1 atau 2 dari skala 1 sampai 5</a:t>
-            </a:r>
-          </a:p>
-          <a:p>
-            <a:pPr marL="171450" indent="-171450">
-              <a:lnSpc>
-                <a:spcPct val="112000"/>
-              </a:lnSpc>
-              <a:spcAft>
-                <a:spcPts val="1200"/>
-              </a:spcAft>
-              <a:buChar char="•"/>
-            </a:pPr>
-            <a:r>
-              <a:rPr sz="1650" b="0" i="0">
-                <a:solidFill>
-                  <a:srgbClr val="33231C"/>
-                </a:solidFill>
-                <a:latin typeface="Noto Sans"/>
-              </a:rPr>
-              <a:t>Repeat purchase rate adalah persentase pelanggan unik yang berbelanja lebih dari satu kali</a:t>
-            </a:r>
-          </a:p>
-        </p:txBody>
-      </p:sp>
-      <p:sp>
-        <p:nvSpPr>
-          <p:cNvPr id="5" name="TextBox 4"/>
-          <p:cNvSpPr txBox="1"/>
-          <p:nvPr/>
-        </p:nvSpPr>
-        <p:spPr>
-          <a:xfrm>
-            <a:off x="7863840" y="1554480"/>
-            <a:ext cx="3685032" cy="457200"/>
-          </a:xfrm>
-          <a:prstGeom prst="rect">
-            <a:avLst/>
-          </a:prstGeom>
-          <a:noFill/>
-        </p:spPr>
-        <p:txBody>
-          <a:bodyPr wrap="square" lIns="0" rIns="0" tIns="0" bIns="0">
-            <a:spAutoFit/>
-          </a:bodyPr>
-          <a:lstStyle/>
-          <a:p>
-            <a:pPr>
-              <a:spcAft>
-                <a:spcPts val="800"/>
-              </a:spcAft>
-            </a:pPr>
-            <a:r>
-              <a:rPr sz="1800" b="1" i="0">
-                <a:solidFill>
-                  <a:srgbClr val="33231C"/>
-                </a:solidFill>
-                <a:latin typeface="Liberation Serif"/>
-              </a:rPr>
-              <a:t>Alur Analisis</a:t>
-            </a:r>
-          </a:p>
-        </p:txBody>
-      </p:sp>
-      <p:sp>
-        <p:nvSpPr>
-          <p:cNvPr id="6" name="Rectangle 5"/>
+              <a:t>order delivered menjadi fokus analisis</a:t>
+            </a:r>
+          </a:p>
+        </p:txBody>
+      </p:sp>
+      <p:sp>
+        <p:nvSpPr>
+          <p:cNvPr id="6" name="Rounded Rectangle 5"/>
           <p:cNvSpPr/>
           <p:nvPr/>
         </p:nvSpPr>
         <p:spPr>
           <a:xfrm>
-            <a:off x="7863840" y="2103120"/>
-            <a:ext cx="3685032" cy="658368"/>
-          </a:xfrm>
-          <a:prstGeom prst="rect">
-            <a:avLst/>
+            <a:off x="502920" y="3611880"/>
+            <a:ext cx="3291840" cy="2011680"/>
+          </a:xfrm>
+          <a:prstGeom prst="roundRect">
+            <a:avLst>
+              <a:gd name="adj" fmla="val 5500"/>
+            </a:avLst>
           </a:prstGeom>
           <a:solidFill>
             <a:srgbClr val="F8F2E5"/>
@@ -4509,20 +5221,89 @@
       </p:sp>
       <p:sp>
         <p:nvSpPr>
-          <p:cNvPr id="7" name="Rectangle 6"/>
-          <p:cNvSpPr/>
-          <p:nvPr/>
-        </p:nvSpPr>
-        <p:spPr>
-          <a:xfrm>
-            <a:off x="7863840" y="2103120"/>
-            <a:ext cx="82296" cy="658368"/>
+          <p:cNvPr id="7" name="TextBox 6"/>
+          <p:cNvSpPr txBox="1"/>
+          <p:nvPr/>
+        </p:nvSpPr>
+        <p:spPr>
+          <a:xfrm>
+            <a:off x="822960" y="3858768"/>
+            <a:ext cx="2697480" cy="1737360"/>
           </a:xfrm>
           <a:prstGeom prst="rect">
             <a:avLst/>
           </a:prstGeom>
+          <a:noFill/>
+        </p:spPr>
+        <p:txBody>
+          <a:bodyPr wrap="square" anchor="t" lIns="0" rIns="0" tIns="0" bIns="0">
+            <a:spAutoFit/>
+          </a:bodyPr>
+          <a:lstStyle/>
+          <a:p>
+            <a:pPr>
+              <a:lnSpc>
+                <a:spcPct val="113000"/>
+              </a:lnSpc>
+              <a:spcBef>
+                <a:spcPts val="0"/>
+              </a:spcBef>
+              <a:spcAft>
+                <a:spcPts val="300"/>
+              </a:spcAft>
+            </a:pPr>
+            <a:r>
+              <a:rPr sz="2800" b="1">
+                <a:solidFill>
+                  <a:srgbClr val="DE7A2D"/>
+                </a:solidFill>
+                <a:latin typeface="Noto Sans"/>
+              </a:rPr>
+              <a:t>13,22 jt</a:t>
+            </a:r>
+          </a:p>
+          <a:p>
+            <a:pPr>
+              <a:lnSpc>
+                <a:spcPct val="113000"/>
+              </a:lnSpc>
+              <a:spcBef>
+                <a:spcPts val="0"/>
+              </a:spcBef>
+              <a:spcAft>
+                <a:spcPts val="0"/>
+              </a:spcAft>
+            </a:pPr>
+            <a:r>
+              <a:rPr sz="1250" b="0">
+                <a:solidFill>
+                  <a:srgbClr val="33231C"/>
+                </a:solidFill>
+                <a:latin typeface="Noto Sans"/>
+              </a:rPr>
+              <a:t>BRL revenue produk; pembayaran termasuk ongkir 15,42 jt BRL tidak dipakai</a:t>
+            </a:r>
+          </a:p>
+        </p:txBody>
+      </p:sp>
+      <p:sp>
+        <p:nvSpPr>
+          <p:cNvPr id="8" name="Rounded Rectangle 7"/>
+          <p:cNvSpPr/>
+          <p:nvPr/>
+        </p:nvSpPr>
+        <p:spPr>
+          <a:xfrm>
+            <a:off x="4178808" y="1481328"/>
+            <a:ext cx="7571231" cy="4206240"/>
+          </a:xfrm>
+          <a:prstGeom prst="roundRect">
+            <a:avLst>
+              <a:gd name="adj" fmla="val 5500"/>
+            </a:avLst>
+          </a:prstGeom>
           <a:solidFill>
-            <a:srgbClr val="A34A38"/>
+            <a:srgbClr val="E2D2B8"/>
           </a:solidFill>
           <a:ln>
             <a:noFill/>
@@ -4553,95 +5334,19 @@
       </p:sp>
       <p:sp>
         <p:nvSpPr>
-          <p:cNvPr id="8" name="TextBox 7"/>
-          <p:cNvSpPr txBox="1"/>
-          <p:nvPr/>
-        </p:nvSpPr>
-        <p:spPr>
-          <a:xfrm>
-            <a:off x="8138160" y="2276856"/>
-            <a:ext cx="3291840" cy="365760"/>
-          </a:xfrm>
-          <a:prstGeom prst="rect">
-            <a:avLst/>
-          </a:prstGeom>
-          <a:noFill/>
-        </p:spPr>
-        <p:txBody>
-          <a:bodyPr wrap="square" lIns="0" rIns="0" tIns="0" bIns="0">
-            <a:spAutoFit/>
-          </a:bodyPr>
-          <a:lstStyle/>
-          <a:p>
-            <a:pPr>
-              <a:spcAft>
-                <a:spcPts val="0"/>
-              </a:spcAft>
-            </a:pPr>
-            <a:r>
-              <a:rPr sz="1450" b="1" i="0">
-                <a:solidFill>
-                  <a:srgbClr val="33231C"/>
-                </a:solidFill>
-                <a:latin typeface="Noto Sans"/>
-              </a:rPr>
-              <a:t>File CSV</a:t>
-            </a:r>
-          </a:p>
-        </p:txBody>
-      </p:sp>
-      <p:sp>
-        <p:nvSpPr>
-          <p:cNvPr id="9" name="TextBox 8"/>
-          <p:cNvSpPr txBox="1"/>
-          <p:nvPr/>
-        </p:nvSpPr>
-        <p:spPr>
-          <a:xfrm>
-            <a:off x="7863840" y="2779776"/>
-            <a:ext cx="3685032" cy="274320"/>
-          </a:xfrm>
-          <a:prstGeom prst="rect">
-            <a:avLst/>
-          </a:prstGeom>
-          <a:noFill/>
-        </p:spPr>
-        <p:txBody>
-          <a:bodyPr wrap="square" lIns="0" rIns="0" tIns="0" bIns="0">
-            <a:spAutoFit/>
-          </a:bodyPr>
-          <a:lstStyle/>
-          <a:p>
-            <a:pPr algn="ctr">
-              <a:spcAft>
-                <a:spcPts val="0"/>
-              </a:spcAft>
-            </a:pPr>
-            <a:r>
-              <a:rPr sz="1300" b="1" i="0">
-                <a:solidFill>
-                  <a:srgbClr val="DE7A2D"/>
-                </a:solidFill>
-                <a:latin typeface="Noto Sans"/>
-              </a:rPr>
-              <a:t>↓</a:t>
-            </a:r>
-          </a:p>
-        </p:txBody>
-      </p:sp>
-      <p:sp>
-        <p:nvSpPr>
-          <p:cNvPr id="10" name="Rectangle 9"/>
+          <p:cNvPr id="9" name="Rounded Rectangle 8"/>
           <p:cNvSpPr/>
           <p:nvPr/>
         </p:nvSpPr>
         <p:spPr>
           <a:xfrm>
-            <a:off x="7863840" y="3072384"/>
-            <a:ext cx="3685032" cy="658368"/>
-          </a:xfrm>
-          <a:prstGeom prst="rect">
-            <a:avLst/>
+            <a:off x="4114800" y="1417320"/>
+            <a:ext cx="7571231" cy="4206240"/>
+          </a:xfrm>
+          <a:prstGeom prst="roundRect">
+            <a:avLst>
+              <a:gd name="adj" fmla="val 5500"/>
+            </a:avLst>
           </a:prstGeom>
           <a:solidFill>
             <a:srgbClr val="F8F2E5"/>
@@ -4675,415 +5380,89 @@
       </p:sp>
       <p:sp>
         <p:nvSpPr>
-          <p:cNvPr id="11" name="Rectangle 10"/>
-          <p:cNvSpPr/>
-          <p:nvPr/>
-        </p:nvSpPr>
-        <p:spPr>
-          <a:xfrm>
-            <a:off x="7863840" y="3072384"/>
-            <a:ext cx="82296" cy="658368"/>
+          <p:cNvPr id="10" name="TextBox 9"/>
+          <p:cNvSpPr txBox="1"/>
+          <p:nvPr/>
+        </p:nvSpPr>
+        <p:spPr>
+          <a:xfrm>
+            <a:off x="4480560" y="1755648"/>
+            <a:ext cx="6858000" cy="3611880"/>
           </a:xfrm>
           <a:prstGeom prst="rect">
             <a:avLst/>
           </a:prstGeom>
-          <a:solidFill>
-            <a:srgbClr val="A34A38"/>
-          </a:solidFill>
-          <a:ln>
-            <a:noFill/>
-          </a:ln>
-          <a:effectLst/>
-        </p:spPr>
-        <p:style>
-          <a:lnRef idx="1">
-            <a:schemeClr val="accent1"/>
-          </a:lnRef>
-          <a:fillRef idx="3">
-            <a:schemeClr val="accent1"/>
-          </a:fillRef>
-          <a:effectRef idx="2">
-            <a:schemeClr val="accent1"/>
-          </a:effectRef>
-          <a:fontRef idx="minor">
-            <a:schemeClr val="lt1"/>
-          </a:fontRef>
-        </p:style>
-        <p:txBody>
-          <a:bodyPr rtlCol="0" anchor="ctr"/>
-          <a:lstStyle/>
-          <a:p>
-            <a:pPr algn="ctr"/>
-          </a:p>
-        </p:txBody>
-      </p:sp>
-      <p:sp>
-        <p:nvSpPr>
-          <p:cNvPr id="12" name="TextBox 11"/>
-          <p:cNvSpPr txBox="1"/>
-          <p:nvPr/>
-        </p:nvSpPr>
-        <p:spPr>
-          <a:xfrm>
-            <a:off x="8138160" y="3246120"/>
-            <a:ext cx="3291840" cy="365760"/>
-          </a:xfrm>
-          <a:prstGeom prst="rect">
-            <a:avLst/>
-          </a:prstGeom>
           <a:noFill/>
         </p:spPr>
         <p:txBody>
-          <a:bodyPr wrap="square" lIns="0" rIns="0" tIns="0" bIns="0">
+          <a:bodyPr wrap="square" anchor="t" lIns="0" rIns="0" tIns="0" bIns="0">
             <a:spAutoFit/>
           </a:bodyPr>
           <a:lstStyle/>
           <a:p>
             <a:pPr>
+              <a:lnSpc>
+                <a:spcPct val="113000"/>
+              </a:lnSpc>
+              <a:spcBef>
+                <a:spcPts val="0"/>
+              </a:spcBef>
               <a:spcAft>
-                <a:spcPts val="0"/>
+                <a:spcPts val="1000"/>
               </a:spcAft>
             </a:pPr>
             <a:r>
-              <a:rPr sz="1450" b="1" i="0">
+              <a:rPr sz="1500" b="0">
                 <a:solidFill>
                   <a:srgbClr val="33231C"/>
                 </a:solidFill>
                 <a:latin typeface="Noto Sans"/>
               </a:rPr>
-              <a:t>SQLite</a:t>
-            </a:r>
-          </a:p>
-        </p:txBody>
-      </p:sp>
-      <p:sp>
-        <p:nvSpPr>
-          <p:cNvPr id="13" name="TextBox 12"/>
-          <p:cNvSpPr txBox="1"/>
-          <p:nvPr/>
-        </p:nvSpPr>
-        <p:spPr>
-          <a:xfrm>
-            <a:off x="7863840" y="3749039"/>
-            <a:ext cx="3685032" cy="274320"/>
-          </a:xfrm>
-          <a:prstGeom prst="rect">
-            <a:avLst/>
-          </a:prstGeom>
-          <a:noFill/>
-        </p:spPr>
-        <p:txBody>
-          <a:bodyPr wrap="square" lIns="0" rIns="0" tIns="0" bIns="0">
-            <a:spAutoFit/>
-          </a:bodyPr>
-          <a:lstStyle/>
-          <a:p>
-            <a:pPr algn="ctr">
+              <a:t>File CSV dari 9 tabel relasional dimuat ke SQLite; analisis memakai query SQL dengan JOIN antar tabel dan pandas untuk agregasi lanjutan.</a:t>
+            </a:r>
+          </a:p>
+          <a:p>
+            <a:pPr>
+              <a:lnSpc>
+                <a:spcPct val="113000"/>
+              </a:lnSpc>
+              <a:spcBef>
+                <a:spcPts val="0"/>
+              </a:spcBef>
               <a:spcAft>
-                <a:spcPts val="0"/>
+                <a:spcPts val="1000"/>
               </a:spcAft>
             </a:pPr>
             <a:r>
-              <a:rPr sz="1300" b="1" i="0">
-                <a:solidFill>
-                  <a:srgbClr val="DE7A2D"/>
+              <a:rPr sz="1500" b="0">
+                <a:solidFill>
+                  <a:srgbClr val="33231C"/>
                 </a:solidFill>
                 <a:latin typeface="Noto Sans"/>
               </a:rPr>
-              <a:t>↓</a:t>
-            </a:r>
-          </a:p>
-        </p:txBody>
-      </p:sp>
-      <p:sp>
-        <p:nvSpPr>
-          <p:cNvPr id="14" name="Rectangle 13"/>
-          <p:cNvSpPr/>
-          <p:nvPr/>
-        </p:nvSpPr>
-        <p:spPr>
-          <a:xfrm>
-            <a:off x="7863840" y="4041648"/>
-            <a:ext cx="3685032" cy="658368"/>
-          </a:xfrm>
-          <a:prstGeom prst="rect">
-            <a:avLst/>
-          </a:prstGeom>
-          <a:solidFill>
-            <a:srgbClr val="F8F2E5"/>
-          </a:solidFill>
-          <a:ln>
-            <a:noFill/>
-          </a:ln>
-          <a:effectLst/>
-        </p:spPr>
-        <p:style>
-          <a:lnRef idx="1">
-            <a:schemeClr val="accent1"/>
-          </a:lnRef>
-          <a:fillRef idx="3">
-            <a:schemeClr val="accent1"/>
-          </a:fillRef>
-          <a:effectRef idx="2">
-            <a:schemeClr val="accent1"/>
-          </a:effectRef>
-          <a:fontRef idx="minor">
-            <a:schemeClr val="lt1"/>
-          </a:fontRef>
-        </p:style>
-        <p:txBody>
-          <a:bodyPr rtlCol="0" anchor="ctr"/>
-          <a:lstStyle/>
-          <a:p>
-            <a:pPr algn="ctr"/>
-          </a:p>
-        </p:txBody>
-      </p:sp>
-      <p:sp>
-        <p:nvSpPr>
-          <p:cNvPr id="15" name="Rectangle 14"/>
-          <p:cNvSpPr/>
-          <p:nvPr/>
-        </p:nvSpPr>
-        <p:spPr>
-          <a:xfrm>
-            <a:off x="7863840" y="4041648"/>
-            <a:ext cx="82296" cy="658368"/>
-          </a:xfrm>
-          <a:prstGeom prst="rect">
-            <a:avLst/>
-          </a:prstGeom>
-          <a:solidFill>
-            <a:srgbClr val="A34A38"/>
-          </a:solidFill>
-          <a:ln>
-            <a:noFill/>
-          </a:ln>
-          <a:effectLst/>
-        </p:spPr>
-        <p:style>
-          <a:lnRef idx="1">
-            <a:schemeClr val="accent1"/>
-          </a:lnRef>
-          <a:fillRef idx="3">
-            <a:schemeClr val="accent1"/>
-          </a:fillRef>
-          <a:effectRef idx="2">
-            <a:schemeClr val="accent1"/>
-          </a:effectRef>
-          <a:fontRef idx="minor">
-            <a:schemeClr val="lt1"/>
-          </a:fontRef>
-        </p:style>
-        <p:txBody>
-          <a:bodyPr rtlCol="0" anchor="ctr"/>
-          <a:lstStyle/>
-          <a:p>
-            <a:pPr algn="ctr"/>
-          </a:p>
-        </p:txBody>
-      </p:sp>
-      <p:sp>
-        <p:nvSpPr>
-          <p:cNvPr id="16" name="TextBox 15"/>
-          <p:cNvSpPr txBox="1"/>
-          <p:nvPr/>
-        </p:nvSpPr>
-        <p:spPr>
-          <a:xfrm>
-            <a:off x="8138160" y="4215384"/>
-            <a:ext cx="3291840" cy="365760"/>
-          </a:xfrm>
-          <a:prstGeom prst="rect">
-            <a:avLst/>
-          </a:prstGeom>
-          <a:noFill/>
-        </p:spPr>
-        <p:txBody>
-          <a:bodyPr wrap="square" lIns="0" rIns="0" tIns="0" bIns="0">
-            <a:spAutoFit/>
-          </a:bodyPr>
-          <a:lstStyle/>
+              <a:t>Revenue didefinisikan sebagai total harga barang TANPA ongkos kirim, hanya dari order berstatus delivered. Angka pembayaran (payment_value) lebih besar karena memuat ongkir, dan sengaja tidak dipakai sebagai revenue.</a:t>
+            </a:r>
+          </a:p>
           <a:p>
             <a:pPr>
+              <a:lnSpc>
+                <a:spcPct val="113000"/>
+              </a:lnSpc>
+              <a:spcBef>
+                <a:spcPts val="0"/>
+              </a:spcBef>
               <a:spcAft>
-                <a:spcPts val="0"/>
+                <a:spcPts val="1000"/>
               </a:spcAft>
             </a:pPr>
             <a:r>
-              <a:rPr sz="1450" b="1" i="0">
+              <a:rPr sz="1500" b="0">
                 <a:solidFill>
                   <a:srgbClr val="33231C"/>
                 </a:solidFill>
                 <a:latin typeface="Noto Sans"/>
               </a:rPr>
-              <a:t>Query SQL dan pandas</a:t>
-            </a:r>
-          </a:p>
-        </p:txBody>
-      </p:sp>
-      <p:sp>
-        <p:nvSpPr>
-          <p:cNvPr id="17" name="TextBox 16"/>
-          <p:cNvSpPr txBox="1"/>
-          <p:nvPr/>
-        </p:nvSpPr>
-        <p:spPr>
-          <a:xfrm>
-            <a:off x="7863840" y="4718304"/>
-            <a:ext cx="3685032" cy="274320"/>
-          </a:xfrm>
-          <a:prstGeom prst="rect">
-            <a:avLst/>
-          </a:prstGeom>
-          <a:noFill/>
-        </p:spPr>
-        <p:txBody>
-          <a:bodyPr wrap="square" lIns="0" rIns="0" tIns="0" bIns="0">
-            <a:spAutoFit/>
-          </a:bodyPr>
-          <a:lstStyle/>
-          <a:p>
-            <a:pPr algn="ctr">
-              <a:spcAft>
-                <a:spcPts val="0"/>
-              </a:spcAft>
-            </a:pPr>
-            <a:r>
-              <a:rPr sz="1300" b="1" i="0">
-                <a:solidFill>
-                  <a:srgbClr val="DE7A2D"/>
-                </a:solidFill>
-                <a:latin typeface="Noto Sans"/>
-              </a:rPr>
-              <a:t>↓</a:t>
-            </a:r>
-          </a:p>
-        </p:txBody>
-      </p:sp>
-      <p:sp>
-        <p:nvSpPr>
-          <p:cNvPr id="18" name="Rectangle 17"/>
-          <p:cNvSpPr/>
-          <p:nvPr/>
-        </p:nvSpPr>
-        <p:spPr>
-          <a:xfrm>
-            <a:off x="7863840" y="5010912"/>
-            <a:ext cx="3685032" cy="658368"/>
-          </a:xfrm>
-          <a:prstGeom prst="rect">
-            <a:avLst/>
-          </a:prstGeom>
-          <a:solidFill>
-            <a:srgbClr val="F8F2E5"/>
-          </a:solidFill>
-          <a:ln>
-            <a:noFill/>
-          </a:ln>
-          <a:effectLst/>
-        </p:spPr>
-        <p:style>
-          <a:lnRef idx="1">
-            <a:schemeClr val="accent1"/>
-          </a:lnRef>
-          <a:fillRef idx="3">
-            <a:schemeClr val="accent1"/>
-          </a:fillRef>
-          <a:effectRef idx="2">
-            <a:schemeClr val="accent1"/>
-          </a:effectRef>
-          <a:fontRef idx="minor">
-            <a:schemeClr val="lt1"/>
-          </a:fontRef>
-        </p:style>
-        <p:txBody>
-          <a:bodyPr rtlCol="0" anchor="ctr"/>
-          <a:lstStyle/>
-          <a:p>
-            <a:pPr algn="ctr"/>
-          </a:p>
-        </p:txBody>
-      </p:sp>
-      <p:sp>
-        <p:nvSpPr>
-          <p:cNvPr id="19" name="Rectangle 18"/>
-          <p:cNvSpPr/>
-          <p:nvPr/>
-        </p:nvSpPr>
-        <p:spPr>
-          <a:xfrm>
-            <a:off x="7863840" y="5010912"/>
-            <a:ext cx="82296" cy="658368"/>
-          </a:xfrm>
-          <a:prstGeom prst="rect">
-            <a:avLst/>
-          </a:prstGeom>
-          <a:solidFill>
-            <a:srgbClr val="DE7A2D"/>
-          </a:solidFill>
-          <a:ln>
-            <a:noFill/>
-          </a:ln>
-          <a:effectLst/>
-        </p:spPr>
-        <p:style>
-          <a:lnRef idx="1">
-            <a:schemeClr val="accent1"/>
-          </a:lnRef>
-          <a:fillRef idx="3">
-            <a:schemeClr val="accent1"/>
-          </a:fillRef>
-          <a:effectRef idx="2">
-            <a:schemeClr val="accent1"/>
-          </a:effectRef>
-          <a:fontRef idx="minor">
-            <a:schemeClr val="lt1"/>
-          </a:fontRef>
-        </p:style>
-        <p:txBody>
-          <a:bodyPr rtlCol="0" anchor="ctr"/>
-          <a:lstStyle/>
-          <a:p>
-            <a:pPr algn="ctr"/>
-          </a:p>
-        </p:txBody>
-      </p:sp>
-      <p:sp>
-        <p:nvSpPr>
-          <p:cNvPr id="20" name="TextBox 19"/>
-          <p:cNvSpPr txBox="1"/>
-          <p:nvPr/>
-        </p:nvSpPr>
-        <p:spPr>
-          <a:xfrm>
-            <a:off x="8138160" y="5184648"/>
-            <a:ext cx="3291840" cy="365760"/>
-          </a:xfrm>
-          <a:prstGeom prst="rect">
-            <a:avLst/>
-          </a:prstGeom>
-          <a:noFill/>
-        </p:spPr>
-        <p:txBody>
-          <a:bodyPr wrap="square" lIns="0" rIns="0" tIns="0" bIns="0">
-            <a:spAutoFit/>
-          </a:bodyPr>
-          <a:lstStyle/>
-          <a:p>
-            <a:pPr>
-              <a:spcAft>
-                <a:spcPts val="0"/>
-              </a:spcAft>
-            </a:pPr>
-            <a:r>
-              <a:rPr sz="1450" b="1" i="0">
-                <a:solidFill>
-                  <a:srgbClr val="33231C"/>
-                </a:solidFill>
-                <a:latin typeface="Noto Sans"/>
-              </a:rPr>
-              <a:t>Rekomendasi berbasis bukti</a:t>
+              <a:t>Bad review didefinisikan sebagai ulasan dengan skor 1 atau 2 dari 5. Setiap angka di deck ini menyebut konteks statusnya agar tidak tertukar.</a:t>
             </a:r>
           </a:p>
         </p:txBody>
@@ -5122,8 +5501,8 @@
         </p:nvSpPr>
         <p:spPr>
           <a:xfrm>
-            <a:off x="640080" y="384048"/>
-            <a:ext cx="10881360" cy="914400"/>
+            <a:off x="502920" y="384048"/>
+            <a:ext cx="11155680" cy="914400"/>
           </a:xfrm>
           <a:prstGeom prst="rect">
             <a:avLst/>
@@ -5131,18 +5510,24 @@
           <a:noFill/>
         </p:spPr>
         <p:txBody>
-          <a:bodyPr wrap="square" lIns="0" rIns="0" tIns="0" bIns="0">
+          <a:bodyPr wrap="square" anchor="t" lIns="0" rIns="0" tIns="0" bIns="0">
             <a:spAutoFit/>
           </a:bodyPr>
           <a:lstStyle/>
           <a:p>
             <a:pPr>
+              <a:lnSpc>
+                <a:spcPct val="113000"/>
+              </a:lnSpc>
+              <a:spcBef>
+                <a:spcPts val="0"/>
+              </a:spcBef>
               <a:spcAft>
-                <a:spcPts val="800"/>
+                <a:spcPts val="0"/>
               </a:spcAft>
             </a:pPr>
             <a:r>
-              <a:rPr sz="3200" b="1" i="0">
+              <a:rPr sz="3100" b="1">
                 <a:solidFill>
                   <a:srgbClr val="33231C"/>
                 </a:solidFill>
@@ -5155,17 +5540,19 @@
       </p:sp>
       <p:sp>
         <p:nvSpPr>
-          <p:cNvPr id="3" name="Rectangle 2"/>
+          <p:cNvPr id="3" name="Rounded Rectangle 2"/>
           <p:cNvSpPr/>
           <p:nvPr/>
         </p:nvSpPr>
         <p:spPr>
           <a:xfrm>
-            <a:off x="658368" y="1225296"/>
-            <a:ext cx="1371600" cy="64008"/>
-          </a:xfrm>
-          <a:prstGeom prst="rect">
-            <a:avLst/>
+            <a:off x="521207" y="1097280"/>
+            <a:ext cx="777240" cy="82296"/>
+          </a:xfrm>
+          <a:prstGeom prst="roundRect">
+            <a:avLst>
+              <a:gd name="adj" fmla="val 5500"/>
+            </a:avLst>
           </a:prstGeom>
           <a:solidFill>
             <a:srgbClr val="DE7A2D"/>
@@ -5199,14 +5586,60 @@
       </p:sp>
       <p:sp>
         <p:nvSpPr>
-          <p:cNvPr id="4" name="TextBox 3"/>
+          <p:cNvPr id="4" name="Rounded Rectangle 3"/>
+          <p:cNvSpPr/>
+          <p:nvPr/>
+        </p:nvSpPr>
+        <p:spPr>
+          <a:xfrm>
+            <a:off x="502920" y="1417320"/>
+            <a:ext cx="4572000" cy="1783080"/>
+          </a:xfrm>
+          <a:prstGeom prst="roundRect">
+            <a:avLst>
+              <a:gd name="adj" fmla="val 5500"/>
+            </a:avLst>
+          </a:prstGeom>
+          <a:solidFill>
+            <a:srgbClr val="A34A38"/>
+          </a:solidFill>
+          <a:ln>
+            <a:noFill/>
+          </a:ln>
+          <a:effectLst/>
+        </p:spPr>
+        <p:style>
+          <a:lnRef idx="1">
+            <a:schemeClr val="accent1"/>
+          </a:lnRef>
+          <a:fillRef idx="3">
+            <a:schemeClr val="accent1"/>
+          </a:fillRef>
+          <a:effectRef idx="2">
+            <a:schemeClr val="accent1"/>
+          </a:effectRef>
+          <a:fontRef idx="minor">
+            <a:schemeClr val="lt1"/>
+          </a:fontRef>
+        </p:style>
+        <p:txBody>
+          <a:bodyPr rtlCol="0" anchor="ctr"/>
+          <a:lstStyle/>
+          <a:p>
+            <a:pPr algn="ctr"/>
+          </a:p>
+        </p:txBody>
+      </p:sp>
+      <p:sp>
+        <p:nvSpPr>
+          <p:cNvPr id="5" name="TextBox 4"/>
           <p:cNvSpPr txBox="1"/>
           <p:nvPr/>
         </p:nvSpPr>
         <p:spPr>
           <a:xfrm>
-            <a:off x="640080" y="1481328"/>
-            <a:ext cx="4114800" cy="1051560"/>
+            <a:off x="822960" y="1627632"/>
+            <a:ext cx="3977639" cy="1463040"/>
           </a:xfrm>
           <a:prstGeom prst="rect">
             <a:avLst/>
@@ -5214,38 +5647,66 @@
           <a:noFill/>
         </p:spPr>
         <p:txBody>
-          <a:bodyPr wrap="square" lIns="0" rIns="0" tIns="0" bIns="0">
+          <a:bodyPr wrap="square" anchor="t" lIns="0" rIns="0" tIns="0" bIns="0">
             <a:spAutoFit/>
           </a:bodyPr>
           <a:lstStyle/>
           <a:p>
             <a:pPr>
+              <a:lnSpc>
+                <a:spcPct val="113000"/>
+              </a:lnSpc>
+              <a:spcBef>
+                <a:spcPts val="0"/>
+              </a:spcBef>
               <a:spcAft>
-                <a:spcPts val="0"/>
+                <a:spcPts val="200"/>
               </a:spcAft>
             </a:pPr>
             <a:r>
-              <a:rPr sz="5200" b="1" i="0">
-                <a:solidFill>
-                  <a:srgbClr val="A34A38"/>
+              <a:rPr sz="4400" b="1">
+                <a:solidFill>
+                  <a:srgbClr val="FFFFFF"/>
                 </a:solidFill>
                 <a:latin typeface="Noto Sans"/>
               </a:rPr>
               <a:t>+82%</a:t>
             </a:r>
           </a:p>
-        </p:txBody>
-      </p:sp>
-      <p:sp>
-        <p:nvSpPr>
-          <p:cNvPr id="5" name="TextBox 4"/>
+          <a:p>
+            <a:pPr>
+              <a:lnSpc>
+                <a:spcPct val="113000"/>
+              </a:lnSpc>
+              <a:spcBef>
+                <a:spcPts val="0"/>
+              </a:spcBef>
+              <a:spcAft>
+                <a:spcPts val="0"/>
+              </a:spcAft>
+            </a:pPr>
+            <a:r>
+              <a:rPr sz="1250" b="0">
+                <a:solidFill>
+                  <a:srgbClr val="F8F2E5"/>
+                </a:solidFill>
+                <a:latin typeface="Noto Sans"/>
+              </a:rPr>
+              <a:t>pertumbuhan rata-rata revenue bulanan, 2017 ke Jan-Agu 2018</a:t>
+            </a:r>
+          </a:p>
+        </p:txBody>
+      </p:sp>
+      <p:sp>
+        <p:nvSpPr>
+          <p:cNvPr id="6" name="TextBox 5"/>
           <p:cNvSpPr txBox="1"/>
           <p:nvPr/>
         </p:nvSpPr>
         <p:spPr>
           <a:xfrm>
-            <a:off x="640080" y="2487168"/>
-            <a:ext cx="4114800" cy="685800"/>
+            <a:off x="502920" y="3429000"/>
+            <a:ext cx="4572000" cy="2651760"/>
           </a:xfrm>
           <a:prstGeom prst="rect">
             <a:avLst/>
@@ -5253,117 +5714,173 @@
           <a:noFill/>
         </p:spPr>
         <p:txBody>
-          <a:bodyPr wrap="square" lIns="0" rIns="0" tIns="0" bIns="0">
+          <a:bodyPr wrap="square" anchor="t" lIns="0" rIns="0" tIns="0" bIns="0">
             <a:spAutoFit/>
           </a:bodyPr>
           <a:lstStyle/>
           <a:p>
             <a:pPr>
               <a:lnSpc>
-                <a:spcPct val="115000"/>
+                <a:spcPct val="113000"/>
               </a:lnSpc>
+              <a:spcBef>
+                <a:spcPts val="0"/>
+              </a:spcBef>
               <a:spcAft>
-                <a:spcPts val="0"/>
+                <a:spcPts val="1000"/>
               </a:spcAft>
             </a:pPr>
             <a:r>
-              <a:rPr sz="1300" b="0" i="0">
-                <a:solidFill>
-                  <a:srgbClr val="6E5B4D"/>
+              <a:rPr sz="1450" b="0">
+                <a:solidFill>
+                  <a:srgbClr val="33231C"/>
                 </a:solidFill>
                 <a:latin typeface="Noto Sans"/>
               </a:rPr>
-              <a:t>pertumbuhan rata rata revenue bulanan, 2017 ke 2018</a:t>
-            </a:r>
-          </a:p>
-        </p:txBody>
-      </p:sp>
-      <p:sp>
-        <p:nvSpPr>
-          <p:cNvPr id="6" name="TextBox 5"/>
-          <p:cNvSpPr txBox="1"/>
-          <p:nvPr/>
-        </p:nvSpPr>
-        <p:spPr>
-          <a:xfrm>
-            <a:off x="640080" y="3291840"/>
-            <a:ext cx="4114800" cy="3200400"/>
-          </a:xfrm>
-          <a:prstGeom prst="rect">
-            <a:avLst/>
-          </a:prstGeom>
-          <a:noFill/>
-        </p:spPr>
-        <p:txBody>
-          <a:bodyPr wrap="square" lIns="0" rIns="0" tIns="0" bIns="0">
-            <a:spAutoFit/>
-          </a:bodyPr>
-          <a:lstStyle/>
-          <a:p>
-            <a:pPr marL="171450" indent="-171450">
+              <a:t>Total revenue produk mencapai 13,22 juta BRL dari 96.478 order delivered selama 23 bulan.</a:t>
+            </a:r>
+          </a:p>
+          <a:p>
+            <a:pPr>
               <a:lnSpc>
-                <a:spcPct val="112000"/>
+                <a:spcPct val="113000"/>
               </a:lnSpc>
+              <a:spcBef>
+                <a:spcPts val="0"/>
+              </a:spcBef>
               <a:spcAft>
-                <a:spcPts val="1200"/>
+                <a:spcPts val="1000"/>
               </a:spcAft>
-              <a:buChar char="•"/>
             </a:pPr>
             <a:r>
-              <a:rPr sz="1450" b="0" i="0">
+              <a:rPr sz="1450" b="0">
                 <a:solidFill>
                   <a:srgbClr val="33231C"/>
                 </a:solidFill>
                 <a:latin typeface="Noto Sans"/>
               </a:rPr>
-              <a:t>Total revenue 13.22 juta BRL dari 96.478 order delivered selama 23 bulan</a:t>
-            </a:r>
-          </a:p>
-          <a:p>
-            <a:pPr marL="171450" indent="-171450">
+              <a:t>Rata-rata revenue bulanan naik dari 0,50 juta BRL pada 2017 menjadi 0,90 juta BRL pada Januari-Agustus 2018.</a:t>
+            </a:r>
+          </a:p>
+          <a:p>
+            <a:pPr>
               <a:lnSpc>
-                <a:spcPct val="112000"/>
+                <a:spcPct val="113000"/>
               </a:lnSpc>
+              <a:spcBef>
+                <a:spcPts val="0"/>
+              </a:spcBef>
               <a:spcAft>
-                <a:spcPts val="1200"/>
+                <a:spcPts val="1000"/>
               </a:spcAft>
-              <a:buChar char="•"/>
             </a:pPr>
             <a:r>
-              <a:rPr sz="1450" b="0" i="0">
+              <a:rPr sz="1450" b="0">
                 <a:solidFill>
                   <a:srgbClr val="33231C"/>
                 </a:solidFill>
                 <a:latin typeface="Noto Sans"/>
               </a:rPr>
-              <a:t>Rata rata revenue bulanan naik dari 0.50 juta BRL pada 2017 menjadi 0.90 juta BRL pada Januari sampai Agustus 2018, tumbuh 82 persen</a:t>
-            </a:r>
-          </a:p>
-          <a:p>
-            <a:pPr marL="171450" indent="-171450">
-              <a:lnSpc>
-                <a:spcPct val="112000"/>
-              </a:lnSpc>
-              <a:spcAft>
-                <a:spcPts val="1200"/>
-              </a:spcAft>
-              <a:buChar char="•"/>
-            </a:pPr>
-            <a:r>
-              <a:rPr sz="1450" b="0" i="0">
-                <a:solidFill>
-                  <a:srgbClr val="33231C"/>
-                </a:solidFill>
-                <a:latin typeface="Noto Sans"/>
-              </a:rPr>
-              <a:t>Puncak terjadi pada November 2017 dengan 0.99 juta BRL dan 7.289 order; pada November 2016 belum ada order sama sekali</a:t>
-            </a:r>
+              <a:t>Puncak terjadi pada November 2017: 0,99 juta BRL dari 7.289 order, menunjukkan pola musiman akhir tahun yang kuat.</a:t>
+            </a:r>
+          </a:p>
+        </p:txBody>
+      </p:sp>
+      <p:sp>
+        <p:nvSpPr>
+          <p:cNvPr id="7" name="Rounded Rectangle 6"/>
+          <p:cNvSpPr/>
+          <p:nvPr/>
+        </p:nvSpPr>
+        <p:spPr>
+          <a:xfrm>
+            <a:off x="5458968" y="1481328"/>
+            <a:ext cx="6291072" cy="4206240"/>
+          </a:xfrm>
+          <a:prstGeom prst="roundRect">
+            <a:avLst>
+              <a:gd name="adj" fmla="val 5500"/>
+            </a:avLst>
+          </a:prstGeom>
+          <a:solidFill>
+            <a:srgbClr val="E2D2B8"/>
+          </a:solidFill>
+          <a:ln>
+            <a:noFill/>
+          </a:ln>
+          <a:effectLst/>
+        </p:spPr>
+        <p:style>
+          <a:lnRef idx="1">
+            <a:schemeClr val="accent1"/>
+          </a:lnRef>
+          <a:fillRef idx="3">
+            <a:schemeClr val="accent1"/>
+          </a:fillRef>
+          <a:effectRef idx="2">
+            <a:schemeClr val="accent1"/>
+          </a:effectRef>
+          <a:fontRef idx="minor">
+            <a:schemeClr val="lt1"/>
+          </a:fontRef>
+        </p:style>
+        <p:txBody>
+          <a:bodyPr rtlCol="0" anchor="ctr"/>
+          <a:lstStyle/>
+          <a:p>
+            <a:pPr algn="ctr"/>
+          </a:p>
+        </p:txBody>
+      </p:sp>
+      <p:sp>
+        <p:nvSpPr>
+          <p:cNvPr id="8" name="Rounded Rectangle 7"/>
+          <p:cNvSpPr/>
+          <p:nvPr/>
+        </p:nvSpPr>
+        <p:spPr>
+          <a:xfrm>
+            <a:off x="5394960" y="1417320"/>
+            <a:ext cx="6291072" cy="4206240"/>
+          </a:xfrm>
+          <a:prstGeom prst="roundRect">
+            <a:avLst>
+              <a:gd name="adj" fmla="val 5500"/>
+            </a:avLst>
+          </a:prstGeom>
+          <a:solidFill>
+            <a:srgbClr val="F8F2E5"/>
+          </a:solidFill>
+          <a:ln>
+            <a:noFill/>
+          </a:ln>
+          <a:effectLst/>
+        </p:spPr>
+        <p:style>
+          <a:lnRef idx="1">
+            <a:schemeClr val="accent1"/>
+          </a:lnRef>
+          <a:fillRef idx="3">
+            <a:schemeClr val="accent1"/>
+          </a:fillRef>
+          <a:effectRef idx="2">
+            <a:schemeClr val="accent1"/>
+          </a:effectRef>
+          <a:fontRef idx="minor">
+            <a:schemeClr val="lt1"/>
+          </a:fontRef>
+        </p:style>
+        <p:txBody>
+          <a:bodyPr rtlCol="0" anchor="ctr"/>
+          <a:lstStyle/>
+          <a:p>
+            <a:pPr algn="ctr"/>
           </a:p>
         </p:txBody>
       </p:sp>
       <p:pic>
         <p:nvPicPr>
-          <p:cNvPr id="7" name="Picture 6" descr="01_tren_revenue_order.png"/>
+          <p:cNvPr id="9" name="Picture 8" descr="01_tren_revenue_order.png"/>
           <p:cNvPicPr>
             <a:picLocks noChangeAspect="1"/>
           </p:cNvPicPr>
@@ -5377,8 +5894,8 @@
         </p:blipFill>
         <p:spPr>
           <a:xfrm>
-            <a:off x="5029200" y="1481328"/>
-            <a:ext cx="6519672" cy="3911803"/>
+            <a:off x="5596128" y="1753819"/>
+            <a:ext cx="5888736" cy="3533241"/>
           </a:xfrm>
           <a:prstGeom prst="rect">
             <a:avLst/>
@@ -5387,14 +5904,14 @@
       </p:pic>
       <p:sp>
         <p:nvSpPr>
-          <p:cNvPr id="8" name="TextBox 7"/>
+          <p:cNvPr id="10" name="TextBox 9"/>
           <p:cNvSpPr txBox="1"/>
           <p:nvPr/>
         </p:nvSpPr>
         <p:spPr>
           <a:xfrm>
-            <a:off x="5029200" y="5502859"/>
-            <a:ext cx="6519672" cy="365760"/>
+            <a:off x="5394960" y="5714999"/>
+            <a:ext cx="6291072" cy="274320"/>
           </a:xfrm>
           <a:prstGeom prst="rect">
             <a:avLst/>
@@ -5402,24 +5919,30 @@
           <a:noFill/>
         </p:spPr>
         <p:txBody>
-          <a:bodyPr wrap="square" lIns="0" rIns="0" tIns="0" bIns="0">
+          <a:bodyPr wrap="square" anchor="t" lIns="0" rIns="0" tIns="0" bIns="0">
             <a:spAutoFit/>
           </a:bodyPr>
           <a:lstStyle/>
           <a:p>
-            <a:pPr algn="ctr">
+            <a:pPr>
+              <a:lnSpc>
+                <a:spcPct val="113000"/>
+              </a:lnSpc>
+              <a:spcBef>
+                <a:spcPts val="0"/>
+              </a:spcBef>
               <a:spcAft>
-                <a:spcPts val="800"/>
+                <a:spcPts val="0"/>
               </a:spcAft>
             </a:pPr>
             <a:r>
-              <a:rPr sz="1200" b="0" i="1">
-                <a:solidFill>
-                  <a:srgbClr val="6E5B4D"/>
+              <a:rPr sz="1050" b="0">
+                <a:solidFill>
+                  <a:srgbClr val="8A7A6C"/>
                 </a:solidFill>
                 <a:latin typeface="Noto Sans"/>
               </a:rPr>
-              <a:t>Tren revenue dan jumlah order bulanan</a:t>
+              <a:t>Chart: tren revenue dan jumlah order bulanan.</a:t>
             </a:r>
           </a:p>
         </p:txBody>
@@ -5458,8 +5981,8 @@
         </p:nvSpPr>
         <p:spPr>
           <a:xfrm>
-            <a:off x="640080" y="384048"/>
-            <a:ext cx="10881360" cy="914400"/>
+            <a:off x="502920" y="384048"/>
+            <a:ext cx="11155680" cy="914400"/>
           </a:xfrm>
           <a:prstGeom prst="rect">
             <a:avLst/>
@@ -5467,18 +5990,24 @@
           <a:noFill/>
         </p:spPr>
         <p:txBody>
-          <a:bodyPr wrap="square" lIns="0" rIns="0" tIns="0" bIns="0">
+          <a:bodyPr wrap="square" anchor="t" lIns="0" rIns="0" tIns="0" bIns="0">
             <a:spAutoFit/>
           </a:bodyPr>
           <a:lstStyle/>
           <a:p>
             <a:pPr>
+              <a:lnSpc>
+                <a:spcPct val="113000"/>
+              </a:lnSpc>
+              <a:spcBef>
+                <a:spcPts val="0"/>
+              </a:spcBef>
               <a:spcAft>
-                <a:spcPts val="800"/>
+                <a:spcPts val="0"/>
               </a:spcAft>
             </a:pPr>
             <a:r>
-              <a:rPr sz="3200" b="1" i="0">
+              <a:rPr sz="3100" b="1">
                 <a:solidFill>
                   <a:srgbClr val="33231C"/>
                 </a:solidFill>
@@ -5491,17 +6020,19 @@
       </p:sp>
       <p:sp>
         <p:nvSpPr>
-          <p:cNvPr id="3" name="Rectangle 2"/>
+          <p:cNvPr id="3" name="Rounded Rectangle 2"/>
           <p:cNvSpPr/>
           <p:nvPr/>
         </p:nvSpPr>
         <p:spPr>
           <a:xfrm>
-            <a:off x="658368" y="1225296"/>
-            <a:ext cx="1371600" cy="64008"/>
-          </a:xfrm>
-          <a:prstGeom prst="rect">
-            <a:avLst/>
+            <a:off x="521207" y="1097280"/>
+            <a:ext cx="777240" cy="82296"/>
+          </a:xfrm>
+          <a:prstGeom prst="roundRect">
+            <a:avLst>
+              <a:gd name="adj" fmla="val 5500"/>
+            </a:avLst>
           </a:prstGeom>
           <a:solidFill>
             <a:srgbClr val="DE7A2D"/>
@@ -5533,9 +6064,101 @@
           </a:p>
         </p:txBody>
       </p:sp>
+      <p:sp>
+        <p:nvSpPr>
+          <p:cNvPr id="4" name="Rounded Rectangle 3"/>
+          <p:cNvSpPr/>
+          <p:nvPr/>
+        </p:nvSpPr>
+        <p:spPr>
+          <a:xfrm>
+            <a:off x="566928" y="1481328"/>
+            <a:ext cx="5120640" cy="3520440"/>
+          </a:xfrm>
+          <a:prstGeom prst="roundRect">
+            <a:avLst>
+              <a:gd name="adj" fmla="val 5500"/>
+            </a:avLst>
+          </a:prstGeom>
+          <a:solidFill>
+            <a:srgbClr val="E2D2B8"/>
+          </a:solidFill>
+          <a:ln>
+            <a:noFill/>
+          </a:ln>
+          <a:effectLst/>
+        </p:spPr>
+        <p:style>
+          <a:lnRef idx="1">
+            <a:schemeClr val="accent1"/>
+          </a:lnRef>
+          <a:fillRef idx="3">
+            <a:schemeClr val="accent1"/>
+          </a:fillRef>
+          <a:effectRef idx="2">
+            <a:schemeClr val="accent1"/>
+          </a:effectRef>
+          <a:fontRef idx="minor">
+            <a:schemeClr val="lt1"/>
+          </a:fontRef>
+        </p:style>
+        <p:txBody>
+          <a:bodyPr rtlCol="0" anchor="ctr"/>
+          <a:lstStyle/>
+          <a:p>
+            <a:pPr algn="ctr"/>
+          </a:p>
+        </p:txBody>
+      </p:sp>
+      <p:sp>
+        <p:nvSpPr>
+          <p:cNvPr id="5" name="Rounded Rectangle 4"/>
+          <p:cNvSpPr/>
+          <p:nvPr/>
+        </p:nvSpPr>
+        <p:spPr>
+          <a:xfrm>
+            <a:off x="502920" y="1417320"/>
+            <a:ext cx="5120640" cy="3520440"/>
+          </a:xfrm>
+          <a:prstGeom prst="roundRect">
+            <a:avLst>
+              <a:gd name="adj" fmla="val 5500"/>
+            </a:avLst>
+          </a:prstGeom>
+          <a:solidFill>
+            <a:srgbClr val="F8F2E5"/>
+          </a:solidFill>
+          <a:ln>
+            <a:noFill/>
+          </a:ln>
+          <a:effectLst/>
+        </p:spPr>
+        <p:style>
+          <a:lnRef idx="1">
+            <a:schemeClr val="accent1"/>
+          </a:lnRef>
+          <a:fillRef idx="3">
+            <a:schemeClr val="accent1"/>
+          </a:fillRef>
+          <a:effectRef idx="2">
+            <a:schemeClr val="accent1"/>
+          </a:effectRef>
+          <a:fontRef idx="minor">
+            <a:schemeClr val="lt1"/>
+          </a:fontRef>
+        </p:style>
+        <p:txBody>
+          <a:bodyPr rtlCol="0" anchor="ctr"/>
+          <a:lstStyle/>
+          <a:p>
+            <a:pPr algn="ctr"/>
+          </a:p>
+        </p:txBody>
+      </p:sp>
       <p:pic>
         <p:nvPicPr>
-          <p:cNvPr id="4" name="Picture 3" descr="04_kategori_skor_vs_bad_rate.png"/>
+          <p:cNvPr id="6" name="Picture 5" descr="02_top10_kategori_revenue.png"/>
           <p:cNvPicPr>
             <a:picLocks noChangeAspect="1"/>
           </p:cNvPicPr>
@@ -5549,8 +6172,8 @@
         </p:blipFill>
         <p:spPr>
           <a:xfrm>
-            <a:off x="640080" y="1554480"/>
-            <a:ext cx="6309360" cy="3785615"/>
+            <a:off x="704088" y="1762048"/>
+            <a:ext cx="4718303" cy="2830982"/>
           </a:xfrm>
           <a:prstGeom prst="rect">
             <a:avLst/>
@@ -5559,14 +6182,14 @@
       </p:pic>
       <p:sp>
         <p:nvSpPr>
-          <p:cNvPr id="5" name="TextBox 4"/>
+          <p:cNvPr id="7" name="TextBox 6"/>
           <p:cNvSpPr txBox="1"/>
           <p:nvPr/>
         </p:nvSpPr>
         <p:spPr>
           <a:xfrm>
-            <a:off x="640080" y="5449824"/>
-            <a:ext cx="6309360" cy="365760"/>
+            <a:off x="502920" y="5029200"/>
+            <a:ext cx="5120640" cy="274320"/>
           </a:xfrm>
           <a:prstGeom prst="rect">
             <a:avLst/>
@@ -5574,38 +6197,44 @@
           <a:noFill/>
         </p:spPr>
         <p:txBody>
-          <a:bodyPr wrap="square" lIns="0" rIns="0" tIns="0" bIns="0">
+          <a:bodyPr wrap="square" anchor="t" lIns="0" rIns="0" tIns="0" bIns="0">
             <a:spAutoFit/>
           </a:bodyPr>
           <a:lstStyle/>
           <a:p>
-            <a:pPr algn="ctr">
+            <a:pPr>
+              <a:lnSpc>
+                <a:spcPct val="113000"/>
+              </a:lnSpc>
+              <a:spcBef>
+                <a:spcPts val="0"/>
+              </a:spcBef>
               <a:spcAft>
-                <a:spcPts val="800"/>
+                <a:spcPts val="0"/>
               </a:spcAft>
             </a:pPr>
             <a:r>
-              <a:rPr sz="1200" b="0" i="1">
-                <a:solidFill>
-                  <a:srgbClr val="6E5B4D"/>
+              <a:rPr sz="1050" b="0">
+                <a:solidFill>
+                  <a:srgbClr val="8A7A6C"/>
                 </a:solidFill>
                 <a:latin typeface="Noto Sans"/>
               </a:rPr>
-              <a:t>Skor ulasan dan bad review rate per kategori</a:t>
-            </a:r>
-          </a:p>
-        </p:txBody>
-      </p:sp>
-      <p:sp>
-        <p:nvSpPr>
-          <p:cNvPr id="6" name="TextBox 5"/>
+              <a:t>Chart: 10 kategori dengan revenue terbesar.</a:t>
+            </a:r>
+          </a:p>
+        </p:txBody>
+      </p:sp>
+      <p:sp>
+        <p:nvSpPr>
+          <p:cNvPr id="8" name="TextBox 7"/>
           <p:cNvSpPr txBox="1"/>
           <p:nvPr/>
         </p:nvSpPr>
         <p:spPr>
           <a:xfrm>
-            <a:off x="7269480" y="1600200"/>
-            <a:ext cx="4279392" cy="4754880"/>
+            <a:off x="5989320" y="1481328"/>
+            <a:ext cx="5715000" cy="3474720"/>
           </a:xfrm>
           <a:prstGeom prst="rect">
             <a:avLst/>
@@ -5613,88 +6242,165 @@
           <a:noFill/>
         </p:spPr>
         <p:txBody>
-          <a:bodyPr wrap="square" lIns="0" rIns="0" tIns="0" bIns="0">
+          <a:bodyPr wrap="square" anchor="t" lIns="0" rIns="0" tIns="0" bIns="0">
             <a:spAutoFit/>
           </a:bodyPr>
           <a:lstStyle/>
           <a:p>
-            <a:pPr marL="171450" indent="-171450">
+            <a:pPr>
               <a:lnSpc>
-                <a:spcPct val="112000"/>
+                <a:spcPct val="113000"/>
               </a:lnSpc>
+              <a:spcBef>
+                <a:spcPts val="0"/>
+              </a:spcBef>
               <a:spcAft>
-                <a:spcPts val="1200"/>
+                <a:spcPts val="1000"/>
               </a:spcAft>
-              <a:buChar char="•"/>
             </a:pPr>
             <a:r>
-              <a:rPr sz="1550" b="0" i="0">
+              <a:rPr sz="1550" b="0">
                 <a:solidFill>
                   <a:srgbClr val="33231C"/>
                 </a:solidFill>
                 <a:latin typeface="Noto Sans"/>
               </a:rPr>
-              <a:t>Dari 73 kategori, health beauty memimpin revenue 1.23 juta BRL atau 9.4 persen dari total</a:t>
-            </a:r>
-          </a:p>
-          <a:p>
-            <a:pPr marL="171450" indent="-171450">
+              <a:t>Dari 73 kategori, health beauty memimpin revenue: 1,23 juta BRL atau 9,4% dari total. Kategori terkecil, insurance services, hanya 283 BRL dari 2 order.</a:t>
+            </a:r>
+          </a:p>
+          <a:p>
+            <a:pPr>
               <a:lnSpc>
-                <a:spcPct val="112000"/>
+                <a:spcPct val="113000"/>
               </a:lnSpc>
+              <a:spcBef>
+                <a:spcPts val="0"/>
+              </a:spcBef>
               <a:spcAft>
-                <a:spcPts val="1200"/>
+                <a:spcPts val="1000"/>
               </a:spcAft>
-              <a:buChar char="•"/>
             </a:pPr>
             <a:r>
-              <a:rPr sz="1550" b="0" i="0">
+              <a:rPr sz="1550" b="0">
                 <a:solidFill>
                   <a:srgbClr val="33231C"/>
                 </a:solidFill>
                 <a:latin typeface="Noto Sans"/>
               </a:rPr>
-              <a:t>Kategori terkecil insurance services hanya 283 BRL dari 2 order</a:t>
-            </a:r>
-          </a:p>
-          <a:p>
-            <a:pPr marL="171450" indent="-171450">
+              <a:t>Bad review rate tertinggi ada di mens fashion: 22,9% dengan skor rata-rata 3,8. Skor ulasan tertinggi: general interest books (4,5).</a:t>
+            </a:r>
+          </a:p>
+          <a:p>
+            <a:pPr>
               <a:lnSpc>
-                <a:spcPct val="112000"/>
+                <a:spcPct val="113000"/>
               </a:lnSpc>
+              <a:spcBef>
+                <a:spcPts val="0"/>
+              </a:spcBef>
               <a:spcAft>
-                <a:spcPts val="1200"/>
+                <a:spcPts val="1000"/>
               </a:spcAft>
-              <a:buChar char="•"/>
             </a:pPr>
             <a:r>
-              <a:rPr sz="1550" b="0" i="0">
+              <a:rPr sz="1550" b="0">
                 <a:solidFill>
                   <a:srgbClr val="33231C"/>
                 </a:solidFill>
                 <a:latin typeface="Noto Sans"/>
               </a:rPr>
-              <a:t>Bad review rate tertinggi ada di mens fashion: 22.9 persen dengan skor rata rata 3.8</a:t>
-            </a:r>
-          </a:p>
-          <a:p>
-            <a:pPr marL="171450" indent="-171450">
+              <a:t>Konsentrasi revenue pada kategori kesehatan dan kecantikan membuat performa platform sensitif pada sedikit kategori besar.</a:t>
+            </a:r>
+          </a:p>
+        </p:txBody>
+      </p:sp>
+      <p:sp>
+        <p:nvSpPr>
+          <p:cNvPr id="9" name="Rounded Rectangle 8"/>
+          <p:cNvSpPr/>
+          <p:nvPr/>
+        </p:nvSpPr>
+        <p:spPr>
+          <a:xfrm>
+            <a:off x="502920" y="5193792"/>
+            <a:ext cx="11183112" cy="932688"/>
+          </a:xfrm>
+          <a:prstGeom prst="roundRect">
+            <a:avLst>
+              <a:gd name="adj" fmla="val 5500"/>
+            </a:avLst>
+          </a:prstGeom>
+          <a:solidFill>
+            <a:srgbClr val="F8F2E5"/>
+          </a:solidFill>
+          <a:ln>
+            <a:noFill/>
+          </a:ln>
+          <a:effectLst/>
+        </p:spPr>
+        <p:style>
+          <a:lnRef idx="1">
+            <a:schemeClr val="accent1"/>
+          </a:lnRef>
+          <a:fillRef idx="3">
+            <a:schemeClr val="accent1"/>
+          </a:fillRef>
+          <a:effectRef idx="2">
+            <a:schemeClr val="accent1"/>
+          </a:effectRef>
+          <a:fontRef idx="minor">
+            <a:schemeClr val="lt1"/>
+          </a:fontRef>
+        </p:style>
+        <p:txBody>
+          <a:bodyPr rtlCol="0" anchor="ctr"/>
+          <a:lstStyle/>
+          <a:p>
+            <a:pPr algn="ctr"/>
+          </a:p>
+        </p:txBody>
+      </p:sp>
+      <p:sp>
+        <p:nvSpPr>
+          <p:cNvPr id="10" name="TextBox 9"/>
+          <p:cNvSpPr txBox="1"/>
+          <p:nvPr/>
+        </p:nvSpPr>
+        <p:spPr>
+          <a:xfrm>
+            <a:off x="960120" y="5394960"/>
+            <a:ext cx="10424160" cy="548640"/>
+          </a:xfrm>
+          <a:prstGeom prst="rect">
+            <a:avLst/>
+          </a:prstGeom>
+          <a:noFill/>
+        </p:spPr>
+        <p:txBody>
+          <a:bodyPr wrap="square" anchor="ctr" lIns="0" rIns="0" tIns="0" bIns="0">
+            <a:spAutoFit/>
+          </a:bodyPr>
+          <a:lstStyle/>
+          <a:p>
+            <a:pPr>
               <a:lnSpc>
-                <a:spcPct val="112000"/>
+                <a:spcPct val="113000"/>
               </a:lnSpc>
+              <a:spcBef>
+                <a:spcPts val="0"/>
+              </a:spcBef>
               <a:spcAft>
-                <a:spcPts val="1200"/>
+                <a:spcPts val="0"/>
               </a:spcAft>
-              <a:buChar char="•"/>
             </a:pPr>
             <a:r>
-              <a:rPr sz="1550" b="0" i="0">
-                <a:solidFill>
-                  <a:srgbClr val="33231C"/>
+              <a:rPr sz="1600" b="1">
+                <a:solidFill>
+                  <a:srgbClr val="A34A38"/>
                 </a:solidFill>
                 <a:latin typeface="Noto Sans"/>
               </a:rPr>
-              <a:t>Skor ulasan tertinggi general interest books 4.5, terendah office furniture 3.6</a:t>
+              <a:t>Health beauty: 1,23 juta BRL, 9,4% dari total revenue</a:t>
             </a:r>
           </a:p>
         </p:txBody>
@@ -5733,8 +6439,8 @@
         </p:nvSpPr>
         <p:spPr>
           <a:xfrm>
-            <a:off x="640080" y="384048"/>
-            <a:ext cx="10881360" cy="914400"/>
+            <a:off x="502920" y="384048"/>
+            <a:ext cx="11155680" cy="914400"/>
           </a:xfrm>
           <a:prstGeom prst="rect">
             <a:avLst/>
@@ -5742,18 +6448,24 @@
           <a:noFill/>
         </p:spPr>
         <p:txBody>
-          <a:bodyPr wrap="square" lIns="0" rIns="0" tIns="0" bIns="0">
+          <a:bodyPr wrap="square" anchor="t" lIns="0" rIns="0" tIns="0" bIns="0">
             <a:spAutoFit/>
           </a:bodyPr>
           <a:lstStyle/>
           <a:p>
             <a:pPr>
+              <a:lnSpc>
+                <a:spcPct val="113000"/>
+              </a:lnSpc>
+              <a:spcBef>
+                <a:spcPts val="0"/>
+              </a:spcBef>
               <a:spcAft>
-                <a:spcPts val="800"/>
+                <a:spcPts val="0"/>
               </a:spcAft>
             </a:pPr>
             <a:r>
-              <a:rPr sz="3200" b="1" i="0">
+              <a:rPr sz="3100" b="1">
                 <a:solidFill>
                   <a:srgbClr val="33231C"/>
                 </a:solidFill>
@@ -5766,17 +6478,19 @@
       </p:sp>
       <p:sp>
         <p:nvSpPr>
-          <p:cNvPr id="3" name="Rectangle 2"/>
+          <p:cNvPr id="3" name="Rounded Rectangle 2"/>
           <p:cNvSpPr/>
           <p:nvPr/>
         </p:nvSpPr>
         <p:spPr>
           <a:xfrm>
-            <a:off x="658368" y="1225296"/>
-            <a:ext cx="1371600" cy="64008"/>
-          </a:xfrm>
-          <a:prstGeom prst="rect">
-            <a:avLst/>
+            <a:off x="521207" y="1097280"/>
+            <a:ext cx="777240" cy="82296"/>
+          </a:xfrm>
+          <a:prstGeom prst="roundRect">
+            <a:avLst>
+              <a:gd name="adj" fmla="val 5500"/>
+            </a:avLst>
           </a:prstGeom>
           <a:solidFill>
             <a:srgbClr val="DE7A2D"/>
@@ -5816,8 +6530,8 @@
         </p:nvSpPr>
         <p:spPr>
           <a:xfrm>
-            <a:off x="640080" y="1554480"/>
-            <a:ext cx="5394960" cy="3108960"/>
+            <a:off x="502920" y="1463040"/>
+            <a:ext cx="4526280" cy="3291840"/>
           </a:xfrm>
           <a:prstGeom prst="rect">
             <a:avLst/>
@@ -5825,75 +6539,286 @@
           <a:noFill/>
         </p:spPr>
         <p:txBody>
-          <a:bodyPr wrap="square" lIns="0" rIns="0" tIns="0" bIns="0">
+          <a:bodyPr wrap="square" anchor="t" lIns="0" rIns="0" tIns="0" bIns="0">
             <a:spAutoFit/>
           </a:bodyPr>
           <a:lstStyle/>
           <a:p>
-            <a:pPr marL="171450" indent="-171450">
+            <a:pPr>
               <a:lnSpc>
-                <a:spcPct val="112000"/>
+                <a:spcPct val="113000"/>
               </a:lnSpc>
+              <a:spcBef>
+                <a:spcPts val="0"/>
+              </a:spcBef>
               <a:spcAft>
-                <a:spcPts val="1200"/>
+                <a:spcPts val="1000"/>
               </a:spcAft>
-              <a:buChar char="•"/>
             </a:pPr>
             <a:r>
-              <a:rPr sz="1550" b="0" i="0">
+              <a:rPr sz="1550" b="0">
                 <a:solidFill>
                   <a:srgbClr val="33231C"/>
                 </a:solidFill>
                 <a:latin typeface="Noto Sans"/>
               </a:rPr>
-              <a:t>Sebesar 8.1 persen order tiba melewati estimasi, dengan waktu kirim rata rata 12.6 hari dan median 10.2 hari</a:t>
-            </a:r>
-          </a:p>
-          <a:p>
-            <a:pPr marL="171450" indent="-171450">
+              <a:t>Sebanyak 8,1% order tiba melewati estimasi, dengan waktu kirim rata-rata 12,6 hari (median 10,2 hari).</a:t>
+            </a:r>
+          </a:p>
+          <a:p>
+            <a:pPr>
               <a:lnSpc>
-                <a:spcPct val="112000"/>
+                <a:spcPct val="113000"/>
               </a:lnSpc>
+              <a:spcBef>
+                <a:spcPts val="0"/>
+              </a:spcBef>
               <a:spcAft>
-                <a:spcPts val="1200"/>
+                <a:spcPts val="1000"/>
               </a:spcAft>
-              <a:buChar char="•"/>
             </a:pPr>
             <a:r>
-              <a:rPr sz="1550" b="0" i="0">
+              <a:rPr sz="1550" b="0">
                 <a:solidFill>
                   <a:srgbClr val="33231C"/>
                 </a:solidFill>
                 <a:latin typeface="Noto Sans"/>
               </a:rPr>
-              <a:t>Pelanggan pemberi bintang 1 menunggu 21.3 hari, hampir dua kali lipat dibanding pemberi bintang 5 yang hanya 10.7 hari</a:t>
-            </a:r>
-          </a:p>
-          <a:p>
-            <a:pPr marL="171450" indent="-171450">
+              <a:t>Pemberi bintang 1 menunggu rata-rata 21,3 hari, hampir dua kali lipat pemberi bintang 5 yang hanya 10,7 hari.</a:t>
+            </a:r>
+          </a:p>
+          <a:p>
+            <a:pPr>
               <a:lnSpc>
-                <a:spcPct val="112000"/>
+                <a:spcPct val="113000"/>
               </a:lnSpc>
+              <a:spcBef>
+                <a:spcPts val="0"/>
+              </a:spcBef>
               <a:spcAft>
-                <a:spcPts val="1200"/>
+                <a:spcPts val="1000"/>
               </a:spcAft>
-              <a:buChar char="•"/>
             </a:pPr>
             <a:r>
-              <a:rPr sz="1550" b="0" i="0">
+              <a:rPr sz="1550" b="0">
                 <a:solidFill>
                   <a:srgbClr val="33231C"/>
                 </a:solidFill>
                 <a:latin typeface="Noto Sans"/>
               </a:rPr>
-              <a:t>Pola ini konsisten: semakin lama waktu kirim, semakin rendah skor ulasan yang diberikan</a:t>
-            </a:r>
+              <a:t>Polanya konsisten: semakin lama waktu kirim, semakin rendah skor ulasan. Kecepatan pengiriman adalah tuas kepuasan yang paling terlihat.</a:t>
+            </a:r>
+          </a:p>
+        </p:txBody>
+      </p:sp>
+      <p:sp>
+        <p:nvSpPr>
+          <p:cNvPr id="5" name="Rounded Rectangle 4"/>
+          <p:cNvSpPr/>
+          <p:nvPr/>
+        </p:nvSpPr>
+        <p:spPr>
+          <a:xfrm>
+            <a:off x="502920" y="4846320"/>
+            <a:ext cx="4526280" cy="1170432"/>
+          </a:xfrm>
+          <a:prstGeom prst="roundRect">
+            <a:avLst>
+              <a:gd name="adj" fmla="val 5500"/>
+            </a:avLst>
+          </a:prstGeom>
+          <a:solidFill>
+            <a:srgbClr val="A34A38"/>
+          </a:solidFill>
+          <a:ln>
+            <a:noFill/>
+          </a:ln>
+          <a:effectLst/>
+        </p:spPr>
+        <p:style>
+          <a:lnRef idx="1">
+            <a:schemeClr val="accent1"/>
+          </a:lnRef>
+          <a:fillRef idx="3">
+            <a:schemeClr val="accent1"/>
+          </a:fillRef>
+          <a:effectRef idx="2">
+            <a:schemeClr val="accent1"/>
+          </a:effectRef>
+          <a:fontRef idx="minor">
+            <a:schemeClr val="lt1"/>
+          </a:fontRef>
+        </p:style>
+        <p:txBody>
+          <a:bodyPr rtlCol="0" anchor="ctr"/>
+          <a:lstStyle/>
+          <a:p>
+            <a:pPr algn="ctr"/>
+          </a:p>
+        </p:txBody>
+      </p:sp>
+      <p:sp>
+        <p:nvSpPr>
+          <p:cNvPr id="6" name="TextBox 5"/>
+          <p:cNvSpPr txBox="1"/>
+          <p:nvPr/>
+        </p:nvSpPr>
+        <p:spPr>
+          <a:xfrm>
+            <a:off x="777240" y="5010912"/>
+            <a:ext cx="4023360" cy="896112"/>
+          </a:xfrm>
+          <a:prstGeom prst="rect">
+            <a:avLst/>
+          </a:prstGeom>
+          <a:noFill/>
+        </p:spPr>
+        <p:txBody>
+          <a:bodyPr wrap="square" anchor="t" lIns="0" rIns="0" tIns="0" bIns="0">
+            <a:spAutoFit/>
+          </a:bodyPr>
+          <a:lstStyle/>
+          <a:p>
+            <a:pPr>
+              <a:lnSpc>
+                <a:spcPct val="113000"/>
+              </a:lnSpc>
+              <a:spcBef>
+                <a:spcPts val="0"/>
+              </a:spcBef>
+              <a:spcAft>
+                <a:spcPts val="200"/>
+              </a:spcAft>
+            </a:pPr>
+            <a:r>
+              <a:rPr sz="2700" b="1">
+                <a:solidFill>
+                  <a:srgbClr val="FFFFFF"/>
+                </a:solidFill>
+                <a:latin typeface="Noto Sans"/>
+              </a:rPr>
+              <a:t>21,3 hari</a:t>
+            </a:r>
+          </a:p>
+          <a:p>
+            <a:pPr>
+              <a:lnSpc>
+                <a:spcPct val="113000"/>
+              </a:lnSpc>
+              <a:spcBef>
+                <a:spcPts val="0"/>
+              </a:spcBef>
+              <a:spcAft>
+                <a:spcPts val="0"/>
+              </a:spcAft>
+            </a:pPr>
+            <a:r>
+              <a:rPr sz="1250" b="0">
+                <a:solidFill>
+                  <a:srgbClr val="F8F2E5"/>
+                </a:solidFill>
+                <a:latin typeface="Noto Sans"/>
+              </a:rPr>
+              <a:t>rata-rata tunggu pemberi bintang 1, vs 10,7 hari bintang 5</a:t>
+            </a:r>
+          </a:p>
+        </p:txBody>
+      </p:sp>
+      <p:sp>
+        <p:nvSpPr>
+          <p:cNvPr id="7" name="Rounded Rectangle 6"/>
+          <p:cNvSpPr/>
+          <p:nvPr/>
+        </p:nvSpPr>
+        <p:spPr>
+          <a:xfrm>
+            <a:off x="5413248" y="1481328"/>
+            <a:ext cx="6336792" cy="3977639"/>
+          </a:xfrm>
+          <a:prstGeom prst="roundRect">
+            <a:avLst>
+              <a:gd name="adj" fmla="val 5500"/>
+            </a:avLst>
+          </a:prstGeom>
+          <a:solidFill>
+            <a:srgbClr val="E2D2B8"/>
+          </a:solidFill>
+          <a:ln>
+            <a:noFill/>
+          </a:ln>
+          <a:effectLst/>
+        </p:spPr>
+        <p:style>
+          <a:lnRef idx="1">
+            <a:schemeClr val="accent1"/>
+          </a:lnRef>
+          <a:fillRef idx="3">
+            <a:schemeClr val="accent1"/>
+          </a:fillRef>
+          <a:effectRef idx="2">
+            <a:schemeClr val="accent1"/>
+          </a:effectRef>
+          <a:fontRef idx="minor">
+            <a:schemeClr val="lt1"/>
+          </a:fontRef>
+        </p:style>
+        <p:txBody>
+          <a:bodyPr rtlCol="0" anchor="ctr"/>
+          <a:lstStyle/>
+          <a:p>
+            <a:pPr algn="ctr"/>
+          </a:p>
+        </p:txBody>
+      </p:sp>
+      <p:sp>
+        <p:nvSpPr>
+          <p:cNvPr id="8" name="Rounded Rectangle 7"/>
+          <p:cNvSpPr/>
+          <p:nvPr/>
+        </p:nvSpPr>
+        <p:spPr>
+          <a:xfrm>
+            <a:off x="5349240" y="1417320"/>
+            <a:ext cx="6336792" cy="3977639"/>
+          </a:xfrm>
+          <a:prstGeom prst="roundRect">
+            <a:avLst>
+              <a:gd name="adj" fmla="val 5500"/>
+            </a:avLst>
+          </a:prstGeom>
+          <a:solidFill>
+            <a:srgbClr val="F8F2E5"/>
+          </a:solidFill>
+          <a:ln>
+            <a:noFill/>
+          </a:ln>
+          <a:effectLst/>
+        </p:spPr>
+        <p:style>
+          <a:lnRef idx="1">
+            <a:schemeClr val="accent1"/>
+          </a:lnRef>
+          <a:fillRef idx="3">
+            <a:schemeClr val="accent1"/>
+          </a:fillRef>
+          <a:effectRef idx="2">
+            <a:schemeClr val="accent1"/>
+          </a:effectRef>
+          <a:fontRef idx="minor">
+            <a:schemeClr val="lt1"/>
+          </a:fontRef>
+        </p:style>
+        <p:txBody>
+          <a:bodyPr rtlCol="0" anchor="ctr"/>
+          <a:lstStyle/>
+          <a:p>
+            <a:pPr algn="ctr"/>
           </a:p>
         </p:txBody>
       </p:sp>
       <p:pic>
         <p:nvPicPr>
-          <p:cNvPr id="5" name="Picture 4" descr="06_waktu_kirim_per_skor.png"/>
+          <p:cNvPr id="9" name="Picture 8" descr="06_waktu_kirim_per_skor.png"/>
           <p:cNvPicPr>
             <a:picLocks noChangeAspect="1"/>
           </p:cNvPicPr>
@@ -5907,8 +6832,8 @@
         </p:blipFill>
         <p:spPr>
           <a:xfrm>
-            <a:off x="6309360" y="1481328"/>
-            <a:ext cx="5239512" cy="3143707"/>
+            <a:off x="5550408" y="1625803"/>
+            <a:ext cx="5934455" cy="3560673"/>
           </a:xfrm>
           <a:prstGeom prst="rect">
             <a:avLst/>
@@ -5917,14 +6842,14 @@
       </p:pic>
       <p:sp>
         <p:nvSpPr>
-          <p:cNvPr id="6" name="TextBox 5"/>
+          <p:cNvPr id="10" name="TextBox 9"/>
           <p:cNvSpPr txBox="1"/>
           <p:nvPr/>
         </p:nvSpPr>
         <p:spPr>
           <a:xfrm>
-            <a:off x="6309360" y="4716475"/>
-            <a:ext cx="5239512" cy="365760"/>
+            <a:off x="5349240" y="5486399"/>
+            <a:ext cx="6336792" cy="274320"/>
           </a:xfrm>
           <a:prstGeom prst="rect">
             <a:avLst/>
@@ -5932,266 +6857,30 @@
           <a:noFill/>
         </p:spPr>
         <p:txBody>
-          <a:bodyPr wrap="square" lIns="0" rIns="0" tIns="0" bIns="0">
+          <a:bodyPr wrap="square" anchor="t" lIns="0" rIns="0" tIns="0" bIns="0">
             <a:spAutoFit/>
           </a:bodyPr>
           <a:lstStyle/>
           <a:p>
-            <a:pPr algn="ctr">
+            <a:pPr>
+              <a:lnSpc>
+                <a:spcPct val="113000"/>
+              </a:lnSpc>
+              <a:spcBef>
+                <a:spcPts val="0"/>
+              </a:spcBef>
               <a:spcAft>
-                <a:spcPts val="800"/>
+                <a:spcPts val="0"/>
               </a:spcAft>
             </a:pPr>
             <a:r>
-              <a:rPr sz="1200" b="0" i="1">
-                <a:solidFill>
-                  <a:srgbClr val="6E5B4D"/>
+              <a:rPr sz="1050" b="0">
+                <a:solidFill>
+                  <a:srgbClr val="8A7A6C"/>
                 </a:solidFill>
                 <a:latin typeface="Noto Sans"/>
               </a:rPr>
-              <a:t>Rata rata waktu kirim per skor ulasan</a:t>
-            </a:r>
-          </a:p>
-        </p:txBody>
-      </p:sp>
-      <p:sp>
-        <p:nvSpPr>
-          <p:cNvPr id="7" name="Rectangle 6"/>
-          <p:cNvSpPr/>
-          <p:nvPr/>
-        </p:nvSpPr>
-        <p:spPr>
-          <a:xfrm>
-            <a:off x="640080" y="5047488"/>
-            <a:ext cx="10908792" cy="1371600"/>
-          </a:xfrm>
-          <a:prstGeom prst="rect">
-            <a:avLst/>
-          </a:prstGeom>
-          <a:solidFill>
-            <a:srgbClr val="F8F2E5"/>
-          </a:solidFill>
-          <a:ln>
-            <a:noFill/>
-          </a:ln>
-          <a:effectLst/>
-        </p:spPr>
-        <p:style>
-          <a:lnRef idx="1">
-            <a:schemeClr val="accent1"/>
-          </a:lnRef>
-          <a:fillRef idx="3">
-            <a:schemeClr val="accent1"/>
-          </a:fillRef>
-          <a:effectRef idx="2">
-            <a:schemeClr val="accent1"/>
-          </a:effectRef>
-          <a:fontRef idx="minor">
-            <a:schemeClr val="lt1"/>
-          </a:fontRef>
-        </p:style>
-        <p:txBody>
-          <a:bodyPr rtlCol="0" anchor="ctr"/>
-          <a:lstStyle/>
-          <a:p>
-            <a:pPr algn="ctr"/>
-          </a:p>
-        </p:txBody>
-      </p:sp>
-      <p:sp>
-        <p:nvSpPr>
-          <p:cNvPr id="8" name="Rectangle 7"/>
-          <p:cNvSpPr/>
-          <p:nvPr/>
-        </p:nvSpPr>
-        <p:spPr>
-          <a:xfrm>
-            <a:off x="640080" y="5047488"/>
-            <a:ext cx="10908792" cy="64008"/>
-          </a:xfrm>
-          <a:prstGeom prst="rect">
-            <a:avLst/>
-          </a:prstGeom>
-          <a:solidFill>
-            <a:srgbClr val="A34A38"/>
-          </a:solidFill>
-          <a:ln>
-            <a:noFill/>
-          </a:ln>
-          <a:effectLst/>
-        </p:spPr>
-        <p:style>
-          <a:lnRef idx="1">
-            <a:schemeClr val="accent1"/>
-          </a:lnRef>
-          <a:fillRef idx="3">
-            <a:schemeClr val="accent1"/>
-          </a:fillRef>
-          <a:effectRef idx="2">
-            <a:schemeClr val="accent1"/>
-          </a:effectRef>
-          <a:fontRef idx="minor">
-            <a:schemeClr val="lt1"/>
-          </a:fontRef>
-        </p:style>
-        <p:txBody>
-          <a:bodyPr rtlCol="0" anchor="ctr"/>
-          <a:lstStyle/>
-          <a:p>
-            <a:pPr algn="ctr"/>
-          </a:p>
-        </p:txBody>
-      </p:sp>
-      <p:sp>
-        <p:nvSpPr>
-          <p:cNvPr id="9" name="TextBox 8"/>
-          <p:cNvSpPr txBox="1"/>
-          <p:nvPr/>
-        </p:nvSpPr>
-        <p:spPr>
-          <a:xfrm>
-            <a:off x="1051560" y="5321808"/>
-            <a:ext cx="4754880" cy="1051560"/>
-          </a:xfrm>
-          <a:prstGeom prst="rect">
-            <a:avLst/>
-          </a:prstGeom>
-          <a:noFill/>
-        </p:spPr>
-        <p:txBody>
-          <a:bodyPr wrap="square" lIns="0" rIns="0" tIns="0" bIns="0">
-            <a:spAutoFit/>
-          </a:bodyPr>
-          <a:lstStyle/>
-          <a:p>
-            <a:pPr>
-              <a:spcAft>
-                <a:spcPts val="200"/>
-              </a:spcAft>
-            </a:pPr>
-            <a:r>
-              <a:rPr sz="3800" b="1" i="0">
-                <a:solidFill>
-                  <a:srgbClr val="A34A38"/>
-                </a:solidFill>
-                <a:latin typeface="Noto Sans"/>
-              </a:rPr>
-              <a:t>21,3 hari</a:t>
-            </a:r>
-          </a:p>
-          <a:p>
-            <a:pPr>
-              <a:spcAft>
-                <a:spcPts val="0"/>
-              </a:spcAft>
-            </a:pPr>
-            <a:r>
-              <a:rPr sz="1300" b="0" i="0">
-                <a:solidFill>
-                  <a:srgbClr val="6E5B4D"/>
-                </a:solidFill>
-                <a:latin typeface="Noto Sans"/>
-              </a:rPr>
-              <a:t>rata rata tunggu pelanggan bintang 1</a:t>
-            </a:r>
-          </a:p>
-        </p:txBody>
-      </p:sp>
-      <p:sp>
-        <p:nvSpPr>
-          <p:cNvPr id="10" name="Rectangle 9"/>
-          <p:cNvSpPr/>
-          <p:nvPr/>
-        </p:nvSpPr>
-        <p:spPr>
-          <a:xfrm>
-            <a:off x="6080760" y="5367528"/>
-            <a:ext cx="27432" cy="777240"/>
-          </a:xfrm>
-          <a:prstGeom prst="rect">
-            <a:avLst/>
-          </a:prstGeom>
-          <a:solidFill>
-            <a:srgbClr val="C97B63"/>
-          </a:solidFill>
-          <a:ln>
-            <a:noFill/>
-          </a:ln>
-          <a:effectLst/>
-        </p:spPr>
-        <p:style>
-          <a:lnRef idx="1">
-            <a:schemeClr val="accent1"/>
-          </a:lnRef>
-          <a:fillRef idx="3">
-            <a:schemeClr val="accent1"/>
-          </a:fillRef>
-          <a:effectRef idx="2">
-            <a:schemeClr val="accent1"/>
-          </a:effectRef>
-          <a:fontRef idx="minor">
-            <a:schemeClr val="lt1"/>
-          </a:fontRef>
-        </p:style>
-        <p:txBody>
-          <a:bodyPr rtlCol="0" anchor="ctr"/>
-          <a:lstStyle/>
-          <a:p>
-            <a:pPr algn="ctr"/>
-          </a:p>
-        </p:txBody>
-      </p:sp>
-      <p:sp>
-        <p:nvSpPr>
-          <p:cNvPr id="11" name="TextBox 10"/>
-          <p:cNvSpPr txBox="1"/>
-          <p:nvPr/>
-        </p:nvSpPr>
-        <p:spPr>
-          <a:xfrm>
-            <a:off x="6446520" y="5321808"/>
-            <a:ext cx="4754880" cy="1051560"/>
-          </a:xfrm>
-          <a:prstGeom prst="rect">
-            <a:avLst/>
-          </a:prstGeom>
-          <a:noFill/>
-        </p:spPr>
-        <p:txBody>
-          <a:bodyPr wrap="square" lIns="0" rIns="0" tIns="0" bIns="0">
-            <a:spAutoFit/>
-          </a:bodyPr>
-          <a:lstStyle/>
-          <a:p>
-            <a:pPr>
-              <a:spcAft>
-                <a:spcPts val="200"/>
-              </a:spcAft>
-            </a:pPr>
-            <a:r>
-              <a:rPr sz="3800" b="1" i="0">
-                <a:solidFill>
-                  <a:srgbClr val="A34A38"/>
-                </a:solidFill>
-                <a:latin typeface="Noto Sans"/>
-              </a:rPr>
-              <a:t>10,7 hari</a:t>
-            </a:r>
-          </a:p>
-          <a:p>
-            <a:pPr>
-              <a:spcAft>
-                <a:spcPts val="0"/>
-              </a:spcAft>
-            </a:pPr>
-            <a:r>
-              <a:rPr sz="1300" b="0" i="0">
-                <a:solidFill>
-                  <a:srgbClr val="6E5B4D"/>
-                </a:solidFill>
-                <a:latin typeface="Noto Sans"/>
-              </a:rPr>
-              <a:t>rata rata tunggu pelanggan bintang 5</a:t>
+              <a:t>Chart: rata-rata waktu kirim per skor ulasan.</a:t>
             </a:r>
           </a:p>
         </p:txBody>
@@ -6230,8 +6919,8 @@
         </p:nvSpPr>
         <p:spPr>
           <a:xfrm>
-            <a:off x="640080" y="384048"/>
-            <a:ext cx="10881360" cy="914400"/>
+            <a:off x="502920" y="384048"/>
+            <a:ext cx="11155680" cy="914400"/>
           </a:xfrm>
           <a:prstGeom prst="rect">
             <a:avLst/>
@@ -6239,18 +6928,24 @@
           <a:noFill/>
         </p:spPr>
         <p:txBody>
-          <a:bodyPr wrap="square" lIns="0" rIns="0" tIns="0" bIns="0">
+          <a:bodyPr wrap="square" anchor="t" lIns="0" rIns="0" tIns="0" bIns="0">
             <a:spAutoFit/>
           </a:bodyPr>
           <a:lstStyle/>
           <a:p>
             <a:pPr>
+              <a:lnSpc>
+                <a:spcPct val="113000"/>
+              </a:lnSpc>
+              <a:spcBef>
+                <a:spcPts val="0"/>
+              </a:spcBef>
               <a:spcAft>
-                <a:spcPts val="800"/>
+                <a:spcPts val="0"/>
               </a:spcAft>
             </a:pPr>
             <a:r>
-              <a:rPr sz="3200" b="1" i="0">
+              <a:rPr sz="3100" b="1">
                 <a:solidFill>
                   <a:srgbClr val="33231C"/>
                 </a:solidFill>
@@ -6263,17 +6958,19 @@
       </p:sp>
       <p:sp>
         <p:nvSpPr>
-          <p:cNvPr id="3" name="Rectangle 2"/>
+          <p:cNvPr id="3" name="Rounded Rectangle 2"/>
           <p:cNvSpPr/>
           <p:nvPr/>
         </p:nvSpPr>
         <p:spPr>
           <a:xfrm>
-            <a:off x="658368" y="1225296"/>
-            <a:ext cx="1371600" cy="64008"/>
-          </a:xfrm>
-          <a:prstGeom prst="rect">
-            <a:avLst/>
+            <a:off x="521207" y="1097280"/>
+            <a:ext cx="777240" cy="82296"/>
+          </a:xfrm>
+          <a:prstGeom prst="roundRect">
+            <a:avLst>
+              <a:gd name="adj" fmla="val 5500"/>
+            </a:avLst>
           </a:prstGeom>
           <a:solidFill>
             <a:srgbClr val="DE7A2D"/>
@@ -6307,110 +7004,99 @@
       </p:sp>
       <p:sp>
         <p:nvSpPr>
-          <p:cNvPr id="4" name="TextBox 3"/>
-          <p:cNvSpPr txBox="1"/>
-          <p:nvPr/>
-        </p:nvSpPr>
-        <p:spPr>
-          <a:xfrm>
-            <a:off x="640080" y="1554480"/>
-            <a:ext cx="5669280" cy="4846320"/>
-          </a:xfrm>
-          <a:prstGeom prst="rect">
-            <a:avLst/>
-          </a:prstGeom>
-          <a:noFill/>
-        </p:spPr>
-        <p:txBody>
-          <a:bodyPr wrap="square" lIns="0" rIns="0" tIns="0" bIns="0">
-            <a:spAutoFit/>
-          </a:bodyPr>
-          <a:lstStyle/>
-          <a:p>
-            <a:pPr marL="171450" indent="-171450">
-              <a:lnSpc>
-                <a:spcPct val="112000"/>
-              </a:lnSpc>
-              <a:spcAft>
-                <a:spcPts val="1200"/>
-              </a:spcAft>
-              <a:buChar char="•"/>
-            </a:pPr>
-            <a:r>
-              <a:rPr sz="1550" b="0" i="0">
-                <a:solidFill>
-                  <a:srgbClr val="33231C"/>
-                </a:solidFill>
-                <a:latin typeface="Noto Sans"/>
-              </a:rPr>
-              <a:t>Dari 2.965 seller, 350 seller memiliki bad review rate di atas 30 persen namun hanya menampung 9.7 persen dari seluruh bad review</a:t>
-            </a:r>
-          </a:p>
-          <a:p>
-            <a:pPr marL="171450" indent="-171450">
-              <a:lnSpc>
-                <a:spcPct val="112000"/>
-              </a:lnSpc>
-              <a:spcAft>
-                <a:spcPts val="1200"/>
-              </a:spcAft>
-              <a:buChar char="•"/>
-            </a:pPr>
-            <a:r>
-              <a:rPr sz="1550" b="0" i="0">
-                <a:solidFill>
-                  <a:srgbClr val="33231C"/>
-                </a:solidFill>
-                <a:latin typeface="Noto Sans"/>
-              </a:rPr>
-              <a:t>Bahkan 10 seller terburuk hanya menampung 15.6 persen bad review: masalah tersebar di seluruh platform</a:t>
-            </a:r>
-          </a:p>
-          <a:p>
-            <a:pPr marL="171450" indent="-171450">
-              <a:lnSpc>
-                <a:spcPct val="112000"/>
-              </a:lnSpc>
-              <a:spcAft>
-                <a:spcPts val="1200"/>
-              </a:spcAft>
-              <a:buChar char="•"/>
-            </a:pPr>
-            <a:r>
-              <a:rPr sz="1550" b="0" i="0">
-                <a:solidFill>
-                  <a:srgbClr val="33231C"/>
-                </a:solidFill>
-                <a:latin typeface="Noto Sans"/>
-              </a:rPr>
-              <a:t>Geografi sangat terkonsentrasi: Sao Paulo mencatat 40.501 order atau 42.0 persen, dengan revenue 5.07 juta BRL atau 38.3 persen</a:t>
-            </a:r>
-          </a:p>
-          <a:p>
-            <a:pPr marL="171450" indent="-171450">
-              <a:lnSpc>
-                <a:spcPct val="112000"/>
-              </a:lnSpc>
-              <a:spcAft>
-                <a:spcPts val="1200"/>
-              </a:spcAft>
-              <a:buChar char="•"/>
-            </a:pPr>
-            <a:r>
-              <a:rPr sz="1550" b="0" i="0">
-                <a:solidFill>
-                  <a:srgbClr val="33231C"/>
-                </a:solidFill>
-                <a:latin typeface="Noto Sans"/>
-              </a:rPr>
-              <a:t>Kota dengan order terbanyak adalah sao paulo dengan 15.045 order</a:t>
-            </a:r>
+          <p:cNvPr id="4" name="Rounded Rectangle 3"/>
+          <p:cNvSpPr/>
+          <p:nvPr/>
+        </p:nvSpPr>
+        <p:spPr>
+          <a:xfrm>
+            <a:off x="566928" y="1481328"/>
+            <a:ext cx="5120640" cy="3520440"/>
+          </a:xfrm>
+          <a:prstGeom prst="roundRect">
+            <a:avLst>
+              <a:gd name="adj" fmla="val 5500"/>
+            </a:avLst>
+          </a:prstGeom>
+          <a:solidFill>
+            <a:srgbClr val="E2D2B8"/>
+          </a:solidFill>
+          <a:ln>
+            <a:noFill/>
+          </a:ln>
+          <a:effectLst/>
+        </p:spPr>
+        <p:style>
+          <a:lnRef idx="1">
+            <a:schemeClr val="accent1"/>
+          </a:lnRef>
+          <a:fillRef idx="3">
+            <a:schemeClr val="accent1"/>
+          </a:fillRef>
+          <a:effectRef idx="2">
+            <a:schemeClr val="accent1"/>
+          </a:effectRef>
+          <a:fontRef idx="minor">
+            <a:schemeClr val="lt1"/>
+          </a:fontRef>
+        </p:style>
+        <p:txBody>
+          <a:bodyPr rtlCol="0" anchor="ctr"/>
+          <a:lstStyle/>
+          <a:p>
+            <a:pPr algn="ctr"/>
+          </a:p>
+        </p:txBody>
+      </p:sp>
+      <p:sp>
+        <p:nvSpPr>
+          <p:cNvPr id="5" name="Rounded Rectangle 4"/>
+          <p:cNvSpPr/>
+          <p:nvPr/>
+        </p:nvSpPr>
+        <p:spPr>
+          <a:xfrm>
+            <a:off x="502920" y="1417320"/>
+            <a:ext cx="5120640" cy="3520440"/>
+          </a:xfrm>
+          <a:prstGeom prst="roundRect">
+            <a:avLst>
+              <a:gd name="adj" fmla="val 5500"/>
+            </a:avLst>
+          </a:prstGeom>
+          <a:solidFill>
+            <a:srgbClr val="F8F2E5"/>
+          </a:solidFill>
+          <a:ln>
+            <a:noFill/>
+          </a:ln>
+          <a:effectLst/>
+        </p:spPr>
+        <p:style>
+          <a:lnRef idx="1">
+            <a:schemeClr val="accent1"/>
+          </a:lnRef>
+          <a:fillRef idx="3">
+            <a:schemeClr val="accent1"/>
+          </a:fillRef>
+          <a:effectRef idx="2">
+            <a:schemeClr val="accent1"/>
+          </a:effectRef>
+          <a:fontRef idx="minor">
+            <a:schemeClr val="lt1"/>
+          </a:fontRef>
+        </p:style>
+        <p:txBody>
+          <a:bodyPr rtlCol="0" anchor="ctr"/>
+          <a:lstStyle/>
+          <a:p>
+            <a:pPr algn="ctr"/>
           </a:p>
         </p:txBody>
       </p:sp>
       <p:pic>
         <p:nvPicPr>
-          <p:cNvPr id="5" name="Picture 4" descr="09_konsentrasi_bad_review_seller.png"/>
+          <p:cNvPr id="6" name="Picture 5" descr="09_konsentrasi_bad_review_seller.png"/>
           <p:cNvPicPr>
             <a:picLocks noChangeAspect="1"/>
           </p:cNvPicPr>
@@ -6424,8 +7110,8 @@
         </p:blipFill>
         <p:spPr>
           <a:xfrm>
-            <a:off x="6583680" y="1554480"/>
-            <a:ext cx="4965192" cy="2979115"/>
+            <a:off x="704088" y="1762048"/>
+            <a:ext cx="4718303" cy="2830982"/>
           </a:xfrm>
           <a:prstGeom prst="rect">
             <a:avLst/>
@@ -6434,14 +7120,14 @@
       </p:pic>
       <p:sp>
         <p:nvSpPr>
-          <p:cNvPr id="6" name="TextBox 5"/>
+          <p:cNvPr id="7" name="TextBox 6"/>
           <p:cNvSpPr txBox="1"/>
           <p:nvPr/>
         </p:nvSpPr>
         <p:spPr>
           <a:xfrm>
-            <a:off x="6583680" y="4643323"/>
-            <a:ext cx="4965192" cy="365760"/>
+            <a:off x="502920" y="5029200"/>
+            <a:ext cx="5120640" cy="274320"/>
           </a:xfrm>
           <a:prstGeom prst="rect">
             <a:avLst/>
@@ -6449,24 +7135,210 @@
           <a:noFill/>
         </p:spPr>
         <p:txBody>
-          <a:bodyPr wrap="square" lIns="0" rIns="0" tIns="0" bIns="0">
+          <a:bodyPr wrap="square" anchor="t" lIns="0" rIns="0" tIns="0" bIns="0">
             <a:spAutoFit/>
           </a:bodyPr>
           <a:lstStyle/>
           <a:p>
-            <a:pPr algn="ctr">
+            <a:pPr>
+              <a:lnSpc>
+                <a:spcPct val="113000"/>
+              </a:lnSpc>
+              <a:spcBef>
+                <a:spcPts val="0"/>
+              </a:spcBef>
               <a:spcAft>
-                <a:spcPts val="800"/>
+                <a:spcPts val="0"/>
               </a:spcAft>
             </a:pPr>
             <a:r>
-              <a:rPr sz="1200" b="0" i="1">
-                <a:solidFill>
-                  <a:srgbClr val="6E5B4D"/>
+              <a:rPr sz="1050" b="0">
+                <a:solidFill>
+                  <a:srgbClr val="8A7A6C"/>
                 </a:solidFill>
                 <a:latin typeface="Noto Sans"/>
               </a:rPr>
-              <a:t>Konsentrasi bad review di antara seller</a:t>
+              <a:t>Chart: konsentrasi bad review di antara seller.</a:t>
+            </a:r>
+          </a:p>
+        </p:txBody>
+      </p:sp>
+      <p:sp>
+        <p:nvSpPr>
+          <p:cNvPr id="8" name="TextBox 7"/>
+          <p:cNvSpPr txBox="1"/>
+          <p:nvPr/>
+        </p:nvSpPr>
+        <p:spPr>
+          <a:xfrm>
+            <a:off x="5989320" y="1481328"/>
+            <a:ext cx="5715000" cy="3474720"/>
+          </a:xfrm>
+          <a:prstGeom prst="rect">
+            <a:avLst/>
+          </a:prstGeom>
+          <a:noFill/>
+        </p:spPr>
+        <p:txBody>
+          <a:bodyPr wrap="square" anchor="t" lIns="0" rIns="0" tIns="0" bIns="0">
+            <a:spAutoFit/>
+          </a:bodyPr>
+          <a:lstStyle/>
+          <a:p>
+            <a:pPr>
+              <a:lnSpc>
+                <a:spcPct val="113000"/>
+              </a:lnSpc>
+              <a:spcBef>
+                <a:spcPts val="0"/>
+              </a:spcBef>
+              <a:spcAft>
+                <a:spcPts val="1000"/>
+              </a:spcAft>
+            </a:pPr>
+            <a:r>
+              <a:rPr sz="1550" b="0">
+                <a:solidFill>
+                  <a:srgbClr val="33231C"/>
+                </a:solidFill>
+                <a:latin typeface="Noto Sans"/>
+              </a:rPr>
+              <a:t>Dari 2.965 seller, 350 seller memiliki bad review rate di atas 30%, tetapi hanya menampung 9,7% dari seluruh bad review.</a:t>
+            </a:r>
+          </a:p>
+          <a:p>
+            <a:pPr>
+              <a:lnSpc>
+                <a:spcPct val="113000"/>
+              </a:lnSpc>
+              <a:spcBef>
+                <a:spcPts val="0"/>
+              </a:spcBef>
+              <a:spcAft>
+                <a:spcPts val="1000"/>
+              </a:spcAft>
+            </a:pPr>
+            <a:r>
+              <a:rPr sz="1550" b="0">
+                <a:solidFill>
+                  <a:srgbClr val="33231C"/>
+                </a:solidFill>
+                <a:latin typeface="Noto Sans"/>
+              </a:rPr>
+              <a:t>Bahkan 10 seller terburuk hanya menampung 15,6% bad review: masalahnya tersebar di seluruh platform, bukan ulah segelintir penjual.</a:t>
+            </a:r>
+          </a:p>
+          <a:p>
+            <a:pPr>
+              <a:lnSpc>
+                <a:spcPct val="113000"/>
+              </a:lnSpc>
+              <a:spcBef>
+                <a:spcPts val="0"/>
+              </a:spcBef>
+              <a:spcAft>
+                <a:spcPts val="1000"/>
+              </a:spcAft>
+            </a:pPr>
+            <a:r>
+              <a:rPr sz="1550" b="0">
+                <a:solidFill>
+                  <a:srgbClr val="33231C"/>
+                </a:solidFill>
+                <a:latin typeface="Noto Sans"/>
+              </a:rPr>
+              <a:t>Geografi juga terkonsentrasi: Sao Paulo mencatat 40.501 order atau 42,0% dari order delivered.</a:t>
+            </a:r>
+          </a:p>
+        </p:txBody>
+      </p:sp>
+      <p:sp>
+        <p:nvSpPr>
+          <p:cNvPr id="9" name="Rounded Rectangle 8"/>
+          <p:cNvSpPr/>
+          <p:nvPr/>
+        </p:nvSpPr>
+        <p:spPr>
+          <a:xfrm>
+            <a:off x="502920" y="5193792"/>
+            <a:ext cx="11183112" cy="932688"/>
+          </a:xfrm>
+          <a:prstGeom prst="roundRect">
+            <a:avLst>
+              <a:gd name="adj" fmla="val 5500"/>
+            </a:avLst>
+          </a:prstGeom>
+          <a:solidFill>
+            <a:srgbClr val="F8F2E5"/>
+          </a:solidFill>
+          <a:ln>
+            <a:noFill/>
+          </a:ln>
+          <a:effectLst/>
+        </p:spPr>
+        <p:style>
+          <a:lnRef idx="1">
+            <a:schemeClr val="accent1"/>
+          </a:lnRef>
+          <a:fillRef idx="3">
+            <a:schemeClr val="accent1"/>
+          </a:fillRef>
+          <a:effectRef idx="2">
+            <a:schemeClr val="accent1"/>
+          </a:effectRef>
+          <a:fontRef idx="minor">
+            <a:schemeClr val="lt1"/>
+          </a:fontRef>
+        </p:style>
+        <p:txBody>
+          <a:bodyPr rtlCol="0" anchor="ctr"/>
+          <a:lstStyle/>
+          <a:p>
+            <a:pPr algn="ctr"/>
+          </a:p>
+        </p:txBody>
+      </p:sp>
+      <p:sp>
+        <p:nvSpPr>
+          <p:cNvPr id="10" name="TextBox 9"/>
+          <p:cNvSpPr txBox="1"/>
+          <p:nvPr/>
+        </p:nvSpPr>
+        <p:spPr>
+          <a:xfrm>
+            <a:off x="960120" y="5394960"/>
+            <a:ext cx="10424160" cy="548640"/>
+          </a:xfrm>
+          <a:prstGeom prst="rect">
+            <a:avLst/>
+          </a:prstGeom>
+          <a:noFill/>
+        </p:spPr>
+        <p:txBody>
+          <a:bodyPr wrap="square" anchor="ctr" lIns="0" rIns="0" tIns="0" bIns="0">
+            <a:spAutoFit/>
+          </a:bodyPr>
+          <a:lstStyle/>
+          <a:p>
+            <a:pPr>
+              <a:lnSpc>
+                <a:spcPct val="113000"/>
+              </a:lnSpc>
+              <a:spcBef>
+                <a:spcPts val="0"/>
+              </a:spcBef>
+              <a:spcAft>
+                <a:spcPts val="0"/>
+              </a:spcAft>
+            </a:pPr>
+            <a:r>
+              <a:rPr sz="1600" b="1">
+                <a:solidFill>
+                  <a:srgbClr val="A34A38"/>
+                </a:solidFill>
+                <a:latin typeface="Noto Sans"/>
+              </a:rPr>
+              <a:t>10 seller terburuk hanya menampung 15,6% bad review</a:t>
             </a:r>
           </a:p>
         </p:txBody>
@@ -6505,8 +7377,8 @@
         </p:nvSpPr>
         <p:spPr>
           <a:xfrm>
-            <a:off x="640080" y="384048"/>
-            <a:ext cx="10881360" cy="914400"/>
+            <a:off x="502920" y="384048"/>
+            <a:ext cx="11155680" cy="914400"/>
           </a:xfrm>
           <a:prstGeom prst="rect">
             <a:avLst/>
@@ -6514,18 +7386,24 @@
           <a:noFill/>
         </p:spPr>
         <p:txBody>
-          <a:bodyPr wrap="square" lIns="0" rIns="0" tIns="0" bIns="0">
+          <a:bodyPr wrap="square" anchor="t" lIns="0" rIns="0" tIns="0" bIns="0">
             <a:spAutoFit/>
           </a:bodyPr>
           <a:lstStyle/>
           <a:p>
             <a:pPr>
+              <a:lnSpc>
+                <a:spcPct val="113000"/>
+              </a:lnSpc>
+              <a:spcBef>
+                <a:spcPts val="0"/>
+              </a:spcBef>
               <a:spcAft>
-                <a:spcPts val="800"/>
+                <a:spcPts val="0"/>
               </a:spcAft>
             </a:pPr>
             <a:r>
-              <a:rPr sz="3200" b="1" i="0">
+              <a:rPr sz="3100" b="1">
                 <a:solidFill>
                   <a:srgbClr val="33231C"/>
                 </a:solidFill>
@@ -6538,17 +7416,19 @@
       </p:sp>
       <p:sp>
         <p:nvSpPr>
-          <p:cNvPr id="3" name="Rectangle 2"/>
+          <p:cNvPr id="3" name="Rounded Rectangle 2"/>
           <p:cNvSpPr/>
           <p:nvPr/>
         </p:nvSpPr>
         <p:spPr>
           <a:xfrm>
-            <a:off x="658368" y="1225296"/>
-            <a:ext cx="1371600" cy="64008"/>
-          </a:xfrm>
-          <a:prstGeom prst="rect">
-            <a:avLst/>
+            <a:off x="521207" y="1097280"/>
+            <a:ext cx="777240" cy="82296"/>
+          </a:xfrm>
+          <a:prstGeom prst="roundRect">
+            <a:avLst>
+              <a:gd name="adj" fmla="val 5500"/>
+            </a:avLst>
           </a:prstGeom>
           <a:solidFill>
             <a:srgbClr val="DE7A2D"/>
@@ -6580,9 +7460,303 @@
           </a:p>
         </p:txBody>
       </p:sp>
+      <p:sp>
+        <p:nvSpPr>
+          <p:cNvPr id="4" name="TextBox 3"/>
+          <p:cNvSpPr txBox="1"/>
+          <p:nvPr/>
+        </p:nvSpPr>
+        <p:spPr>
+          <a:xfrm>
+            <a:off x="502920" y="1463040"/>
+            <a:ext cx="4526280" cy="3291840"/>
+          </a:xfrm>
+          <a:prstGeom prst="rect">
+            <a:avLst/>
+          </a:prstGeom>
+          <a:noFill/>
+        </p:spPr>
+        <p:txBody>
+          <a:bodyPr wrap="square" anchor="t" lIns="0" rIns="0" tIns="0" bIns="0">
+            <a:spAutoFit/>
+          </a:bodyPr>
+          <a:lstStyle/>
+          <a:p>
+            <a:pPr>
+              <a:lnSpc>
+                <a:spcPct val="113000"/>
+              </a:lnSpc>
+              <a:spcBef>
+                <a:spcPts val="0"/>
+              </a:spcBef>
+              <a:spcAft>
+                <a:spcPts val="1000"/>
+              </a:spcAft>
+            </a:pPr>
+            <a:r>
+              <a:rPr sz="1550" b="0">
+                <a:solidFill>
+                  <a:srgbClr val="33231C"/>
+                </a:solidFill>
+                <a:latin typeface="Noto Sans"/>
+              </a:rPr>
+              <a:t>Kartu kredit dipakai di 75,4% order, boleto 19,9%. Sebanyak 51,5% order memakai cicilan lebih dari 1 kali; rata-rata cicilan kartu kredit 3,6 kali dibanding boleto 1,0 kali.</a:t>
+            </a:r>
+          </a:p>
+          <a:p>
+            <a:pPr>
+              <a:lnSpc>
+                <a:spcPct val="113000"/>
+              </a:lnSpc>
+              <a:spcBef>
+                <a:spcPts val="0"/>
+              </a:spcBef>
+              <a:spcAft>
+                <a:spcPts val="1000"/>
+              </a:spcAft>
+            </a:pPr>
+            <a:r>
+              <a:rPr sz="1550" b="0">
+                <a:solidFill>
+                  <a:srgbClr val="33231C"/>
+                </a:solidFill>
+                <a:latin typeface="Noto Sans"/>
+              </a:rPr>
+              <a:t>Dari 96.096 pelanggan unik, repeat purchase rate hanya 3,1%: hampir semua pelanggan membeli satu kali lalu hilang.</a:t>
+            </a:r>
+          </a:p>
+          <a:p>
+            <a:pPr>
+              <a:lnSpc>
+                <a:spcPct val="113000"/>
+              </a:lnSpc>
+              <a:spcBef>
+                <a:spcPts val="0"/>
+              </a:spcBef>
+              <a:spcAft>
+                <a:spcPts val="1000"/>
+              </a:spcAft>
+            </a:pPr>
+            <a:r>
+              <a:rPr sz="1550" b="0">
+                <a:solidFill>
+                  <a:srgbClr val="33231C"/>
+                </a:solidFill>
+                <a:latin typeface="Noto Sans"/>
+              </a:rPr>
+              <a:t>Retensi kohor 90 hari stagnan di 1,1-1,5%: pertumbuhan revenue datang dari pelanggan baru, bukan pembelian ulang.</a:t>
+            </a:r>
+          </a:p>
+        </p:txBody>
+      </p:sp>
+      <p:sp>
+        <p:nvSpPr>
+          <p:cNvPr id="5" name="Rounded Rectangle 4"/>
+          <p:cNvSpPr/>
+          <p:nvPr/>
+        </p:nvSpPr>
+        <p:spPr>
+          <a:xfrm>
+            <a:off x="502920" y="4846320"/>
+            <a:ext cx="4526280" cy="1170432"/>
+          </a:xfrm>
+          <a:prstGeom prst="roundRect">
+            <a:avLst>
+              <a:gd name="adj" fmla="val 5500"/>
+            </a:avLst>
+          </a:prstGeom>
+          <a:solidFill>
+            <a:srgbClr val="A34A38"/>
+          </a:solidFill>
+          <a:ln>
+            <a:noFill/>
+          </a:ln>
+          <a:effectLst/>
+        </p:spPr>
+        <p:style>
+          <a:lnRef idx="1">
+            <a:schemeClr val="accent1"/>
+          </a:lnRef>
+          <a:fillRef idx="3">
+            <a:schemeClr val="accent1"/>
+          </a:fillRef>
+          <a:effectRef idx="2">
+            <a:schemeClr val="accent1"/>
+          </a:effectRef>
+          <a:fontRef idx="minor">
+            <a:schemeClr val="lt1"/>
+          </a:fontRef>
+        </p:style>
+        <p:txBody>
+          <a:bodyPr rtlCol="0" anchor="ctr"/>
+          <a:lstStyle/>
+          <a:p>
+            <a:pPr algn="ctr"/>
+          </a:p>
+        </p:txBody>
+      </p:sp>
+      <p:sp>
+        <p:nvSpPr>
+          <p:cNvPr id="6" name="TextBox 5"/>
+          <p:cNvSpPr txBox="1"/>
+          <p:nvPr/>
+        </p:nvSpPr>
+        <p:spPr>
+          <a:xfrm>
+            <a:off x="777240" y="5010912"/>
+            <a:ext cx="4023360" cy="896112"/>
+          </a:xfrm>
+          <a:prstGeom prst="rect">
+            <a:avLst/>
+          </a:prstGeom>
+          <a:noFill/>
+        </p:spPr>
+        <p:txBody>
+          <a:bodyPr wrap="square" anchor="t" lIns="0" rIns="0" tIns="0" bIns="0">
+            <a:spAutoFit/>
+          </a:bodyPr>
+          <a:lstStyle/>
+          <a:p>
+            <a:pPr>
+              <a:lnSpc>
+                <a:spcPct val="113000"/>
+              </a:lnSpc>
+              <a:spcBef>
+                <a:spcPts val="0"/>
+              </a:spcBef>
+              <a:spcAft>
+                <a:spcPts val="200"/>
+              </a:spcAft>
+            </a:pPr>
+            <a:r>
+              <a:rPr sz="2700" b="1">
+                <a:solidFill>
+                  <a:srgbClr val="FFFFFF"/>
+                </a:solidFill>
+                <a:latin typeface="Noto Sans"/>
+              </a:rPr>
+              <a:t>3,1%</a:t>
+            </a:r>
+          </a:p>
+          <a:p>
+            <a:pPr>
+              <a:lnSpc>
+                <a:spcPct val="113000"/>
+              </a:lnSpc>
+              <a:spcBef>
+                <a:spcPts val="0"/>
+              </a:spcBef>
+              <a:spcAft>
+                <a:spcPts val="0"/>
+              </a:spcAft>
+            </a:pPr>
+            <a:r>
+              <a:rPr sz="1250" b="0">
+                <a:solidFill>
+                  <a:srgbClr val="F8F2E5"/>
+                </a:solidFill>
+                <a:latin typeface="Noto Sans"/>
+              </a:rPr>
+              <a:t>repeat purchase rate dari 96.096 pelanggan unik</a:t>
+            </a:r>
+          </a:p>
+        </p:txBody>
+      </p:sp>
+      <p:sp>
+        <p:nvSpPr>
+          <p:cNvPr id="7" name="Rounded Rectangle 6"/>
+          <p:cNvSpPr/>
+          <p:nvPr/>
+        </p:nvSpPr>
+        <p:spPr>
+          <a:xfrm>
+            <a:off x="5413248" y="1481328"/>
+            <a:ext cx="6336792" cy="3977639"/>
+          </a:xfrm>
+          <a:prstGeom prst="roundRect">
+            <a:avLst>
+              <a:gd name="adj" fmla="val 5500"/>
+            </a:avLst>
+          </a:prstGeom>
+          <a:solidFill>
+            <a:srgbClr val="E2D2B8"/>
+          </a:solidFill>
+          <a:ln>
+            <a:noFill/>
+          </a:ln>
+          <a:effectLst/>
+        </p:spPr>
+        <p:style>
+          <a:lnRef idx="1">
+            <a:schemeClr val="accent1"/>
+          </a:lnRef>
+          <a:fillRef idx="3">
+            <a:schemeClr val="accent1"/>
+          </a:fillRef>
+          <a:effectRef idx="2">
+            <a:schemeClr val="accent1"/>
+          </a:effectRef>
+          <a:fontRef idx="minor">
+            <a:schemeClr val="lt1"/>
+          </a:fontRef>
+        </p:style>
+        <p:txBody>
+          <a:bodyPr rtlCol="0" anchor="ctr"/>
+          <a:lstStyle/>
+          <a:p>
+            <a:pPr algn="ctr"/>
+          </a:p>
+        </p:txBody>
+      </p:sp>
+      <p:sp>
+        <p:nvSpPr>
+          <p:cNvPr id="8" name="Rounded Rectangle 7"/>
+          <p:cNvSpPr/>
+          <p:nvPr/>
+        </p:nvSpPr>
+        <p:spPr>
+          <a:xfrm>
+            <a:off x="5349240" y="1417320"/>
+            <a:ext cx="6336792" cy="3977639"/>
+          </a:xfrm>
+          <a:prstGeom prst="roundRect">
+            <a:avLst>
+              <a:gd name="adj" fmla="val 5500"/>
+            </a:avLst>
+          </a:prstGeom>
+          <a:solidFill>
+            <a:srgbClr val="F8F2E5"/>
+          </a:solidFill>
+          <a:ln>
+            <a:noFill/>
+          </a:ln>
+          <a:effectLst/>
+        </p:spPr>
+        <p:style>
+          <a:lnRef idx="1">
+            <a:schemeClr val="accent1"/>
+          </a:lnRef>
+          <a:fillRef idx="3">
+            <a:schemeClr val="accent1"/>
+          </a:fillRef>
+          <a:effectRef idx="2">
+            <a:schemeClr val="accent1"/>
+          </a:effectRef>
+          <a:fontRef idx="minor">
+            <a:schemeClr val="lt1"/>
+          </a:fontRef>
+        </p:style>
+        <p:txBody>
+          <a:bodyPr rtlCol="0" anchor="ctr"/>
+          <a:lstStyle/>
+          <a:p>
+            <a:pPr algn="ctr"/>
+          </a:p>
+        </p:txBody>
+      </p:sp>
       <p:pic>
         <p:nvPicPr>
-          <p:cNvPr id="4" name="Picture 3" descr="10_tipe_pembayaran.png"/>
+          <p:cNvPr id="9" name="Picture 8" descr="10_tipe_pembayaran.png"/>
           <p:cNvPicPr>
             <a:picLocks noChangeAspect="1"/>
           </p:cNvPicPr>
@@ -6596,8 +7770,8 @@
         </p:blipFill>
         <p:spPr>
           <a:xfrm>
-            <a:off x="640080" y="1691640"/>
-            <a:ext cx="5394960" cy="3236976"/>
+            <a:off x="5550408" y="1625803"/>
+            <a:ext cx="5934455" cy="3560673"/>
           </a:xfrm>
           <a:prstGeom prst="rect">
             <a:avLst/>
@@ -6606,14 +7780,14 @@
       </p:pic>
       <p:sp>
         <p:nvSpPr>
-          <p:cNvPr id="5" name="TextBox 4"/>
+          <p:cNvPr id="10" name="TextBox 9"/>
           <p:cNvSpPr txBox="1"/>
           <p:nvPr/>
         </p:nvSpPr>
         <p:spPr>
           <a:xfrm>
-            <a:off x="640080" y="5038344"/>
-            <a:ext cx="5394960" cy="365760"/>
+            <a:off x="5349240" y="5486399"/>
+            <a:ext cx="6336792" cy="274320"/>
           </a:xfrm>
           <a:prstGeom prst="rect">
             <a:avLst/>
@@ -6621,205 +7795,30 @@
           <a:noFill/>
         </p:spPr>
         <p:txBody>
-          <a:bodyPr wrap="square" lIns="0" rIns="0" tIns="0" bIns="0">
+          <a:bodyPr wrap="square" anchor="t" lIns="0" rIns="0" tIns="0" bIns="0">
             <a:spAutoFit/>
           </a:bodyPr>
           <a:lstStyle/>
           <a:p>
-            <a:pPr algn="ctr">
+            <a:pPr>
+              <a:lnSpc>
+                <a:spcPct val="113000"/>
+              </a:lnSpc>
+              <a:spcBef>
+                <a:spcPts val="0"/>
+              </a:spcBef>
               <a:spcAft>
-                <a:spcPts val="800"/>
+                <a:spcPts val="0"/>
               </a:spcAft>
             </a:pPr>
             <a:r>
-              <a:rPr sz="1200" b="0" i="1">
-                <a:solidFill>
-                  <a:srgbClr val="6E5B4D"/>
+              <a:rPr sz="1050" b="0">
+                <a:solidFill>
+                  <a:srgbClr val="8A7A6C"/>
                 </a:solidFill>
                 <a:latin typeface="Noto Sans"/>
               </a:rPr>
-              <a:t>Distribusi tipe pembayaran</a:t>
-            </a:r>
-          </a:p>
-        </p:txBody>
-      </p:sp>
-      <p:sp>
-        <p:nvSpPr>
-          <p:cNvPr id="6" name="TextBox 5"/>
-          <p:cNvSpPr txBox="1"/>
-          <p:nvPr/>
-        </p:nvSpPr>
-        <p:spPr>
-          <a:xfrm>
-            <a:off x="6355080" y="1517904"/>
-            <a:ext cx="5193792" cy="960120"/>
-          </a:xfrm>
-          <a:prstGeom prst="rect">
-            <a:avLst/>
-          </a:prstGeom>
-          <a:noFill/>
-        </p:spPr>
-        <p:txBody>
-          <a:bodyPr wrap="square" lIns="0" rIns="0" tIns="0" bIns="0">
-            <a:spAutoFit/>
-          </a:bodyPr>
-          <a:lstStyle/>
-          <a:p>
-            <a:pPr>
-              <a:spcAft>
-                <a:spcPts val="0"/>
-              </a:spcAft>
-            </a:pPr>
-            <a:r>
-              <a:rPr sz="4600" b="1" i="0">
-                <a:solidFill>
-                  <a:srgbClr val="A34A38"/>
-                </a:solidFill>
-                <a:latin typeface="Noto Sans"/>
-              </a:rPr>
-              <a:t>3,1%</a:t>
-            </a:r>
-          </a:p>
-        </p:txBody>
-      </p:sp>
-      <p:sp>
-        <p:nvSpPr>
-          <p:cNvPr id="7" name="TextBox 6"/>
-          <p:cNvSpPr txBox="1"/>
-          <p:nvPr/>
-        </p:nvSpPr>
-        <p:spPr>
-          <a:xfrm>
-            <a:off x="6355080" y="2450592"/>
-            <a:ext cx="5193792" cy="411480"/>
-          </a:xfrm>
-          <a:prstGeom prst="rect">
-            <a:avLst/>
-          </a:prstGeom>
-          <a:noFill/>
-        </p:spPr>
-        <p:txBody>
-          <a:bodyPr wrap="square" lIns="0" rIns="0" tIns="0" bIns="0">
-            <a:spAutoFit/>
-          </a:bodyPr>
-          <a:lstStyle/>
-          <a:p>
-            <a:pPr>
-              <a:spcAft>
-                <a:spcPts val="0"/>
-              </a:spcAft>
-            </a:pPr>
-            <a:r>
-              <a:rPr sz="1300" b="0" i="0">
-                <a:solidFill>
-                  <a:srgbClr val="6E5B4D"/>
-                </a:solidFill>
-                <a:latin typeface="Noto Sans"/>
-              </a:rPr>
-              <a:t>repeat purchase rate dari 96.096 pelanggan unik</a:t>
-            </a:r>
-          </a:p>
-        </p:txBody>
-      </p:sp>
-      <p:sp>
-        <p:nvSpPr>
-          <p:cNvPr id="8" name="TextBox 7"/>
-          <p:cNvSpPr txBox="1"/>
-          <p:nvPr/>
-        </p:nvSpPr>
-        <p:spPr>
-          <a:xfrm>
-            <a:off x="6355080" y="2971800"/>
-            <a:ext cx="5193792" cy="3474720"/>
-          </a:xfrm>
-          <a:prstGeom prst="rect">
-            <a:avLst/>
-          </a:prstGeom>
-          <a:noFill/>
-        </p:spPr>
-        <p:txBody>
-          <a:bodyPr wrap="square" lIns="0" rIns="0" tIns="0" bIns="0">
-            <a:spAutoFit/>
-          </a:bodyPr>
-          <a:lstStyle/>
-          <a:p>
-            <a:pPr marL="171450" indent="-171450">
-              <a:lnSpc>
-                <a:spcPct val="112000"/>
-              </a:lnSpc>
-              <a:spcAft>
-                <a:spcPts val="1200"/>
-              </a:spcAft>
-              <a:buChar char="•"/>
-            </a:pPr>
-            <a:r>
-              <a:rPr sz="1500" b="0" i="0">
-                <a:solidFill>
-                  <a:srgbClr val="33231C"/>
-                </a:solidFill>
-                <a:latin typeface="Noto Sans"/>
-              </a:rPr>
-              <a:t>Kartu kredit dipakai di 75.4 persen order, boleto di 19.9 persen</a:t>
-            </a:r>
-          </a:p>
-          <a:p>
-            <a:pPr marL="171450" indent="-171450">
-              <a:lnSpc>
-                <a:spcPct val="112000"/>
-              </a:lnSpc>
-              <a:spcAft>
-                <a:spcPts val="1200"/>
-              </a:spcAft>
-              <a:buChar char="•"/>
-            </a:pPr>
-            <a:r>
-              <a:rPr sz="1500" b="0" i="0">
-                <a:solidFill>
-                  <a:srgbClr val="33231C"/>
-                </a:solidFill>
-                <a:latin typeface="Noto Sans"/>
-              </a:rPr>
-              <a:t>Sebanyak 51.5 persen order memakai cicilan lebih dari 1 kali; rata rata cicilan kartu kredit 3.6 kali dibanding boleto 1.0 kali</a:t>
-            </a:r>
-          </a:p>
-          <a:p>
-            <a:pPr marL="171450" indent="-171450">
-              <a:lnSpc>
-                <a:spcPct val="112000"/>
-              </a:lnSpc>
-              <a:spcAft>
-                <a:spcPts val="1200"/>
-              </a:spcAft>
-              <a:buChar char="•"/>
-            </a:pPr>
-            <a:r>
-              <a:rPr sz="1500" b="0" i="0">
-                <a:solidFill>
-                  <a:srgbClr val="33231C"/>
-                </a:solidFill>
-                <a:latin typeface="Noto Sans"/>
-              </a:rPr>
-              <a:t>Dari 96.096 pelanggan unik, repeat purchase rate hanya 3.1 persen</a:t>
-            </a:r>
-          </a:p>
-          <a:p>
-            <a:pPr marL="171450" indent="-171450">
-              <a:lnSpc>
-                <a:spcPct val="112000"/>
-              </a:lnSpc>
-              <a:spcAft>
-                <a:spcPts val="1200"/>
-              </a:spcAft>
-              <a:buChar char="•"/>
-            </a:pPr>
-            <a:r>
-              <a:rPr sz="1500" b="0" i="0">
-                <a:solidFill>
-                  <a:srgbClr val="33231C"/>
-                </a:solidFill>
-                <a:latin typeface="Noto Sans"/>
-              </a:rPr>
-              <a:t>Retensi kohor 90 hari stabil di 1.1 sampai 1.5 persen tanpa tren perbaikan</a:t>
+              <a:t>Chart: distribusi tipe pembayaran.</a:t>
             </a:r>
           </a:p>
         </p:txBody>
@@ -6858,8 +7857,8 @@
         </p:nvSpPr>
         <p:spPr>
           <a:xfrm>
-            <a:off x="640080" y="384048"/>
-            <a:ext cx="10881360" cy="914400"/>
+            <a:off x="502920" y="384048"/>
+            <a:ext cx="11155680" cy="914400"/>
           </a:xfrm>
           <a:prstGeom prst="rect">
             <a:avLst/>
@@ -6867,41 +7866,49 @@
           <a:noFill/>
         </p:spPr>
         <p:txBody>
-          <a:bodyPr wrap="square" lIns="0" rIns="0" tIns="0" bIns="0">
+          <a:bodyPr wrap="square" anchor="t" lIns="0" rIns="0" tIns="0" bIns="0">
             <a:spAutoFit/>
           </a:bodyPr>
           <a:lstStyle/>
           <a:p>
             <a:pPr>
+              <a:lnSpc>
+                <a:spcPct val="113000"/>
+              </a:lnSpc>
+              <a:spcBef>
+                <a:spcPts val="0"/>
+              </a:spcBef>
               <a:spcAft>
-                <a:spcPts val="800"/>
+                <a:spcPts val="0"/>
               </a:spcAft>
             </a:pPr>
             <a:r>
-              <a:rPr sz="3200" b="1" i="0">
+              <a:rPr sz="3100" b="1">
                 <a:solidFill>
                   <a:srgbClr val="33231C"/>
                 </a:solidFill>
                 <a:latin typeface="Liberation Serif"/>
               </a:rPr>
-              <a:t>Rekomendasi Bisnis</a:t>
-            </a:r>
-          </a:p>
-        </p:txBody>
-      </p:sp>
-      <p:sp>
-        <p:nvSpPr>
-          <p:cNvPr id="3" name="Rectangle 2"/>
+              <a:t>Dashboard Power BI</a:t>
+            </a:r>
+          </a:p>
+        </p:txBody>
+      </p:sp>
+      <p:sp>
+        <p:nvSpPr>
+          <p:cNvPr id="3" name="Rounded Rectangle 2"/>
           <p:cNvSpPr/>
           <p:nvPr/>
         </p:nvSpPr>
         <p:spPr>
           <a:xfrm>
-            <a:off x="658368" y="1225296"/>
-            <a:ext cx="1371600" cy="64008"/>
-          </a:xfrm>
-          <a:prstGeom prst="rect">
-            <a:avLst/>
+            <a:off x="521207" y="1097280"/>
+            <a:ext cx="777240" cy="82296"/>
+          </a:xfrm>
+          <a:prstGeom prst="roundRect">
+            <a:avLst>
+              <a:gd name="adj" fmla="val 5500"/>
+            </a:avLst>
           </a:prstGeom>
           <a:solidFill>
             <a:srgbClr val="DE7A2D"/>
@@ -6935,17 +7942,65 @@
       </p:sp>
       <p:sp>
         <p:nvSpPr>
-          <p:cNvPr id="4" name="Rectangle 3"/>
+          <p:cNvPr id="4" name="Rounded Rectangle 3"/>
           <p:cNvSpPr/>
           <p:nvPr/>
         </p:nvSpPr>
         <p:spPr>
           <a:xfrm>
-            <a:off x="640080" y="1554480"/>
-            <a:ext cx="5285232" cy="2240280"/>
-          </a:xfrm>
-          <a:prstGeom prst="rect">
-            <a:avLst/>
+            <a:off x="566928" y="1481328"/>
+            <a:ext cx="6903720" cy="4160520"/>
+          </a:xfrm>
+          <a:prstGeom prst="roundRect">
+            <a:avLst>
+              <a:gd name="adj" fmla="val 5500"/>
+            </a:avLst>
+          </a:prstGeom>
+          <a:solidFill>
+            <a:srgbClr val="E2D2B8"/>
+          </a:solidFill>
+          <a:ln>
+            <a:noFill/>
+          </a:ln>
+          <a:effectLst/>
+        </p:spPr>
+        <p:style>
+          <a:lnRef idx="1">
+            <a:schemeClr val="accent1"/>
+          </a:lnRef>
+          <a:fillRef idx="3">
+            <a:schemeClr val="accent1"/>
+          </a:fillRef>
+          <a:effectRef idx="2">
+            <a:schemeClr val="accent1"/>
+          </a:effectRef>
+          <a:fontRef idx="minor">
+            <a:schemeClr val="lt1"/>
+          </a:fontRef>
+        </p:style>
+        <p:txBody>
+          <a:bodyPr rtlCol="0" anchor="ctr"/>
+          <a:lstStyle/>
+          <a:p>
+            <a:pPr algn="ctr"/>
+          </a:p>
+        </p:txBody>
+      </p:sp>
+      <p:sp>
+        <p:nvSpPr>
+          <p:cNvPr id="5" name="Rounded Rectangle 4"/>
+          <p:cNvSpPr/>
+          <p:nvPr/>
+        </p:nvSpPr>
+        <p:spPr>
+          <a:xfrm>
+            <a:off x="502920" y="1417320"/>
+            <a:ext cx="6903720" cy="4160520"/>
+          </a:xfrm>
+          <a:prstGeom prst="roundRect">
+            <a:avLst>
+              <a:gd name="adj" fmla="val 5500"/>
+            </a:avLst>
           </a:prstGeom>
           <a:solidFill>
             <a:srgbClr val="F8F2E5"/>
@@ -6977,19 +8032,632 @@
           </a:p>
         </p:txBody>
       </p:sp>
-      <p:sp>
-        <p:nvSpPr>
-          <p:cNvPr id="5" name="Rectangle 4"/>
-          <p:cNvSpPr/>
-          <p:nvPr/>
-        </p:nvSpPr>
-        <p:spPr>
-          <a:xfrm>
-            <a:off x="640080" y="1554480"/>
-            <a:ext cx="82296" cy="2240280"/>
+      <p:pic>
+        <p:nvPicPr>
+          <p:cNvPr id="6" name="Picture 5" descr="dashboard_preview_halaman1.png"/>
+          <p:cNvPicPr>
+            <a:picLocks noChangeAspect="1"/>
+          </p:cNvPicPr>
+          <p:nvPr/>
+        </p:nvPicPr>
+        <p:blipFill>
+          <a:blip r:embed="rId2"/>
+          <a:stretch>
+            <a:fillRect/>
+          </a:stretch>
+        </p:blipFill>
+        <p:spPr>
+          <a:xfrm>
+            <a:off x="704088" y="1669065"/>
+            <a:ext cx="6501383" cy="3657028"/>
           </a:xfrm>
           <a:prstGeom prst="rect">
             <a:avLst/>
+          </a:prstGeom>
+        </p:spPr>
+      </p:pic>
+      <p:sp>
+        <p:nvSpPr>
+          <p:cNvPr id="7" name="TextBox 6"/>
+          <p:cNvSpPr txBox="1"/>
+          <p:nvPr/>
+        </p:nvSpPr>
+        <p:spPr>
+          <a:xfrm>
+            <a:off x="502920" y="5669279"/>
+            <a:ext cx="6903720" cy="274320"/>
+          </a:xfrm>
+          <a:prstGeom prst="rect">
+            <a:avLst/>
+          </a:prstGeom>
+          <a:noFill/>
+        </p:spPr>
+        <p:txBody>
+          <a:bodyPr wrap="square" anchor="t" lIns="0" rIns="0" tIns="0" bIns="0">
+            <a:spAutoFit/>
+          </a:bodyPr>
+          <a:lstStyle/>
+          <a:p>
+            <a:pPr>
+              <a:lnSpc>
+                <a:spcPct val="113000"/>
+              </a:lnSpc>
+              <a:spcBef>
+                <a:spcPts val="0"/>
+              </a:spcBef>
+              <a:spcAft>
+                <a:spcPts val="0"/>
+              </a:spcAft>
+            </a:pPr>
+            <a:r>
+              <a:rPr sz="1050" b="0">
+                <a:solidFill>
+                  <a:srgbClr val="8A7A6C"/>
+                </a:solidFill>
+                <a:latin typeface="Noto Sans"/>
+              </a:rPr>
+              <a:t>Pratinjau halaman 1 dashboard, dirender dari kit Power BI proyek ini.</a:t>
+            </a:r>
+          </a:p>
+        </p:txBody>
+      </p:sp>
+      <p:sp>
+        <p:nvSpPr>
+          <p:cNvPr id="8" name="TextBox 7"/>
+          <p:cNvSpPr txBox="1"/>
+          <p:nvPr/>
+        </p:nvSpPr>
+        <p:spPr>
+          <a:xfrm>
+            <a:off x="7726679" y="1417320"/>
+            <a:ext cx="3959352" cy="365760"/>
+          </a:xfrm>
+          <a:prstGeom prst="rect">
+            <a:avLst/>
+          </a:prstGeom>
+          <a:noFill/>
+        </p:spPr>
+        <p:txBody>
+          <a:bodyPr wrap="square" anchor="t" lIns="0" rIns="0" tIns="0" bIns="0">
+            <a:spAutoFit/>
+          </a:bodyPr>
+          <a:lstStyle/>
+          <a:p>
+            <a:pPr>
+              <a:lnSpc>
+                <a:spcPct val="113000"/>
+              </a:lnSpc>
+              <a:spcBef>
+                <a:spcPts val="0"/>
+              </a:spcBef>
+              <a:spcAft>
+                <a:spcPts val="0"/>
+              </a:spcAft>
+            </a:pPr>
+            <a:r>
+              <a:rPr sz="1300" b="1">
+                <a:solidFill>
+                  <a:srgbClr val="A34A38"/>
+                </a:solidFill>
+                <a:latin typeface="Noto Sans"/>
+              </a:rPr>
+              <a:t>ISI DASHBOARD</a:t>
+            </a:r>
+          </a:p>
+        </p:txBody>
+      </p:sp>
+      <p:sp>
+        <p:nvSpPr>
+          <p:cNvPr id="9" name="Rounded Rectangle 8"/>
+          <p:cNvSpPr/>
+          <p:nvPr/>
+        </p:nvSpPr>
+        <p:spPr>
+          <a:xfrm>
+            <a:off x="7726679" y="1810512"/>
+            <a:ext cx="3959352" cy="731520"/>
+          </a:xfrm>
+          <a:prstGeom prst="roundRect">
+            <a:avLst>
+              <a:gd name="adj" fmla="val 5500"/>
+            </a:avLst>
+          </a:prstGeom>
+          <a:solidFill>
+            <a:srgbClr val="F8F2E5"/>
+          </a:solidFill>
+          <a:ln>
+            <a:noFill/>
+          </a:ln>
+          <a:effectLst/>
+        </p:spPr>
+        <p:style>
+          <a:lnRef idx="1">
+            <a:schemeClr val="accent1"/>
+          </a:lnRef>
+          <a:fillRef idx="3">
+            <a:schemeClr val="accent1"/>
+          </a:fillRef>
+          <a:effectRef idx="2">
+            <a:schemeClr val="accent1"/>
+          </a:effectRef>
+          <a:fontRef idx="minor">
+            <a:schemeClr val="lt1"/>
+          </a:fontRef>
+        </p:style>
+        <p:txBody>
+          <a:bodyPr rtlCol="0" anchor="ctr"/>
+          <a:lstStyle/>
+          <a:p>
+            <a:pPr algn="ctr"/>
+          </a:p>
+        </p:txBody>
+      </p:sp>
+      <p:sp>
+        <p:nvSpPr>
+          <p:cNvPr id="10" name="TextBox 9"/>
+          <p:cNvSpPr txBox="1"/>
+          <p:nvPr/>
+        </p:nvSpPr>
+        <p:spPr>
+          <a:xfrm>
+            <a:off x="7973568" y="1901952"/>
+            <a:ext cx="3520440" cy="566928"/>
+          </a:xfrm>
+          <a:prstGeom prst="rect">
+            <a:avLst/>
+          </a:prstGeom>
+          <a:noFill/>
+        </p:spPr>
+        <p:txBody>
+          <a:bodyPr wrap="square" anchor="t" lIns="0" rIns="0" tIns="0" bIns="0">
+            <a:spAutoFit/>
+          </a:bodyPr>
+          <a:lstStyle/>
+          <a:p>
+            <a:pPr>
+              <a:lnSpc>
+                <a:spcPct val="113000"/>
+              </a:lnSpc>
+              <a:spcBef>
+                <a:spcPts val="0"/>
+              </a:spcBef>
+              <a:spcAft>
+                <a:spcPts val="100"/>
+              </a:spcAft>
+            </a:pPr>
+            <a:r>
+              <a:rPr sz="1050" b="1">
+                <a:solidFill>
+                  <a:srgbClr val="DE7A2D"/>
+                </a:solidFill>
+                <a:latin typeface="Noto Sans"/>
+              </a:rPr>
+              <a:t>Halaman 1</a:t>
+            </a:r>
+          </a:p>
+          <a:p>
+            <a:pPr>
+              <a:lnSpc>
+                <a:spcPct val="113000"/>
+              </a:lnSpc>
+              <a:spcBef>
+                <a:spcPts val="0"/>
+              </a:spcBef>
+              <a:spcAft>
+                <a:spcPts val="0"/>
+              </a:spcAft>
+            </a:pPr>
+            <a:r>
+              <a:rPr sz="1300" b="1">
+                <a:solidFill>
+                  <a:srgbClr val="33231C"/>
+                </a:solidFill>
+                <a:latin typeface="Noto Sans"/>
+              </a:rPr>
+              <a:t>Ringkasan Eksekutif</a:t>
+            </a:r>
+          </a:p>
+        </p:txBody>
+      </p:sp>
+      <p:sp>
+        <p:nvSpPr>
+          <p:cNvPr id="11" name="Rounded Rectangle 10"/>
+          <p:cNvSpPr/>
+          <p:nvPr/>
+        </p:nvSpPr>
+        <p:spPr>
+          <a:xfrm>
+            <a:off x="7726679" y="2651760"/>
+            <a:ext cx="3959352" cy="731520"/>
+          </a:xfrm>
+          <a:prstGeom prst="roundRect">
+            <a:avLst>
+              <a:gd name="adj" fmla="val 5500"/>
+            </a:avLst>
+          </a:prstGeom>
+          <a:solidFill>
+            <a:srgbClr val="F8F2E5"/>
+          </a:solidFill>
+          <a:ln>
+            <a:noFill/>
+          </a:ln>
+          <a:effectLst/>
+        </p:spPr>
+        <p:style>
+          <a:lnRef idx="1">
+            <a:schemeClr val="accent1"/>
+          </a:lnRef>
+          <a:fillRef idx="3">
+            <a:schemeClr val="accent1"/>
+          </a:fillRef>
+          <a:effectRef idx="2">
+            <a:schemeClr val="accent1"/>
+          </a:effectRef>
+          <a:fontRef idx="minor">
+            <a:schemeClr val="lt1"/>
+          </a:fontRef>
+        </p:style>
+        <p:txBody>
+          <a:bodyPr rtlCol="0" anchor="ctr"/>
+          <a:lstStyle/>
+          <a:p>
+            <a:pPr algn="ctr"/>
+          </a:p>
+        </p:txBody>
+      </p:sp>
+      <p:sp>
+        <p:nvSpPr>
+          <p:cNvPr id="12" name="TextBox 11"/>
+          <p:cNvSpPr txBox="1"/>
+          <p:nvPr/>
+        </p:nvSpPr>
+        <p:spPr>
+          <a:xfrm>
+            <a:off x="7973568" y="2743200"/>
+            <a:ext cx="3520440" cy="566928"/>
+          </a:xfrm>
+          <a:prstGeom prst="rect">
+            <a:avLst/>
+          </a:prstGeom>
+          <a:noFill/>
+        </p:spPr>
+        <p:txBody>
+          <a:bodyPr wrap="square" anchor="t" lIns="0" rIns="0" tIns="0" bIns="0">
+            <a:spAutoFit/>
+          </a:bodyPr>
+          <a:lstStyle/>
+          <a:p>
+            <a:pPr>
+              <a:lnSpc>
+                <a:spcPct val="113000"/>
+              </a:lnSpc>
+              <a:spcBef>
+                <a:spcPts val="0"/>
+              </a:spcBef>
+              <a:spcAft>
+                <a:spcPts val="100"/>
+              </a:spcAft>
+            </a:pPr>
+            <a:r>
+              <a:rPr sz="1050" b="1">
+                <a:solidFill>
+                  <a:srgbClr val="DE7A2D"/>
+                </a:solidFill>
+                <a:latin typeface="Noto Sans"/>
+              </a:rPr>
+              <a:t>Halaman 2</a:t>
+            </a:r>
+          </a:p>
+          <a:p>
+            <a:pPr>
+              <a:lnSpc>
+                <a:spcPct val="113000"/>
+              </a:lnSpc>
+              <a:spcBef>
+                <a:spcPts val="0"/>
+              </a:spcBef>
+              <a:spcAft>
+                <a:spcPts val="0"/>
+              </a:spcAft>
+            </a:pPr>
+            <a:r>
+              <a:rPr sz="1300" b="1">
+                <a:solidFill>
+                  <a:srgbClr val="33231C"/>
+                </a:solidFill>
+                <a:latin typeface="Noto Sans"/>
+              </a:rPr>
+              <a:t>Kategori Produk</a:t>
+            </a:r>
+          </a:p>
+        </p:txBody>
+      </p:sp>
+      <p:sp>
+        <p:nvSpPr>
+          <p:cNvPr id="13" name="Rounded Rectangle 12"/>
+          <p:cNvSpPr/>
+          <p:nvPr/>
+        </p:nvSpPr>
+        <p:spPr>
+          <a:xfrm>
+            <a:off x="7726679" y="3493008"/>
+            <a:ext cx="3959352" cy="731520"/>
+          </a:xfrm>
+          <a:prstGeom prst="roundRect">
+            <a:avLst>
+              <a:gd name="adj" fmla="val 5500"/>
+            </a:avLst>
+          </a:prstGeom>
+          <a:solidFill>
+            <a:srgbClr val="F8F2E5"/>
+          </a:solidFill>
+          <a:ln>
+            <a:noFill/>
+          </a:ln>
+          <a:effectLst/>
+        </p:spPr>
+        <p:style>
+          <a:lnRef idx="1">
+            <a:schemeClr val="accent1"/>
+          </a:lnRef>
+          <a:fillRef idx="3">
+            <a:schemeClr val="accent1"/>
+          </a:fillRef>
+          <a:effectRef idx="2">
+            <a:schemeClr val="accent1"/>
+          </a:effectRef>
+          <a:fontRef idx="minor">
+            <a:schemeClr val="lt1"/>
+          </a:fontRef>
+        </p:style>
+        <p:txBody>
+          <a:bodyPr rtlCol="0" anchor="ctr"/>
+          <a:lstStyle/>
+          <a:p>
+            <a:pPr algn="ctr"/>
+          </a:p>
+        </p:txBody>
+      </p:sp>
+      <p:sp>
+        <p:nvSpPr>
+          <p:cNvPr id="14" name="TextBox 13"/>
+          <p:cNvSpPr txBox="1"/>
+          <p:nvPr/>
+        </p:nvSpPr>
+        <p:spPr>
+          <a:xfrm>
+            <a:off x="7973568" y="3584448"/>
+            <a:ext cx="3520440" cy="566928"/>
+          </a:xfrm>
+          <a:prstGeom prst="rect">
+            <a:avLst/>
+          </a:prstGeom>
+          <a:noFill/>
+        </p:spPr>
+        <p:txBody>
+          <a:bodyPr wrap="square" anchor="t" lIns="0" rIns="0" tIns="0" bIns="0">
+            <a:spAutoFit/>
+          </a:bodyPr>
+          <a:lstStyle/>
+          <a:p>
+            <a:pPr>
+              <a:lnSpc>
+                <a:spcPct val="113000"/>
+              </a:lnSpc>
+              <a:spcBef>
+                <a:spcPts val="0"/>
+              </a:spcBef>
+              <a:spcAft>
+                <a:spcPts val="100"/>
+              </a:spcAft>
+            </a:pPr>
+            <a:r>
+              <a:rPr sz="1050" b="1">
+                <a:solidFill>
+                  <a:srgbClr val="DE7A2D"/>
+                </a:solidFill>
+                <a:latin typeface="Noto Sans"/>
+              </a:rPr>
+              <a:t>Halaman 3</a:t>
+            </a:r>
+          </a:p>
+          <a:p>
+            <a:pPr>
+              <a:lnSpc>
+                <a:spcPct val="113000"/>
+              </a:lnSpc>
+              <a:spcBef>
+                <a:spcPts val="0"/>
+              </a:spcBef>
+              <a:spcAft>
+                <a:spcPts val="0"/>
+              </a:spcAft>
+            </a:pPr>
+            <a:r>
+              <a:rPr sz="1300" b="1">
+                <a:solidFill>
+                  <a:srgbClr val="33231C"/>
+                </a:solidFill>
+                <a:latin typeface="Noto Sans"/>
+              </a:rPr>
+              <a:t>Pengiriman dan Review</a:t>
+            </a:r>
+          </a:p>
+        </p:txBody>
+      </p:sp>
+      <p:sp>
+        <p:nvSpPr>
+          <p:cNvPr id="15" name="Rounded Rectangle 14"/>
+          <p:cNvSpPr/>
+          <p:nvPr/>
+        </p:nvSpPr>
+        <p:spPr>
+          <a:xfrm>
+            <a:off x="7726679" y="4334256"/>
+            <a:ext cx="3959352" cy="731520"/>
+          </a:xfrm>
+          <a:prstGeom prst="roundRect">
+            <a:avLst>
+              <a:gd name="adj" fmla="val 5500"/>
+            </a:avLst>
+          </a:prstGeom>
+          <a:solidFill>
+            <a:srgbClr val="F8F2E5"/>
+          </a:solidFill>
+          <a:ln>
+            <a:noFill/>
+          </a:ln>
+          <a:effectLst/>
+        </p:spPr>
+        <p:style>
+          <a:lnRef idx="1">
+            <a:schemeClr val="accent1"/>
+          </a:lnRef>
+          <a:fillRef idx="3">
+            <a:schemeClr val="accent1"/>
+          </a:fillRef>
+          <a:effectRef idx="2">
+            <a:schemeClr val="accent1"/>
+          </a:effectRef>
+          <a:fontRef idx="minor">
+            <a:schemeClr val="lt1"/>
+          </a:fontRef>
+        </p:style>
+        <p:txBody>
+          <a:bodyPr rtlCol="0" anchor="ctr"/>
+          <a:lstStyle/>
+          <a:p>
+            <a:pPr algn="ctr"/>
+          </a:p>
+        </p:txBody>
+      </p:sp>
+      <p:sp>
+        <p:nvSpPr>
+          <p:cNvPr id="16" name="TextBox 15"/>
+          <p:cNvSpPr txBox="1"/>
+          <p:nvPr/>
+        </p:nvSpPr>
+        <p:spPr>
+          <a:xfrm>
+            <a:off x="7973568" y="4425696"/>
+            <a:ext cx="3520440" cy="566928"/>
+          </a:xfrm>
+          <a:prstGeom prst="rect">
+            <a:avLst/>
+          </a:prstGeom>
+          <a:noFill/>
+        </p:spPr>
+        <p:txBody>
+          <a:bodyPr wrap="square" anchor="t" lIns="0" rIns="0" tIns="0" bIns="0">
+            <a:spAutoFit/>
+          </a:bodyPr>
+          <a:lstStyle/>
+          <a:p>
+            <a:pPr>
+              <a:lnSpc>
+                <a:spcPct val="113000"/>
+              </a:lnSpc>
+              <a:spcBef>
+                <a:spcPts val="0"/>
+              </a:spcBef>
+              <a:spcAft>
+                <a:spcPts val="100"/>
+              </a:spcAft>
+            </a:pPr>
+            <a:r>
+              <a:rPr sz="1050" b="1">
+                <a:solidFill>
+                  <a:srgbClr val="DE7A2D"/>
+                </a:solidFill>
+                <a:latin typeface="Noto Sans"/>
+              </a:rPr>
+              <a:t>Halaman 4</a:t>
+            </a:r>
+          </a:p>
+          <a:p>
+            <a:pPr>
+              <a:lnSpc>
+                <a:spcPct val="113000"/>
+              </a:lnSpc>
+              <a:spcBef>
+                <a:spcPts val="0"/>
+              </a:spcBef>
+              <a:spcAft>
+                <a:spcPts val="0"/>
+              </a:spcAft>
+            </a:pPr>
+            <a:r>
+              <a:rPr sz="1300" b="1">
+                <a:solidFill>
+                  <a:srgbClr val="33231C"/>
+                </a:solidFill>
+                <a:latin typeface="Noto Sans"/>
+              </a:rPr>
+              <a:t>Geografi, Retensi, dan Metodologi</a:t>
+            </a:r>
+          </a:p>
+        </p:txBody>
+      </p:sp>
+      <p:sp>
+        <p:nvSpPr>
+          <p:cNvPr id="17" name="TextBox 16"/>
+          <p:cNvSpPr txBox="1"/>
+          <p:nvPr/>
+        </p:nvSpPr>
+        <p:spPr>
+          <a:xfrm>
+            <a:off x="7726679" y="5212080"/>
+            <a:ext cx="3959352" cy="914400"/>
+          </a:xfrm>
+          <a:prstGeom prst="rect">
+            <a:avLst/>
+          </a:prstGeom>
+          <a:noFill/>
+        </p:spPr>
+        <p:txBody>
+          <a:bodyPr wrap="square" anchor="t" lIns="0" rIns="0" tIns="0" bIns="0">
+            <a:spAutoFit/>
+          </a:bodyPr>
+          <a:lstStyle/>
+          <a:p>
+            <a:pPr>
+              <a:lnSpc>
+                <a:spcPct val="113000"/>
+              </a:lnSpc>
+              <a:spcBef>
+                <a:spcPts val="0"/>
+              </a:spcBef>
+              <a:spcAft>
+                <a:spcPts val="0"/>
+              </a:spcAft>
+            </a:pPr>
+            <a:r>
+              <a:rPr sz="1200" b="0">
+                <a:solidFill>
+                  <a:srgbClr val="33231C"/>
+                </a:solidFill>
+                <a:latin typeface="Noto Sans"/>
+              </a:rPr>
+              <a:t>Dua tabel fakta terpisah per grain (pesanan dan item); revenue produk tidak pernah dicampur dengan pembayaran termasuk ongkir.</a:t>
+            </a:r>
+          </a:p>
+        </p:txBody>
+      </p:sp>
+      <p:sp>
+        <p:nvSpPr>
+          <p:cNvPr id="18" name="Rounded Rectangle 17"/>
+          <p:cNvSpPr/>
+          <p:nvPr/>
+        </p:nvSpPr>
+        <p:spPr>
+          <a:xfrm>
+            <a:off x="502920" y="5961888"/>
+            <a:ext cx="11183112" cy="603504"/>
+          </a:xfrm>
+          <a:prstGeom prst="roundRect">
+            <a:avLst>
+              <a:gd name="adj" fmla="val 5500"/>
+            </a:avLst>
           </a:prstGeom>
           <a:solidFill>
             <a:srgbClr val="A34A38"/>
@@ -7023,14 +8691,14 @@
       </p:sp>
       <p:sp>
         <p:nvSpPr>
-          <p:cNvPr id="6" name="TextBox 5"/>
+          <p:cNvPr id="19" name="TextBox 18"/>
           <p:cNvSpPr txBox="1"/>
           <p:nvPr/>
         </p:nvSpPr>
         <p:spPr>
           <a:xfrm>
-            <a:off x="987552" y="1828800"/>
-            <a:ext cx="4663440" cy="1737360"/>
+            <a:off x="777240" y="5961888"/>
+            <a:ext cx="10698480" cy="603504"/>
           </a:xfrm>
           <a:prstGeom prst="rect">
             <a:avLst/>
@@ -7038,417 +8706,39 @@
           <a:noFill/>
         </p:spPr>
         <p:txBody>
-          <a:bodyPr wrap="square" lIns="0" rIns="0" tIns="0" bIns="0">
+          <a:bodyPr wrap="square" anchor="ctr" lIns="0" rIns="0" tIns="0" bIns="0">
             <a:spAutoFit/>
           </a:bodyPr>
           <a:lstStyle/>
           <a:p>
             <a:pPr>
               <a:lnSpc>
-                <a:spcPct val="118000"/>
+                <a:spcPct val="110000"/>
               </a:lnSpc>
+              <a:spcBef>
+                <a:spcPts val="0"/>
+              </a:spcBef>
               <a:spcAft>
                 <a:spcPts val="0"/>
               </a:spcAft>
             </a:pPr>
             <a:r>
-              <a:rPr sz="1500" b="0" i="0">
-                <a:solidFill>
-                  <a:srgbClr val="33231C"/>
+              <a:rPr sz="1250" b="1">
+                <a:solidFill>
+                  <a:srgbClr val="FFFFFF"/>
                 </a:solidFill>
                 <a:latin typeface="Noto Sans"/>
               </a:rPr>
-              <a:t>Perbaiki SLA pengiriman untuk kategori bulky dan fashion seperti office furniture dan mens fashion, karena keterlambatan adalah pendorong utama review buruk</a:t>
-            </a:r>
-          </a:p>
-        </p:txBody>
-      </p:sp>
-      <p:sp>
-        <p:nvSpPr>
-          <p:cNvPr id="7" name="Rectangle 6"/>
-          <p:cNvSpPr/>
-          <p:nvPr/>
-        </p:nvSpPr>
-        <p:spPr>
-          <a:xfrm>
-            <a:off x="6263640" y="1554480"/>
-            <a:ext cx="5285232" cy="2240280"/>
-          </a:xfrm>
-          <a:prstGeom prst="rect">
-            <a:avLst/>
-          </a:prstGeom>
-          <a:solidFill>
-            <a:srgbClr val="F8F2E5"/>
-          </a:solidFill>
-          <a:ln>
-            <a:noFill/>
-          </a:ln>
-          <a:effectLst/>
-        </p:spPr>
-        <p:style>
-          <a:lnRef idx="1">
-            <a:schemeClr val="accent1"/>
-          </a:lnRef>
-          <a:fillRef idx="3">
-            <a:schemeClr val="accent1"/>
-          </a:fillRef>
-          <a:effectRef idx="2">
-            <a:schemeClr val="accent1"/>
-          </a:effectRef>
-          <a:fontRef idx="minor">
-            <a:schemeClr val="lt1"/>
-          </a:fontRef>
-        </p:style>
-        <p:txBody>
-          <a:bodyPr rtlCol="0" anchor="ctr"/>
-          <a:lstStyle/>
-          <a:p>
-            <a:pPr algn="ctr"/>
-          </a:p>
-        </p:txBody>
-      </p:sp>
-      <p:sp>
-        <p:nvSpPr>
-          <p:cNvPr id="8" name="Rectangle 7"/>
-          <p:cNvSpPr/>
-          <p:nvPr/>
-        </p:nvSpPr>
-        <p:spPr>
-          <a:xfrm>
-            <a:off x="6263640" y="1554480"/>
-            <a:ext cx="82296" cy="2240280"/>
-          </a:xfrm>
-          <a:prstGeom prst="rect">
-            <a:avLst/>
-          </a:prstGeom>
-          <a:solidFill>
-            <a:srgbClr val="A34A38"/>
-          </a:solidFill>
-          <a:ln>
-            <a:noFill/>
-          </a:ln>
-          <a:effectLst/>
-        </p:spPr>
-        <p:style>
-          <a:lnRef idx="1">
-            <a:schemeClr val="accent1"/>
-          </a:lnRef>
-          <a:fillRef idx="3">
-            <a:schemeClr val="accent1"/>
-          </a:fillRef>
-          <a:effectRef idx="2">
-            <a:schemeClr val="accent1"/>
-          </a:effectRef>
-          <a:fontRef idx="minor">
-            <a:schemeClr val="lt1"/>
-          </a:fontRef>
-        </p:style>
-        <p:txBody>
-          <a:bodyPr rtlCol="0" anchor="ctr"/>
-          <a:lstStyle/>
-          <a:p>
-            <a:pPr algn="ctr"/>
-          </a:p>
-        </p:txBody>
-      </p:sp>
-      <p:sp>
-        <p:nvSpPr>
-          <p:cNvPr id="9" name="TextBox 8"/>
-          <p:cNvSpPr txBox="1"/>
-          <p:nvPr/>
-        </p:nvSpPr>
-        <p:spPr>
-          <a:xfrm>
-            <a:off x="6611112" y="1828800"/>
-            <a:ext cx="4663440" cy="1737360"/>
-          </a:xfrm>
-          <a:prstGeom prst="rect">
-            <a:avLst/>
-          </a:prstGeom>
-          <a:noFill/>
-        </p:spPr>
-        <p:txBody>
-          <a:bodyPr wrap="square" lIns="0" rIns="0" tIns="0" bIns="0">
-            <a:spAutoFit/>
-          </a:bodyPr>
-          <a:lstStyle/>
-          <a:p>
-            <a:pPr>
-              <a:lnSpc>
-                <a:spcPct val="118000"/>
-              </a:lnSpc>
-              <a:spcAft>
-                <a:spcPts val="0"/>
-              </a:spcAft>
-            </a:pPr>
-            <a:r>
-              <a:rPr sz="1500" b="0" i="0">
-                <a:solidFill>
-                  <a:srgbClr val="33231C"/>
+              <a:t>Olist-Ecommerce-Analysis.pbix</a:t>
+            </a:r>
+            <a:r>
+              <a:rPr sz="1250" b="0">
+                <a:solidFill>
+                  <a:srgbClr val="F8F2E5"/>
                 </a:solidFill>
                 <a:latin typeface="Noto Sans"/>
               </a:rPr>
-              <a:t>Bangun program retensi pelanggan: repeat purchase hanya 3.1 persen dan retensi kohor stagnan di 1.1 sampai 1.5 persen</a:t>
-            </a:r>
-          </a:p>
-        </p:txBody>
-      </p:sp>
-      <p:sp>
-        <p:nvSpPr>
-          <p:cNvPr id="10" name="Rectangle 9"/>
-          <p:cNvSpPr/>
-          <p:nvPr/>
-        </p:nvSpPr>
-        <p:spPr>
-          <a:xfrm>
-            <a:off x="640080" y="3977639"/>
-            <a:ext cx="5285232" cy="2240280"/>
-          </a:xfrm>
-          <a:prstGeom prst="rect">
-            <a:avLst/>
-          </a:prstGeom>
-          <a:solidFill>
-            <a:srgbClr val="F8F2E5"/>
-          </a:solidFill>
-          <a:ln>
-            <a:noFill/>
-          </a:ln>
-          <a:effectLst/>
-        </p:spPr>
-        <p:style>
-          <a:lnRef idx="1">
-            <a:schemeClr val="accent1"/>
-          </a:lnRef>
-          <a:fillRef idx="3">
-            <a:schemeClr val="accent1"/>
-          </a:fillRef>
-          <a:effectRef idx="2">
-            <a:schemeClr val="accent1"/>
-          </a:effectRef>
-          <a:fontRef idx="minor">
-            <a:schemeClr val="lt1"/>
-          </a:fontRef>
-        </p:style>
-        <p:txBody>
-          <a:bodyPr rtlCol="0" anchor="ctr"/>
-          <a:lstStyle/>
-          <a:p>
-            <a:pPr algn="ctr"/>
-          </a:p>
-        </p:txBody>
-      </p:sp>
-      <p:sp>
-        <p:nvSpPr>
-          <p:cNvPr id="11" name="Rectangle 10"/>
-          <p:cNvSpPr/>
-          <p:nvPr/>
-        </p:nvSpPr>
-        <p:spPr>
-          <a:xfrm>
-            <a:off x="640080" y="3977639"/>
-            <a:ext cx="82296" cy="2240280"/>
-          </a:xfrm>
-          <a:prstGeom prst="rect">
-            <a:avLst/>
-          </a:prstGeom>
-          <a:solidFill>
-            <a:srgbClr val="A34A38"/>
-          </a:solidFill>
-          <a:ln>
-            <a:noFill/>
-          </a:ln>
-          <a:effectLst/>
-        </p:spPr>
-        <p:style>
-          <a:lnRef idx="1">
-            <a:schemeClr val="accent1"/>
-          </a:lnRef>
-          <a:fillRef idx="3">
-            <a:schemeClr val="accent1"/>
-          </a:fillRef>
-          <a:effectRef idx="2">
-            <a:schemeClr val="accent1"/>
-          </a:effectRef>
-          <a:fontRef idx="minor">
-            <a:schemeClr val="lt1"/>
-          </a:fontRef>
-        </p:style>
-        <p:txBody>
-          <a:bodyPr rtlCol="0" anchor="ctr"/>
-          <a:lstStyle/>
-          <a:p>
-            <a:pPr algn="ctr"/>
-          </a:p>
-        </p:txBody>
-      </p:sp>
-      <p:sp>
-        <p:nvSpPr>
-          <p:cNvPr id="12" name="TextBox 11"/>
-          <p:cNvSpPr txBox="1"/>
-          <p:nvPr/>
-        </p:nvSpPr>
-        <p:spPr>
-          <a:xfrm>
-            <a:off x="987552" y="4251959"/>
-            <a:ext cx="4663440" cy="1737360"/>
-          </a:xfrm>
-          <a:prstGeom prst="rect">
-            <a:avLst/>
-          </a:prstGeom>
-          <a:noFill/>
-        </p:spPr>
-        <p:txBody>
-          <a:bodyPr wrap="square" lIns="0" rIns="0" tIns="0" bIns="0">
-            <a:spAutoFit/>
-          </a:bodyPr>
-          <a:lstStyle/>
-          <a:p>
-            <a:pPr>
-              <a:lnSpc>
-                <a:spcPct val="118000"/>
-              </a:lnSpc>
-              <a:spcAft>
-                <a:spcPts val="0"/>
-              </a:spcAft>
-            </a:pPr>
-            <a:r>
-              <a:rPr sz="1500" b="0" i="0">
-                <a:solidFill>
-                  <a:srgbClr val="33231C"/>
-                </a:solidFill>
-                <a:latin typeface="Noto Sans"/>
-              </a:rPr>
-              <a:t>Diversifikasi pasar di luar Sao Paulo yang kini menampung 42.0 persen order, untuk mengurangi risiko konsentrasi geografis</a:t>
-            </a:r>
-          </a:p>
-        </p:txBody>
-      </p:sp>
-      <p:sp>
-        <p:nvSpPr>
-          <p:cNvPr id="13" name="Rectangle 12"/>
-          <p:cNvSpPr/>
-          <p:nvPr/>
-        </p:nvSpPr>
-        <p:spPr>
-          <a:xfrm>
-            <a:off x="6263640" y="3977639"/>
-            <a:ext cx="5285232" cy="2240280"/>
-          </a:xfrm>
-          <a:prstGeom prst="rect">
-            <a:avLst/>
-          </a:prstGeom>
-          <a:solidFill>
-            <a:srgbClr val="F8F2E5"/>
-          </a:solidFill>
-          <a:ln>
-            <a:noFill/>
-          </a:ln>
-          <a:effectLst/>
-        </p:spPr>
-        <p:style>
-          <a:lnRef idx="1">
-            <a:schemeClr val="accent1"/>
-          </a:lnRef>
-          <a:fillRef idx="3">
-            <a:schemeClr val="accent1"/>
-          </a:fillRef>
-          <a:effectRef idx="2">
-            <a:schemeClr val="accent1"/>
-          </a:effectRef>
-          <a:fontRef idx="minor">
-            <a:schemeClr val="lt1"/>
-          </a:fontRef>
-        </p:style>
-        <p:txBody>
-          <a:bodyPr rtlCol="0" anchor="ctr"/>
-          <a:lstStyle/>
-          <a:p>
-            <a:pPr algn="ctr"/>
-          </a:p>
-        </p:txBody>
-      </p:sp>
-      <p:sp>
-        <p:nvSpPr>
-          <p:cNvPr id="14" name="Rectangle 13"/>
-          <p:cNvSpPr/>
-          <p:nvPr/>
-        </p:nvSpPr>
-        <p:spPr>
-          <a:xfrm>
-            <a:off x="6263640" y="3977639"/>
-            <a:ext cx="82296" cy="2240280"/>
-          </a:xfrm>
-          <a:prstGeom prst="rect">
-            <a:avLst/>
-          </a:prstGeom>
-          <a:solidFill>
-            <a:srgbClr val="A34A38"/>
-          </a:solidFill>
-          <a:ln>
-            <a:noFill/>
-          </a:ln>
-          <a:effectLst/>
-        </p:spPr>
-        <p:style>
-          <a:lnRef idx="1">
-            <a:schemeClr val="accent1"/>
-          </a:lnRef>
-          <a:fillRef idx="3">
-            <a:schemeClr val="accent1"/>
-          </a:fillRef>
-          <a:effectRef idx="2">
-            <a:schemeClr val="accent1"/>
-          </a:effectRef>
-          <a:fontRef idx="minor">
-            <a:schemeClr val="lt1"/>
-          </a:fontRef>
-        </p:style>
-        <p:txBody>
-          <a:bodyPr rtlCol="0" anchor="ctr"/>
-          <a:lstStyle/>
-          <a:p>
-            <a:pPr algn="ctr"/>
-          </a:p>
-        </p:txBody>
-      </p:sp>
-      <p:sp>
-        <p:nvSpPr>
-          <p:cNvPr id="15" name="TextBox 14"/>
-          <p:cNvSpPr txBox="1"/>
-          <p:nvPr/>
-        </p:nvSpPr>
-        <p:spPr>
-          <a:xfrm>
-            <a:off x="6611112" y="4251959"/>
-            <a:ext cx="4663440" cy="1737360"/>
-          </a:xfrm>
-          <a:prstGeom prst="rect">
-            <a:avLst/>
-          </a:prstGeom>
-          <a:noFill/>
-        </p:spPr>
-        <p:txBody>
-          <a:bodyPr wrap="square" lIns="0" rIns="0" tIns="0" bIns="0">
-            <a:spAutoFit/>
-          </a:bodyPr>
-          <a:lstStyle/>
-          <a:p>
-            <a:pPr>
-              <a:lnSpc>
-                <a:spcPct val="118000"/>
-              </a:lnSpc>
-              <a:spcAft>
-                <a:spcPts val="0"/>
-              </a:spcAft>
-            </a:pPr>
-            <a:r>
-              <a:rPr sz="1500" b="0" i="0">
-                <a:solidFill>
-                  <a:srgbClr val="33231C"/>
-                </a:solidFill>
-                <a:latin typeface="Noto Sans"/>
-              </a:rPr>
-              <a:t>Dorong pembayaran kartu kredit dengan cicilan karena 51.5 persen order sudah terbiasa mencicil, sekaligus pantau kategori berisiko tinggi</a:t>
+              <a:t>: star schema, measure DAX terverifikasi, layout 4 halaman, dan panduan rakit ada di folder powerbi pada repo ini.</a:t>
             </a:r>
           </a:p>
         </p:txBody>
